--- a/projects/13-Hopcroft/slides/presentation_hopcroft.pptx
+++ b/projects/13-Hopcroft/slides/presentation_hopcroft.pptx
@@ -24,7 +24,6 @@
     <p:sldId id="269" r:id="rId20"/>
     <p:sldId id="270" r:id="rId21"/>
     <p:sldId id="271" r:id="rId22"/>
-    <p:sldId id="272" r:id="rId23"/>
   </p:sldIdLst>
   <p:sldSz cy="5143500" cx="9144000"/>
   <p:notesSz cx="6858000" cy="9144000"/>
@@ -820,7 +819,7 @@
       </p:grpSpPr>
       <p:sp>
         <p:nvSpPr>
-          <p:cNvPr id="124" name="Google Shape;124;g3d97345575a_0_0:notes"/>
+          <p:cNvPr id="124" name="Google Shape;124;g3d97345575a_0_23:notes"/>
           <p:cNvSpPr/>
           <p:nvPr>
             <p:ph idx="2" type="sldImg"/>
@@ -855,7 +854,7 @@
       </p:sp>
       <p:sp>
         <p:nvSpPr>
-          <p:cNvPr id="125" name="Google Shape;125;g3d97345575a_0_0:notes"/>
+          <p:cNvPr id="125" name="Google Shape;125;g3d97345575a_0_23:notes"/>
           <p:cNvSpPr txBox="1"/>
           <p:nvPr>
             <p:ph idx="1" type="body"/>
@@ -923,7 +922,7 @@
       </p:grpSpPr>
       <p:sp>
         <p:nvSpPr>
-          <p:cNvPr id="132" name="Google Shape;132;g3d97345575a_0_23:notes"/>
+          <p:cNvPr id="132" name="Google Shape;132;g3d9329e581d_6_28:notes"/>
           <p:cNvSpPr/>
           <p:nvPr>
             <p:ph idx="2" type="sldImg"/>
@@ -958,7 +957,7 @@
       </p:sp>
       <p:sp>
         <p:nvSpPr>
-          <p:cNvPr id="133" name="Google Shape;133;g3d97345575a_0_23:notes"/>
+          <p:cNvPr id="133" name="Google Shape;133;g3d9329e581d_6_28:notes"/>
           <p:cNvSpPr txBox="1"/>
           <p:nvPr>
             <p:ph idx="1" type="body"/>
@@ -989,13 +988,10 @@
               <a:buNone/>
             </a:pPr>
             <a:r>
-              <a:t/>
-            </a:r>
-            <a:endParaRPr>
-              <a:solidFill>
-                <a:schemeClr val="dk1"/>
-              </a:solidFill>
-            </a:endParaRPr>
+              <a:rPr lang="en"/>
+              <a:t>yog</a:t>
+            </a:r>
+            <a:endParaRPr/>
           </a:p>
         </p:txBody>
       </p:sp>
@@ -1012,7 +1008,7 @@
   <p:cSld>
     <p:spTree>
       <p:nvGrpSpPr>
-        <p:cNvPr id="139" name="Shape 139"/>
+        <p:cNvPr id="142" name="Shape 142"/>
         <p:cNvGrpSpPr/>
         <p:nvPr/>
       </p:nvGrpSpPr>
@@ -1026,7 +1022,7 @@
       </p:grpSpPr>
       <p:sp>
         <p:nvSpPr>
-          <p:cNvPr id="140" name="Google Shape;140;g3d9329e581d_6_28:notes"/>
+          <p:cNvPr id="143" name="Google Shape;143;g3d9329e581d_6_43:notes"/>
           <p:cNvSpPr/>
           <p:nvPr>
             <p:ph idx="2" type="sldImg"/>
@@ -1061,7 +1057,7 @@
       </p:sp>
       <p:sp>
         <p:nvSpPr>
-          <p:cNvPr id="141" name="Google Shape;141;g3d9329e581d_6_28:notes"/>
+          <p:cNvPr id="144" name="Google Shape;144;g3d9329e581d_6_43:notes"/>
           <p:cNvSpPr txBox="1"/>
           <p:nvPr>
             <p:ph idx="1" type="body"/>
@@ -1092,7 +1088,44 @@
               <a:buNone/>
             </a:pPr>
             <a:r>
-              <a:t/>
+              <a:rPr lang="en"/>
+              <a:t>We repeatedly split groups until all states in a group behave identically for every input and the worklist gets empty.</a:t>
+            </a:r>
+            <a:endParaRPr/>
+          </a:p>
+          <a:p>
+            <a:pPr indent="0" lvl="0" marL="0" rtl="0" algn="l">
+              <a:spcBef>
+                <a:spcPts val="0"/>
+              </a:spcBef>
+              <a:spcAft>
+                <a:spcPts val="0"/>
+              </a:spcAft>
+              <a:buNone/>
+            </a:pPr>
+            <a:r>
+              <a:rPr lang="en"/>
+              <a:t>d</a:t>
+            </a:r>
+            <a:r>
+              <a:rPr lang="en"/>
+              <a:t>ifference</a:t>
+            </a:r>
+            <a:endParaRPr/>
+          </a:p>
+          <a:p>
+            <a:pPr indent="0" lvl="0" marL="0" rtl="0" algn="l">
+              <a:spcBef>
+                <a:spcPts val="0"/>
+              </a:spcBef>
+              <a:spcAft>
+                <a:spcPts val="0"/>
+              </a:spcAft>
+              <a:buNone/>
+            </a:pPr>
+            <a:r>
+              <a:rPr lang="en"/>
+              <a:t>yog</a:t>
             </a:r>
             <a:endParaRPr/>
           </a:p>
@@ -1111,7 +1144,7 @@
   <p:cSld>
     <p:spTree>
       <p:nvGrpSpPr>
-        <p:cNvPr id="150" name="Shape 150"/>
+        <p:cNvPr id="154" name="Shape 154"/>
         <p:cNvGrpSpPr/>
         <p:nvPr/>
       </p:nvGrpSpPr>
@@ -1125,7 +1158,7 @@
       </p:grpSpPr>
       <p:sp>
         <p:nvSpPr>
-          <p:cNvPr id="151" name="Google Shape;151;g3d9329e581d_6_43:notes"/>
+          <p:cNvPr id="155" name="Google Shape;155;g3d9329e581d_6_63:notes"/>
           <p:cNvSpPr/>
           <p:nvPr>
             <p:ph idx="2" type="sldImg"/>
@@ -1160,7 +1193,7 @@
       </p:sp>
       <p:sp>
         <p:nvSpPr>
-          <p:cNvPr id="152" name="Google Shape;152;g3d9329e581d_6_43:notes"/>
+          <p:cNvPr id="156" name="Google Shape;156;g3d9329e581d_6_63:notes"/>
           <p:cNvSpPr txBox="1"/>
           <p:nvPr>
             <p:ph idx="1" type="body"/>
@@ -1192,7 +1225,7 @@
             </a:pPr>
             <a:r>
               <a:rPr lang="en"/>
-              <a:t>We repeatedly split groups until all states in a group behave identically for every input and the worklist gets empty.</a:t>
+              <a:t>yog</a:t>
             </a:r>
             <a:endParaRPr/>
           </a:p>
@@ -1211,7 +1244,7 @@
   <p:cSld>
     <p:spTree>
       <p:nvGrpSpPr>
-        <p:cNvPr id="162" name="Shape 162"/>
+        <p:cNvPr id="167" name="Shape 167"/>
         <p:cNvGrpSpPr/>
         <p:nvPr/>
       </p:nvGrpSpPr>
@@ -1225,7 +1258,7 @@
       </p:grpSpPr>
       <p:sp>
         <p:nvSpPr>
-          <p:cNvPr id="163" name="Google Shape;163;g3d9329e581d_6_63:notes"/>
+          <p:cNvPr id="168" name="Google Shape;168;g3d9329e581d_0_15:notes"/>
           <p:cNvSpPr/>
           <p:nvPr>
             <p:ph idx="2" type="sldImg"/>
@@ -1260,7 +1293,7 @@
       </p:sp>
       <p:sp>
         <p:nvSpPr>
-          <p:cNvPr id="164" name="Google Shape;164;g3d9329e581d_6_63:notes"/>
+          <p:cNvPr id="169" name="Google Shape;169;g3d9329e581d_0_15:notes"/>
           <p:cNvSpPr txBox="1"/>
           <p:nvPr>
             <p:ph idx="1" type="body"/>
@@ -1310,7 +1343,7 @@
   <p:cSld>
     <p:spTree>
       <p:nvGrpSpPr>
-        <p:cNvPr id="175" name="Shape 175"/>
+        <p:cNvPr id="174" name="Shape 174"/>
         <p:cNvGrpSpPr/>
         <p:nvPr/>
       </p:nvGrpSpPr>
@@ -1324,7 +1357,7 @@
       </p:grpSpPr>
       <p:sp>
         <p:nvSpPr>
-          <p:cNvPr id="176" name="Google Shape;176;g3d9329e581d_0_15:notes"/>
+          <p:cNvPr id="175" name="Google Shape;175;g3d9329e581d_0_278:notes"/>
           <p:cNvSpPr/>
           <p:nvPr>
             <p:ph idx="2" type="sldImg"/>
@@ -1359,7 +1392,7 @@
       </p:sp>
       <p:sp>
         <p:nvSpPr>
-          <p:cNvPr id="177" name="Google Shape;177;g3d9329e581d_0_15:notes"/>
+          <p:cNvPr id="176" name="Google Shape;176;g3d9329e581d_0_278:notes"/>
           <p:cNvSpPr txBox="1"/>
           <p:nvPr>
             <p:ph idx="1" type="body"/>
@@ -1409,7 +1442,7 @@
   <p:cSld>
     <p:spTree>
       <p:nvGrpSpPr>
-        <p:cNvPr id="182" name="Shape 182"/>
+        <p:cNvPr id="181" name="Shape 181"/>
         <p:cNvGrpSpPr/>
         <p:nvPr/>
       </p:nvGrpSpPr>
@@ -1423,7 +1456,7 @@
       </p:grpSpPr>
       <p:sp>
         <p:nvSpPr>
-          <p:cNvPr id="183" name="Google Shape;183;g3d9329e581d_0_278:notes"/>
+          <p:cNvPr id="182" name="Google Shape;182;g3d9329e581d_0_20:notes"/>
           <p:cNvSpPr/>
           <p:nvPr>
             <p:ph idx="2" type="sldImg"/>
@@ -1458,7 +1491,7 @@
       </p:sp>
       <p:sp>
         <p:nvSpPr>
-          <p:cNvPr id="184" name="Google Shape;184;g3d9329e581d_0_278:notes"/>
+          <p:cNvPr id="183" name="Google Shape;183;g3d9329e581d_0_20:notes"/>
           <p:cNvSpPr txBox="1"/>
           <p:nvPr>
             <p:ph idx="1" type="body"/>
@@ -1489,94 +1522,16 @@
               <a:buNone/>
             </a:pPr>
             <a:r>
-              <a:t/>
+              <a:rPr lang="en" u="sng">
+                <a:solidFill>
+                  <a:schemeClr val="hlink"/>
+                </a:solidFill>
+                <a:hlinkClick r:id="rId2"/>
+              </a:rPr>
+              <a:t>https://steemit.com/programming/@drifter1/writing-a-simple-compiler-on-my-own-lexical-analysis-using-flex</a:t>
             </a:r>
             <a:endParaRPr/>
           </a:p>
-        </p:txBody>
-      </p:sp>
-    </p:spTree>
-  </p:cSld>
-  <p:clrMapOvr>
-    <a:masterClrMapping/>
-  </p:clrMapOvr>
-</p:notes>
-</file>
-
-<file path=ppt/notesSlides/notesSlide17.xml><?xml version="1.0" encoding="utf-8"?>
-<p:notes xmlns:a="http://schemas.openxmlformats.org/drawingml/2006/main" xmlns:r="http://schemas.openxmlformats.org/officeDocument/2006/relationships" xmlns:mc="http://schemas.openxmlformats.org/markup-compatibility/2006" xmlns:mv="urn:schemas-microsoft-com:mac:vml" xmlns:p="http://schemas.openxmlformats.org/presentationml/2006/main" xmlns:c="http://schemas.openxmlformats.org/drawingml/2006/chart" xmlns:dgm="http://schemas.openxmlformats.org/drawingml/2006/diagram" xmlns:o="urn:schemas-microsoft-com:office:office" xmlns:v="urn:schemas-microsoft-com:vml" xmlns:pvml="urn:schemas-microsoft-com:office:powerpoint" xmlns:com="http://schemas.openxmlformats.org/drawingml/2006/compatibility" xmlns:p14="http://schemas.microsoft.com/office/powerpoint/2010/main" xmlns:p15="http://schemas.microsoft.com/office/powerpoint/2012/main" xmlns:ahyp="http://schemas.microsoft.com/office/drawing/2018/hyperlinkcolor" showMasterPhAnim="0" showMasterSp="0">
-  <p:cSld>
-    <p:spTree>
-      <p:nvGrpSpPr>
-        <p:cNvPr id="189" name="Shape 189"/>
-        <p:cNvGrpSpPr/>
-        <p:nvPr/>
-      </p:nvGrpSpPr>
-      <p:grpSpPr>
-        <a:xfrm>
-          <a:off x="0" y="0"/>
-          <a:ext cx="0" cy="0"/>
-          <a:chOff x="0" y="0"/>
-          <a:chExt cx="0" cy="0"/>
-        </a:xfrm>
-      </p:grpSpPr>
-      <p:sp>
-        <p:nvSpPr>
-          <p:cNvPr id="190" name="Google Shape;190;g3d9329e581d_0_20:notes"/>
-          <p:cNvSpPr/>
-          <p:nvPr>
-            <p:ph idx="2" type="sldImg"/>
-          </p:nvPr>
-        </p:nvSpPr>
-        <p:spPr>
-          <a:xfrm>
-            <a:off x="381300" y="685800"/>
-            <a:ext cx="6096000" cy="3429000"/>
-          </a:xfrm>
-          <a:custGeom>
-            <a:rect b="b" l="l" r="r" t="t"/>
-            <a:pathLst>
-              <a:path extrusionOk="0" h="120000" w="120000">
-                <a:moveTo>
-                  <a:pt x="0" y="0"/>
-                </a:moveTo>
-                <a:lnTo>
-                  <a:pt x="120000" y="0"/>
-                </a:lnTo>
-                <a:lnTo>
-                  <a:pt x="120000" y="120000"/>
-                </a:lnTo>
-                <a:lnTo>
-                  <a:pt x="0" y="120000"/>
-                </a:lnTo>
-                <a:close/>
-              </a:path>
-            </a:pathLst>
-          </a:custGeom>
-        </p:spPr>
-      </p:sp>
-      <p:sp>
-        <p:nvSpPr>
-          <p:cNvPr id="191" name="Google Shape;191;g3d9329e581d_0_20:notes"/>
-          <p:cNvSpPr txBox="1"/>
-          <p:nvPr>
-            <p:ph idx="1" type="body"/>
-          </p:nvPr>
-        </p:nvSpPr>
-        <p:spPr>
-          <a:xfrm>
-            <a:off x="685800" y="4343400"/>
-            <a:ext cx="5486400" cy="4114800"/>
-          </a:xfrm>
-          <a:prstGeom prst="rect">
-            <a:avLst/>
-          </a:prstGeom>
-        </p:spPr>
-        <p:txBody>
-          <a:bodyPr anchorCtr="0" anchor="t" bIns="91425" lIns="91425" spcFirstLastPara="1" rIns="91425" wrap="square" tIns="91425">
-            <a:noAutofit/>
-          </a:bodyPr>
-          <a:lstStyle/>
           <a:p>
             <a:pPr indent="0" lvl="0" marL="0" rtl="0" algn="l">
               <a:spcBef>
@@ -1588,13 +1543,8 @@
               <a:buNone/>
             </a:pPr>
             <a:r>
-              <a:rPr lang="en" u="sng">
-                <a:solidFill>
-                  <a:schemeClr val="hlink"/>
-                </a:solidFill>
-                <a:hlinkClick r:id="rId2"/>
-              </a:rPr>
-              <a:t>https://steemit.com/programming/@drifter1/writing-a-simple-compiler-on-my-own-lexical-analysis-using-flex</a:t>
+              <a:rPr lang="en"/>
+              <a:t>yog</a:t>
             </a:r>
             <a:endParaRPr/>
           </a:p>
@@ -1984,7 +1934,7 @@
       </p:grpSpPr>
       <p:sp>
         <p:nvSpPr>
-          <p:cNvPr id="84" name="Google Shape;84;g3d9329e581d_7_15:notes"/>
+          <p:cNvPr id="84" name="Google Shape;84;g3d9329e581d_7_27:notes"/>
           <p:cNvSpPr/>
           <p:nvPr>
             <p:ph idx="2" type="sldImg"/>
@@ -2019,7 +1969,7 @@
       </p:sp>
       <p:sp>
         <p:nvSpPr>
-          <p:cNvPr id="85" name="Google Shape;85;g3d9329e581d_7_15:notes"/>
+          <p:cNvPr id="85" name="Google Shape;85;g3d9329e581d_7_27:notes"/>
           <p:cNvSpPr txBox="1"/>
           <p:nvPr>
             <p:ph idx="1" type="body"/>
@@ -2083,7 +2033,7 @@
       </p:grpSpPr>
       <p:sp>
         <p:nvSpPr>
-          <p:cNvPr id="92" name="Google Shape;92;g3d9329e581d_7_27:notes"/>
+          <p:cNvPr id="92" name="Google Shape;92;g3d9329e581d_7_39:notes"/>
           <p:cNvSpPr/>
           <p:nvPr>
             <p:ph idx="2" type="sldImg"/>
@@ -2118,7 +2068,7 @@
       </p:sp>
       <p:sp>
         <p:nvSpPr>
-          <p:cNvPr id="93" name="Google Shape;93;g3d9329e581d_7_27:notes"/>
+          <p:cNvPr id="93" name="Google Shape;93;g3d9329e581d_7_39:notes"/>
           <p:cNvSpPr txBox="1"/>
           <p:nvPr>
             <p:ph idx="1" type="body"/>
@@ -2151,7 +2101,30 @@
             <a:r>
               <a:t/>
             </a:r>
-            <a:endParaRPr/>
+            <a:endParaRPr>
+              <a:solidFill>
+                <a:schemeClr val="dk1"/>
+              </a:solidFill>
+            </a:endParaRPr>
+          </a:p>
+          <a:p>
+            <a:pPr indent="0" lvl="0" marL="0" rtl="0" algn="l">
+              <a:spcBef>
+                <a:spcPts val="0"/>
+              </a:spcBef>
+              <a:spcAft>
+                <a:spcPts val="0"/>
+              </a:spcAft>
+              <a:buNone/>
+            </a:pPr>
+            <a:r>
+              <a:t/>
+            </a:r>
+            <a:endParaRPr>
+              <a:solidFill>
+                <a:schemeClr val="dk1"/>
+              </a:solidFill>
+            </a:endParaRPr>
           </a:p>
         </p:txBody>
       </p:sp>
@@ -2182,7 +2155,7 @@
       </p:grpSpPr>
       <p:sp>
         <p:nvSpPr>
-          <p:cNvPr id="100" name="Google Shape;100;g3d9329e581d_7_39:notes"/>
+          <p:cNvPr id="100" name="Google Shape;100;g3d9329e581d_8_5:notes"/>
           <p:cNvSpPr/>
           <p:nvPr>
             <p:ph idx="2" type="sldImg"/>
@@ -2217,7 +2190,7 @@
       </p:sp>
       <p:sp>
         <p:nvSpPr>
-          <p:cNvPr id="101" name="Google Shape;101;g3d9329e581d_7_39:notes"/>
+          <p:cNvPr id="101" name="Google Shape;101;g3d9329e581d_8_5:notes"/>
           <p:cNvSpPr txBox="1"/>
           <p:nvPr>
             <p:ph idx="1" type="body"/>
@@ -2304,7 +2277,7 @@
       </p:grpSpPr>
       <p:sp>
         <p:nvSpPr>
-          <p:cNvPr id="108" name="Google Shape;108;g3d9329e581d_8_5:notes"/>
+          <p:cNvPr id="108" name="Google Shape;108;g3d9329e581d_8_19:notes"/>
           <p:cNvSpPr/>
           <p:nvPr>
             <p:ph idx="2" type="sldImg"/>
@@ -2339,7 +2312,7 @@
       </p:sp>
       <p:sp>
         <p:nvSpPr>
-          <p:cNvPr id="109" name="Google Shape;109;g3d9329e581d_8_5:notes"/>
+          <p:cNvPr id="109" name="Google Shape;109;g3d9329e581d_8_19:notes"/>
           <p:cNvSpPr txBox="1"/>
           <p:nvPr>
             <p:ph idx="1" type="body"/>
@@ -2359,25 +2332,6 @@
             <a:noAutofit/>
           </a:bodyPr>
           <a:lstStyle/>
-          <a:p>
-            <a:pPr indent="0" lvl="0" marL="0" rtl="0" algn="l">
-              <a:spcBef>
-                <a:spcPts val="0"/>
-              </a:spcBef>
-              <a:spcAft>
-                <a:spcPts val="0"/>
-              </a:spcAft>
-              <a:buNone/>
-            </a:pPr>
-            <a:r>
-              <a:t/>
-            </a:r>
-            <a:endParaRPr>
-              <a:solidFill>
-                <a:schemeClr val="dk1"/>
-              </a:solidFill>
-            </a:endParaRPr>
-          </a:p>
           <a:p>
             <a:pPr indent="0" lvl="0" marL="0" rtl="0" algn="l">
               <a:spcBef>
@@ -2426,7 +2380,7 @@
       </p:grpSpPr>
       <p:sp>
         <p:nvSpPr>
-          <p:cNvPr id="116" name="Google Shape;116;g3d9329e581d_8_19:notes"/>
+          <p:cNvPr id="116" name="Google Shape;116;g3d97345575a_0_0:notes"/>
           <p:cNvSpPr/>
           <p:nvPr>
             <p:ph idx="2" type="sldImg"/>
@@ -2461,7 +2415,7 @@
       </p:sp>
       <p:sp>
         <p:nvSpPr>
-          <p:cNvPr id="117" name="Google Shape;117;g3d9329e581d_8_19:notes"/>
+          <p:cNvPr id="117" name="Google Shape;117;g3d97345575a_0_0:notes"/>
           <p:cNvSpPr txBox="1"/>
           <p:nvPr>
             <p:ph idx="1" type="body"/>
@@ -7384,14 +7338,386 @@
           </a:p>
         </p:txBody>
       </p:sp>
+      <p:sp>
+        <p:nvSpPr>
+          <p:cNvPr id="128" name="Google Shape;128;p22"/>
+          <p:cNvSpPr txBox="1"/>
+          <p:nvPr/>
+        </p:nvSpPr>
+        <p:spPr>
+          <a:xfrm>
+            <a:off x="363150" y="1091500"/>
+            <a:ext cx="3761700" cy="4617600"/>
+          </a:xfrm>
+          <a:prstGeom prst="rect">
+            <a:avLst/>
+          </a:prstGeom>
+          <a:noFill/>
+          <a:ln>
+            <a:noFill/>
+          </a:ln>
+        </p:spPr>
+        <p:txBody>
+          <a:bodyPr anchorCtr="0" anchor="t" bIns="91425" lIns="91425" spcFirstLastPara="1" rIns="91425" wrap="square" tIns="91425">
+            <a:spAutoFit/>
+          </a:bodyPr>
+          <a:lstStyle/>
+          <a:p>
+            <a:pPr indent="0" lvl="0" marL="0" rtl="0" algn="l">
+              <a:spcBef>
+                <a:spcPts val="0"/>
+              </a:spcBef>
+              <a:spcAft>
+                <a:spcPts val="0"/>
+              </a:spcAft>
+              <a:buNone/>
+            </a:pPr>
+            <a:r>
+              <a:rPr lang="en" sz="1800">
+                <a:solidFill>
+                  <a:schemeClr val="dk1"/>
+                </a:solidFill>
+              </a:rPr>
+              <a:t>Final </a:t>
+            </a:r>
+            <a:r>
+              <a:rPr lang="en" sz="1800">
+                <a:solidFill>
+                  <a:schemeClr val="dk1"/>
+                </a:solidFill>
+              </a:rPr>
+              <a:t>Partitions </a:t>
+            </a:r>
+            <a:endParaRPr sz="1800">
+              <a:solidFill>
+                <a:schemeClr val="dk1"/>
+              </a:solidFill>
+            </a:endParaRPr>
+          </a:p>
+          <a:p>
+            <a:pPr indent="0" lvl="0" marL="0" rtl="0" algn="l">
+              <a:spcBef>
+                <a:spcPts val="0"/>
+              </a:spcBef>
+              <a:spcAft>
+                <a:spcPts val="0"/>
+              </a:spcAft>
+              <a:buNone/>
+            </a:pPr>
+            <a:r>
+              <a:rPr lang="en" sz="1800">
+                <a:solidFill>
+                  <a:schemeClr val="dk1"/>
+                </a:solidFill>
+                <a:highlight>
+                  <a:srgbClr val="38761D"/>
+                </a:highlight>
+              </a:rPr>
+              <a:t>S1</a:t>
+            </a:r>
+            <a:r>
+              <a:rPr lang="en" sz="1800">
+                <a:solidFill>
+                  <a:schemeClr val="dk1"/>
+                </a:solidFill>
+              </a:rPr>
+              <a:t> = {q3, q4} </a:t>
+            </a:r>
+            <a:endParaRPr sz="1800">
+              <a:solidFill>
+                <a:schemeClr val="dk1"/>
+              </a:solidFill>
+            </a:endParaRPr>
+          </a:p>
+          <a:p>
+            <a:pPr indent="0" lvl="0" marL="0" rtl="0" algn="l">
+              <a:spcBef>
+                <a:spcPts val="0"/>
+              </a:spcBef>
+              <a:spcAft>
+                <a:spcPts val="0"/>
+              </a:spcAft>
+              <a:buNone/>
+            </a:pPr>
+            <a:r>
+              <a:rPr lang="en" sz="1800">
+                <a:solidFill>
+                  <a:schemeClr val="dk1"/>
+                </a:solidFill>
+                <a:highlight>
+                  <a:srgbClr val="FF0000"/>
+                </a:highlight>
+              </a:rPr>
+              <a:t>S2</a:t>
+            </a:r>
+            <a:r>
+              <a:rPr lang="en" sz="1800">
+                <a:solidFill>
+                  <a:schemeClr val="dk1"/>
+                </a:solidFill>
+              </a:rPr>
+              <a:t> = {q2, q5}</a:t>
+            </a:r>
+            <a:endParaRPr sz="1800">
+              <a:solidFill>
+                <a:schemeClr val="dk1"/>
+              </a:solidFill>
+            </a:endParaRPr>
+          </a:p>
+          <a:p>
+            <a:pPr indent="0" lvl="0" marL="0" rtl="0" algn="l">
+              <a:spcBef>
+                <a:spcPts val="0"/>
+              </a:spcBef>
+              <a:spcAft>
+                <a:spcPts val="0"/>
+              </a:spcAft>
+              <a:buNone/>
+            </a:pPr>
+            <a:r>
+              <a:rPr lang="en" sz="1800">
+                <a:solidFill>
+                  <a:schemeClr val="dk1"/>
+                </a:solidFill>
+                <a:highlight>
+                  <a:srgbClr val="BF9000"/>
+                </a:highlight>
+              </a:rPr>
+              <a:t>S3</a:t>
+            </a:r>
+            <a:r>
+              <a:rPr lang="en" sz="1800">
+                <a:solidFill>
+                  <a:schemeClr val="dk1"/>
+                </a:solidFill>
+              </a:rPr>
+              <a:t> = {q0, q1}</a:t>
+            </a:r>
+            <a:endParaRPr sz="1800">
+              <a:solidFill>
+                <a:schemeClr val="dk1"/>
+              </a:solidFill>
+            </a:endParaRPr>
+          </a:p>
+          <a:p>
+            <a:pPr indent="0" lvl="0" marL="0" rtl="0" algn="l">
+              <a:spcBef>
+                <a:spcPts val="0"/>
+              </a:spcBef>
+              <a:spcAft>
+                <a:spcPts val="0"/>
+              </a:spcAft>
+              <a:buNone/>
+            </a:pPr>
+            <a:r>
+              <a:t/>
+            </a:r>
+            <a:endParaRPr sz="1800">
+              <a:solidFill>
+                <a:schemeClr val="dk1"/>
+              </a:solidFill>
+            </a:endParaRPr>
+          </a:p>
+          <a:p>
+            <a:pPr indent="0" lvl="0" marL="0" rtl="0" algn="l">
+              <a:spcBef>
+                <a:spcPts val="0"/>
+              </a:spcBef>
+              <a:spcAft>
+                <a:spcPts val="0"/>
+              </a:spcAft>
+              <a:buNone/>
+            </a:pPr>
+            <a:r>
+              <a:t/>
+            </a:r>
+            <a:endParaRPr sz="1800">
+              <a:solidFill>
+                <a:schemeClr val="dk1"/>
+              </a:solidFill>
+            </a:endParaRPr>
+          </a:p>
+          <a:p>
+            <a:pPr indent="0" lvl="0" marL="0" rtl="0" algn="l">
+              <a:spcBef>
+                <a:spcPts val="0"/>
+              </a:spcBef>
+              <a:spcAft>
+                <a:spcPts val="0"/>
+              </a:spcAft>
+              <a:buNone/>
+            </a:pPr>
+            <a:r>
+              <a:rPr lang="en" sz="1800">
+                <a:solidFill>
+                  <a:schemeClr val="dk1"/>
+                </a:solidFill>
+              </a:rPr>
+              <a:t>States are grouped that behave the same in relation to other partitions</a:t>
+            </a:r>
+            <a:endParaRPr sz="1800">
+              <a:solidFill>
+                <a:schemeClr val="dk1"/>
+              </a:solidFill>
+            </a:endParaRPr>
+          </a:p>
+          <a:p>
+            <a:pPr indent="0" lvl="0" marL="0" rtl="0" algn="l">
+              <a:spcBef>
+                <a:spcPts val="0"/>
+              </a:spcBef>
+              <a:spcAft>
+                <a:spcPts val="0"/>
+              </a:spcAft>
+              <a:buNone/>
+            </a:pPr>
+            <a:r>
+              <a:t/>
+            </a:r>
+            <a:endParaRPr sz="1800">
+              <a:solidFill>
+                <a:schemeClr val="dk1"/>
+              </a:solidFill>
+            </a:endParaRPr>
+          </a:p>
+          <a:p>
+            <a:pPr indent="0" lvl="0" marL="0" rtl="0" algn="l">
+              <a:spcBef>
+                <a:spcPts val="0"/>
+              </a:spcBef>
+              <a:spcAft>
+                <a:spcPts val="0"/>
+              </a:spcAft>
+              <a:buNone/>
+            </a:pPr>
+            <a:r>
+              <a:rPr lang="en" sz="1800">
+                <a:solidFill>
+                  <a:schemeClr val="dk1"/>
+                </a:solidFill>
+              </a:rPr>
+              <a:t>Each partition can be represented by a single state. </a:t>
+            </a:r>
+            <a:endParaRPr sz="1800">
+              <a:solidFill>
+                <a:schemeClr val="dk1"/>
+              </a:solidFill>
+            </a:endParaRPr>
+          </a:p>
+          <a:p>
+            <a:pPr indent="0" lvl="0" marL="0" rtl="0" algn="l">
+              <a:spcBef>
+                <a:spcPts val="0"/>
+              </a:spcBef>
+              <a:spcAft>
+                <a:spcPts val="0"/>
+              </a:spcAft>
+              <a:buNone/>
+            </a:pPr>
+            <a:r>
+              <a:t/>
+            </a:r>
+            <a:endParaRPr sz="1800">
+              <a:solidFill>
+                <a:schemeClr val="dk1"/>
+              </a:solidFill>
+            </a:endParaRPr>
+          </a:p>
+          <a:p>
+            <a:pPr indent="0" lvl="0" marL="0" rtl="0" algn="l">
+              <a:spcBef>
+                <a:spcPts val="0"/>
+              </a:spcBef>
+              <a:spcAft>
+                <a:spcPts val="0"/>
+              </a:spcAft>
+              <a:buNone/>
+            </a:pPr>
+            <a:r>
+              <a:t/>
+            </a:r>
+            <a:endParaRPr sz="1800">
+              <a:solidFill>
+                <a:schemeClr val="dk1"/>
+              </a:solidFill>
+            </a:endParaRPr>
+          </a:p>
+          <a:p>
+            <a:pPr indent="0" lvl="0" marL="0" rtl="0" algn="l">
+              <a:spcBef>
+                <a:spcPts val="0"/>
+              </a:spcBef>
+              <a:spcAft>
+                <a:spcPts val="0"/>
+              </a:spcAft>
+              <a:buNone/>
+            </a:pPr>
+            <a:r>
+              <a:t/>
+            </a:r>
+            <a:endParaRPr sz="1800">
+              <a:solidFill>
+                <a:schemeClr val="dk1"/>
+              </a:solidFill>
+            </a:endParaRPr>
+          </a:p>
+          <a:p>
+            <a:pPr indent="0" lvl="0" marL="0" rtl="0" algn="l">
+              <a:spcBef>
+                <a:spcPts val="0"/>
+              </a:spcBef>
+              <a:spcAft>
+                <a:spcPts val="0"/>
+              </a:spcAft>
+              <a:buNone/>
+            </a:pPr>
+            <a:r>
+              <a:t/>
+            </a:r>
+            <a:endParaRPr sz="1800">
+              <a:solidFill>
+                <a:schemeClr val="dk1"/>
+              </a:solidFill>
+            </a:endParaRPr>
+          </a:p>
+        </p:txBody>
+      </p:sp>
+      <p:pic>
+        <p:nvPicPr>
+          <p:cNvPr id="129" name="Google Shape;129;p22"/>
+          <p:cNvPicPr preferRelativeResize="0"/>
+          <p:nvPr/>
+        </p:nvPicPr>
+        <p:blipFill>
+          <a:blip r:embed="rId3">
+            <a:alphaModFix/>
+          </a:blip>
+          <a:stretch>
+            <a:fillRect/>
+          </a:stretch>
+        </p:blipFill>
+        <p:spPr>
+          <a:xfrm>
+            <a:off x="4352200" y="445026"/>
+            <a:ext cx="4420750" cy="3907250"/>
+          </a:xfrm>
+          <a:prstGeom prst="rect">
+            <a:avLst/>
+          </a:prstGeom>
+          <a:noFill/>
+          <a:ln>
+            <a:noFill/>
+          </a:ln>
+        </p:spPr>
+      </p:pic>
       <p:graphicFrame>
         <p:nvGraphicFramePr>
-          <p:cNvPr id="128" name="Google Shape;128;p22"/>
+          <p:cNvPr id="130" name="Google Shape;130;p22"/>
           <p:cNvGraphicFramePr/>
           <p:nvPr/>
         </p:nvGraphicFramePr>
         <p:xfrm>
-          <a:off x="4048625" y="1185050"/>
+          <a:off x="2503163" y="872125"/>
           <a:ext cx="3000000" cy="3000000"/>
         </p:xfrm>
         <a:graphic>
@@ -7399,14 +7725,14 @@
             <a:tbl>
               <a:tblPr>
                 <a:noFill/>
-                <a:tableStyleId>{7B1D232C-E315-488B-8EF8-48D490293407}</a:tableStyleId>
+                <a:tableStyleId>{B52B1555-68B5-4C20-843E-69694589948E}</a:tableStyleId>
               </a:tblPr>
               <a:tblGrid>
                 <a:gridCol w="568125"/>
                 <a:gridCol w="568125"/>
                 <a:gridCol w="568125"/>
               </a:tblGrid>
-              <a:tr h="387425">
+              <a:tr h="392625">
                 <a:tc>
                   <a:txBody>
                     <a:bodyPr/>
@@ -7501,44 +7827,7 @@
                   <a:tcPr marT="91425" marB="91425" marR="91425" marL="91425"/>
                 </a:tc>
               </a:tr>
-              <a:tr h="387425">
-                <a:tc>
-                  <a:txBody>
-                    <a:bodyPr/>
-                    <a:lstStyle/>
-                    <a:p>
-                      <a:pPr indent="0" lvl="0" marL="0" rtl="0" algn="l">
-                        <a:spcBef>
-                          <a:spcPts val="0"/>
-                        </a:spcBef>
-                        <a:spcAft>
-                          <a:spcPts val="0"/>
-                        </a:spcAft>
-                        <a:buNone/>
-                      </a:pPr>
-                      <a:r>
-                        <a:rPr lang="en">
-                          <a:solidFill>
-                            <a:srgbClr val="FFFFFF"/>
-                          </a:solidFill>
-                          <a:highlight>
-                            <a:srgbClr val="BF9000"/>
-                          </a:highlight>
-                        </a:rPr>
-                        <a:t>q0</a:t>
-                      </a:r>
-                      <a:endParaRPr>
-                        <a:solidFill>
-                          <a:srgbClr val="FFFFFF"/>
-                        </a:solidFill>
-                        <a:highlight>
-                          <a:srgbClr val="BF9000"/>
-                        </a:highlight>
-                      </a:endParaRPr>
-                    </a:p>
-                  </a:txBody>
-                  <a:tcPr marT="91425" marB="91425" marR="91425" marL="91425"/>
-                </a:tc>
+              <a:tr h="392625">
                 <a:tc>
                   <a:txBody>
                     <a:bodyPr/>
@@ -7559,7 +7848,7 @@
                             <a:srgbClr val="FFFFFF"/>
                           </a:solidFill>
                         </a:rPr>
-                        <a:t>q1</a:t>
+                        <a:t>s1</a:t>
                       </a:r>
                       <a:endParaRPr>
                         <a:solidFill>
@@ -7589,84 +7878,8 @@
                           <a:solidFill>
                             <a:srgbClr val="FFFFFF"/>
                           </a:solidFill>
-                          <a:highlight>
-                            <a:srgbClr val="38761D"/>
-                          </a:highlight>
                         </a:rPr>
-                        <a:t>q3</a:t>
-                      </a:r>
-                      <a:endParaRPr>
-                        <a:solidFill>
-                          <a:srgbClr val="FFFFFF"/>
-                        </a:solidFill>
-                        <a:highlight>
-                          <a:srgbClr val="38761D"/>
-                        </a:highlight>
-                      </a:endParaRPr>
-                    </a:p>
-                  </a:txBody>
-                  <a:tcPr marT="91425" marB="91425" marR="91425" marL="91425"/>
-                </a:tc>
-              </a:tr>
-              <a:tr h="387425">
-                <a:tc>
-                  <a:txBody>
-                    <a:bodyPr/>
-                    <a:lstStyle/>
-                    <a:p>
-                      <a:pPr indent="0" lvl="0" marL="0" rtl="0" algn="l">
-                        <a:spcBef>
-                          <a:spcPts val="0"/>
-                        </a:spcBef>
-                        <a:spcAft>
-                          <a:spcPts val="0"/>
-                        </a:spcAft>
-                        <a:buNone/>
-                      </a:pPr>
-                      <a:r>
-                        <a:rPr lang="en">
-                          <a:solidFill>
-                            <a:srgbClr val="FFFFFF"/>
-                          </a:solidFill>
-                          <a:highlight>
-                            <a:srgbClr val="BF9000"/>
-                          </a:highlight>
-                        </a:rPr>
-                        <a:t>q1</a:t>
-                      </a:r>
-                      <a:endParaRPr>
-                        <a:solidFill>
-                          <a:srgbClr val="FFFFFF"/>
-                        </a:solidFill>
-                        <a:highlight>
-                          <a:srgbClr val="BF9000"/>
-                        </a:highlight>
-                      </a:endParaRPr>
-                    </a:p>
-                  </a:txBody>
-                  <a:tcPr marT="91425" marB="91425" marR="91425" marL="91425"/>
-                </a:tc>
-                <a:tc>
-                  <a:txBody>
-                    <a:bodyPr/>
-                    <a:lstStyle/>
-                    <a:p>
-                      <a:pPr indent="0" lvl="0" marL="0" rtl="0" algn="l">
-                        <a:spcBef>
-                          <a:spcPts val="0"/>
-                        </a:spcBef>
-                        <a:spcAft>
-                          <a:spcPts val="0"/>
-                        </a:spcAft>
-                        <a:buNone/>
-                      </a:pPr>
-                      <a:r>
-                        <a:rPr lang="en">
-                          <a:solidFill>
-                            <a:srgbClr val="FFFFFF"/>
-                          </a:solidFill>
-                        </a:rPr>
-                        <a:t>q1</a:t>
+                        <a:t>s1</a:t>
                       </a:r>
                       <a:endParaRPr>
                         <a:solidFill>
@@ -7696,26 +7909,20 @@
                           <a:solidFill>
                             <a:srgbClr val="FFFFFF"/>
                           </a:solidFill>
-                          <a:highlight>
-                            <a:srgbClr val="38761D"/>
-                          </a:highlight>
                         </a:rPr>
-                        <a:t>q4</a:t>
+                        <a:t>s2</a:t>
                       </a:r>
                       <a:endParaRPr>
                         <a:solidFill>
                           <a:srgbClr val="FFFFFF"/>
                         </a:solidFill>
-                        <a:highlight>
-                          <a:srgbClr val="38761D"/>
-                        </a:highlight>
                       </a:endParaRPr>
                     </a:p>
                   </a:txBody>
                   <a:tcPr marT="91425" marB="91425" marR="91425" marL="91425"/>
                 </a:tc>
               </a:tr>
-              <a:tr h="387425">
+              <a:tr h="392625">
                 <a:tc>
                   <a:txBody>
                     <a:bodyPr/>
@@ -7736,7 +7943,7 @@
                             <a:srgbClr val="FFFFFF"/>
                           </a:solidFill>
                         </a:rPr>
-                        <a:t>q2</a:t>
+                        <a:t>s2</a:t>
                       </a:r>
                       <a:endParaRPr>
                         <a:solidFill>
@@ -7767,7 +7974,7 @@
                             <a:srgbClr val="FFFFFF"/>
                           </a:solidFill>
                         </a:rPr>
-                        <a:t>q0</a:t>
+                        <a:t>s3</a:t>
                       </a:r>
                       <a:endParaRPr>
                         <a:solidFill>
@@ -7798,7 +8005,7 @@
                             <a:srgbClr val="FFFFFF"/>
                           </a:solidFill>
                         </a:rPr>
-                        <a:t>q2</a:t>
+                        <a:t>s2</a:t>
                       </a:r>
                       <a:endParaRPr>
                         <a:solidFill>
@@ -7810,7 +8017,7 @@
                   <a:tcPr marT="91425" marB="91425" marR="91425" marL="91425"/>
                 </a:tc>
               </a:tr>
-              <a:tr h="387425">
+              <a:tr h="392625">
                 <a:tc>
                   <a:txBody>
                     <a:bodyPr/>
@@ -7831,7 +8038,7 @@
                             <a:srgbClr val="FFFFFF"/>
                           </a:solidFill>
                         </a:rPr>
-                        <a:t>q3</a:t>
+                        <a:t>s3</a:t>
                       </a:r>
                       <a:endParaRPr>
                         <a:solidFill>
@@ -7862,7 +8069,7 @@
                             <a:srgbClr val="FFFFFF"/>
                           </a:solidFill>
                         </a:rPr>
-                        <a:t>q3</a:t>
+                        <a:t>s3</a:t>
                       </a:r>
                       <a:endParaRPr>
                         <a:solidFill>
@@ -7893,197 +8100,7 @@
                             <a:srgbClr val="FFFFFF"/>
                           </a:solidFill>
                         </a:rPr>
-                        <a:t>q2</a:t>
-                      </a:r>
-                      <a:endParaRPr>
-                        <a:solidFill>
-                          <a:srgbClr val="FFFFFF"/>
-                        </a:solidFill>
-                      </a:endParaRPr>
-                    </a:p>
-                  </a:txBody>
-                  <a:tcPr marT="91425" marB="91425" marR="91425" marL="91425"/>
-                </a:tc>
-              </a:tr>
-              <a:tr h="387425">
-                <a:tc>
-                  <a:txBody>
-                    <a:bodyPr/>
-                    <a:lstStyle/>
-                    <a:p>
-                      <a:pPr indent="0" lvl="0" marL="0" rtl="0" algn="l">
-                        <a:spcBef>
-                          <a:spcPts val="0"/>
-                        </a:spcBef>
-                        <a:spcAft>
-                          <a:spcPts val="0"/>
-                        </a:spcAft>
-                        <a:buNone/>
-                      </a:pPr>
-                      <a:r>
-                        <a:rPr lang="en">
-                          <a:solidFill>
-                            <a:srgbClr val="FFFFFF"/>
-                          </a:solidFill>
-                        </a:rPr>
-                        <a:t>q4 </a:t>
-                      </a:r>
-                      <a:endParaRPr>
-                        <a:solidFill>
-                          <a:srgbClr val="FFFFFF"/>
-                        </a:solidFill>
-                      </a:endParaRPr>
-                    </a:p>
-                  </a:txBody>
-                  <a:tcPr marT="91425" marB="91425" marR="91425" marL="91425"/>
-                </a:tc>
-                <a:tc>
-                  <a:txBody>
-                    <a:bodyPr/>
-                    <a:lstStyle/>
-                    <a:p>
-                      <a:pPr indent="0" lvl="0" marL="0" rtl="0" algn="l">
-                        <a:spcBef>
-                          <a:spcPts val="0"/>
-                        </a:spcBef>
-                        <a:spcAft>
-                          <a:spcPts val="0"/>
-                        </a:spcAft>
-                        <a:buNone/>
-                      </a:pPr>
-                      <a:r>
-                        <a:rPr lang="en">
-                          <a:solidFill>
-                            <a:srgbClr val="FFFFFF"/>
-                          </a:solidFill>
-                        </a:rPr>
-                        <a:t>q4</a:t>
-                      </a:r>
-                      <a:endParaRPr>
-                        <a:solidFill>
-                          <a:srgbClr val="FFFFFF"/>
-                        </a:solidFill>
-                      </a:endParaRPr>
-                    </a:p>
-                  </a:txBody>
-                  <a:tcPr marT="91425" marB="91425" marR="91425" marL="91425"/>
-                </a:tc>
-                <a:tc>
-                  <a:txBody>
-                    <a:bodyPr/>
-                    <a:lstStyle/>
-                    <a:p>
-                      <a:pPr indent="0" lvl="0" marL="0" rtl="0" algn="l">
-                        <a:spcBef>
-                          <a:spcPts val="0"/>
-                        </a:spcBef>
-                        <a:spcAft>
-                          <a:spcPts val="0"/>
-                        </a:spcAft>
-                        <a:buNone/>
-                      </a:pPr>
-                      <a:r>
-                        <a:rPr lang="en">
-                          <a:solidFill>
-                            <a:srgbClr val="FFFFFF"/>
-                          </a:solidFill>
-                        </a:rPr>
-                        <a:t>q5</a:t>
-                      </a:r>
-                      <a:endParaRPr>
-                        <a:solidFill>
-                          <a:srgbClr val="FFFFFF"/>
-                        </a:solidFill>
-                      </a:endParaRPr>
-                    </a:p>
-                  </a:txBody>
-                  <a:tcPr marT="91425" marB="91425" marR="91425" marL="91425"/>
-                </a:tc>
-              </a:tr>
-              <a:tr h="387425">
-                <a:tc>
-                  <a:txBody>
-                    <a:bodyPr/>
-                    <a:lstStyle/>
-                    <a:p>
-                      <a:pPr indent="0" lvl="0" marL="0" rtl="0" algn="l">
-                        <a:spcBef>
-                          <a:spcPts val="0"/>
-                        </a:spcBef>
-                        <a:spcAft>
-                          <a:spcPts val="0"/>
-                        </a:spcAft>
-                        <a:buNone/>
-                      </a:pPr>
-                      <a:r>
-                        <a:rPr lang="en">
-                          <a:solidFill>
-                            <a:srgbClr val="FFFFFF"/>
-                          </a:solidFill>
-                        </a:rPr>
-                        <a:t>q5</a:t>
-                      </a:r>
-                      <a:endParaRPr>
-                        <a:solidFill>
-                          <a:srgbClr val="FFFFFF"/>
-                        </a:solidFill>
-                      </a:endParaRPr>
-                    </a:p>
-                  </a:txBody>
-                  <a:tcPr marT="91425" marB="91425" marR="91425" marL="91425"/>
-                </a:tc>
-                <a:tc>
-                  <a:txBody>
-                    <a:bodyPr/>
-                    <a:lstStyle/>
-                    <a:p>
-                      <a:pPr indent="0" lvl="0" marL="0" rtl="0" algn="l">
-                        <a:spcBef>
-                          <a:spcPts val="0"/>
-                        </a:spcBef>
-                        <a:spcAft>
-                          <a:spcPts val="0"/>
-                        </a:spcAft>
-                        <a:buNone/>
-                      </a:pPr>
-                      <a:r>
-                        <a:rPr lang="en">
-                          <a:solidFill>
-                            <a:srgbClr val="FFFFFF"/>
-                          </a:solidFill>
-                        </a:rPr>
-                        <a:t>q0</a:t>
-                      </a:r>
-                      <a:endParaRPr>
-                        <a:solidFill>
-                          <a:srgbClr val="FFFFFF"/>
-                        </a:solidFill>
-                      </a:endParaRPr>
-                    </a:p>
-                  </a:txBody>
-                  <a:tcPr marT="91425" marB="91425" marR="91425" marL="91425"/>
-                </a:tc>
-                <a:tc>
-                  <a:txBody>
-                    <a:bodyPr/>
-                    <a:lstStyle/>
-                    <a:p>
-                      <a:pPr indent="0" lvl="0" marL="0" rtl="0" algn="l">
-                        <a:spcBef>
-                          <a:spcPts val="0"/>
-                        </a:spcBef>
-                        <a:spcAft>
-                          <a:spcPts val="0"/>
-                        </a:spcAft>
-                        <a:buNone/>
-                      </a:pPr>
-                      <a:r>
-                        <a:rPr lang="en">
-                          <a:solidFill>
-                            <a:srgbClr val="FFFFFF"/>
-                          </a:solidFill>
-                        </a:rPr>
-                        <a:t>q2</a:t>
+                        <a:t>s1</a:t>
                       </a:r>
                       <a:endParaRPr>
                         <a:solidFill>
@@ -8099,730 +8116,6 @@
           </a:graphicData>
         </a:graphic>
       </p:graphicFrame>
-      <p:sp>
-        <p:nvSpPr>
-          <p:cNvPr id="129" name="Google Shape;129;p22"/>
-          <p:cNvSpPr txBox="1"/>
-          <p:nvPr/>
-        </p:nvSpPr>
-        <p:spPr>
-          <a:xfrm>
-            <a:off x="363150" y="1091500"/>
-            <a:ext cx="3761700" cy="3786600"/>
-          </a:xfrm>
-          <a:prstGeom prst="rect">
-            <a:avLst/>
-          </a:prstGeom>
-          <a:noFill/>
-          <a:ln>
-            <a:noFill/>
-          </a:ln>
-        </p:spPr>
-        <p:txBody>
-          <a:bodyPr anchorCtr="0" anchor="t" bIns="91425" lIns="91425" spcFirstLastPara="1" rIns="91425" wrap="square" tIns="91425">
-            <a:spAutoFit/>
-          </a:bodyPr>
-          <a:lstStyle/>
-          <a:p>
-            <a:pPr indent="0" lvl="0" marL="0" rtl="0" algn="l">
-              <a:spcBef>
-                <a:spcPts val="0"/>
-              </a:spcBef>
-              <a:spcAft>
-                <a:spcPts val="0"/>
-              </a:spcAft>
-              <a:buNone/>
-            </a:pPr>
-            <a:r>
-              <a:rPr lang="en" sz="1800">
-                <a:solidFill>
-                  <a:schemeClr val="dk1"/>
-                </a:solidFill>
-              </a:rPr>
-              <a:t>Partitions </a:t>
-            </a:r>
-            <a:endParaRPr sz="1800">
-              <a:solidFill>
-                <a:schemeClr val="dk1"/>
-              </a:solidFill>
-            </a:endParaRPr>
-          </a:p>
-          <a:p>
-            <a:pPr indent="0" lvl="0" marL="0" rtl="0" algn="l">
-              <a:spcBef>
-                <a:spcPts val="0"/>
-              </a:spcBef>
-              <a:spcAft>
-                <a:spcPts val="0"/>
-              </a:spcAft>
-              <a:buNone/>
-            </a:pPr>
-            <a:r>
-              <a:rPr lang="en" sz="1800">
-                <a:solidFill>
-                  <a:schemeClr val="dk1"/>
-                </a:solidFill>
-                <a:highlight>
-                  <a:srgbClr val="38761D"/>
-                </a:highlight>
-              </a:rPr>
-              <a:t>S1</a:t>
-            </a:r>
-            <a:r>
-              <a:rPr lang="en" sz="1800">
-                <a:solidFill>
-                  <a:schemeClr val="dk1"/>
-                </a:solidFill>
-              </a:rPr>
-              <a:t> = {q3, q4} </a:t>
-            </a:r>
-            <a:endParaRPr sz="1800">
-              <a:solidFill>
-                <a:schemeClr val="dk1"/>
-              </a:solidFill>
-            </a:endParaRPr>
-          </a:p>
-          <a:p>
-            <a:pPr indent="0" lvl="0" marL="0" rtl="0" algn="l">
-              <a:spcBef>
-                <a:spcPts val="0"/>
-              </a:spcBef>
-              <a:spcAft>
-                <a:spcPts val="0"/>
-              </a:spcAft>
-              <a:buNone/>
-            </a:pPr>
-            <a:r>
-              <a:rPr lang="en" sz="1800">
-                <a:solidFill>
-                  <a:schemeClr val="dk1"/>
-                </a:solidFill>
-                <a:highlight>
-                  <a:srgbClr val="FF0000"/>
-                </a:highlight>
-              </a:rPr>
-              <a:t>S2</a:t>
-            </a:r>
-            <a:r>
-              <a:rPr lang="en" sz="1800">
-                <a:solidFill>
-                  <a:schemeClr val="dk1"/>
-                </a:solidFill>
-              </a:rPr>
-              <a:t> = {q2, q5}</a:t>
-            </a:r>
-            <a:endParaRPr sz="1800">
-              <a:solidFill>
-                <a:schemeClr val="dk1"/>
-              </a:solidFill>
-            </a:endParaRPr>
-          </a:p>
-          <a:p>
-            <a:pPr indent="0" lvl="0" marL="0" rtl="0" algn="l">
-              <a:spcBef>
-                <a:spcPts val="0"/>
-              </a:spcBef>
-              <a:spcAft>
-                <a:spcPts val="0"/>
-              </a:spcAft>
-              <a:buNone/>
-            </a:pPr>
-            <a:r>
-              <a:rPr lang="en" sz="1800">
-                <a:solidFill>
-                  <a:schemeClr val="dk1"/>
-                </a:solidFill>
-                <a:highlight>
-                  <a:srgbClr val="BF9000"/>
-                </a:highlight>
-              </a:rPr>
-              <a:t>S3</a:t>
-            </a:r>
-            <a:r>
-              <a:rPr lang="en" sz="1800">
-                <a:solidFill>
-                  <a:schemeClr val="dk1"/>
-                </a:solidFill>
-              </a:rPr>
-              <a:t> = {q0, q1}</a:t>
-            </a:r>
-            <a:endParaRPr sz="1800">
-              <a:solidFill>
-                <a:schemeClr val="dk1"/>
-              </a:solidFill>
-            </a:endParaRPr>
-          </a:p>
-          <a:p>
-            <a:pPr indent="0" lvl="0" marL="0" rtl="0" algn="l">
-              <a:spcBef>
-                <a:spcPts val="0"/>
-              </a:spcBef>
-              <a:spcAft>
-                <a:spcPts val="0"/>
-              </a:spcAft>
-              <a:buNone/>
-            </a:pPr>
-            <a:r>
-              <a:rPr lang="en" sz="1800">
-                <a:solidFill>
-                  <a:schemeClr val="dk1"/>
-                </a:solidFill>
-              </a:rPr>
-              <a:t>Worklist: {}</a:t>
-            </a:r>
-            <a:endParaRPr sz="1800">
-              <a:solidFill>
-                <a:schemeClr val="dk1"/>
-              </a:solidFill>
-            </a:endParaRPr>
-          </a:p>
-          <a:p>
-            <a:pPr indent="0" lvl="0" marL="0" rtl="0" algn="l">
-              <a:spcBef>
-                <a:spcPts val="0"/>
-              </a:spcBef>
-              <a:spcAft>
-                <a:spcPts val="0"/>
-              </a:spcAft>
-              <a:buNone/>
-            </a:pPr>
-            <a:r>
-              <a:rPr lang="en" sz="1800">
-                <a:solidFill>
-                  <a:schemeClr val="dk1"/>
-                </a:solidFill>
-              </a:rPr>
-              <a:t>Current splitter: {</a:t>
-            </a:r>
-            <a:r>
-              <a:rPr lang="en" sz="1800">
-                <a:solidFill>
-                  <a:schemeClr val="dk1"/>
-                </a:solidFill>
-                <a:highlight>
-                  <a:srgbClr val="38761D"/>
-                </a:highlight>
-              </a:rPr>
-              <a:t>S1</a:t>
-            </a:r>
-            <a:r>
-              <a:rPr lang="en" sz="1800">
-                <a:solidFill>
-                  <a:schemeClr val="dk1"/>
-                </a:solidFill>
-              </a:rPr>
-              <a:t>}</a:t>
-            </a:r>
-            <a:endParaRPr sz="1800">
-              <a:solidFill>
-                <a:schemeClr val="dk1"/>
-              </a:solidFill>
-            </a:endParaRPr>
-          </a:p>
-          <a:p>
-            <a:pPr indent="0" lvl="0" marL="0" rtl="0" algn="l">
-              <a:spcBef>
-                <a:spcPts val="0"/>
-              </a:spcBef>
-              <a:spcAft>
-                <a:spcPts val="0"/>
-              </a:spcAft>
-              <a:buNone/>
-            </a:pPr>
-            <a:r>
-              <a:t/>
-            </a:r>
-            <a:endParaRPr sz="1800">
-              <a:solidFill>
-                <a:schemeClr val="dk1"/>
-              </a:solidFill>
-            </a:endParaRPr>
-          </a:p>
-          <a:p>
-            <a:pPr indent="0" lvl="0" marL="0" rtl="0" algn="l">
-              <a:spcBef>
-                <a:spcPts val="0"/>
-              </a:spcBef>
-              <a:spcAft>
-                <a:spcPts val="0"/>
-              </a:spcAft>
-              <a:buNone/>
-            </a:pPr>
-            <a:r>
-              <a:rPr lang="en" sz="1800">
-                <a:solidFill>
-                  <a:schemeClr val="dk1"/>
-                </a:solidFill>
-              </a:rPr>
-              <a:t>On symbol 1:</a:t>
-            </a:r>
-            <a:endParaRPr sz="1800">
-              <a:solidFill>
-                <a:schemeClr val="dk1"/>
-              </a:solidFill>
-            </a:endParaRPr>
-          </a:p>
-          <a:p>
-            <a:pPr indent="0" lvl="0" marL="0" rtl="0" algn="l">
-              <a:spcBef>
-                <a:spcPts val="0"/>
-              </a:spcBef>
-              <a:spcAft>
-                <a:spcPts val="0"/>
-              </a:spcAft>
-              <a:buNone/>
-            </a:pPr>
-            <a:r>
-              <a:rPr lang="en" sz="1800">
-                <a:solidFill>
-                  <a:schemeClr val="dk1"/>
-                </a:solidFill>
-              </a:rPr>
-              <a:t>X = {q0, q1} go to q3 or q4</a:t>
-            </a:r>
-            <a:endParaRPr sz="1800">
-              <a:solidFill>
-                <a:schemeClr val="dk1"/>
-              </a:solidFill>
-            </a:endParaRPr>
-          </a:p>
-          <a:p>
-            <a:pPr indent="0" lvl="0" marL="0" rtl="0" algn="l">
-              <a:spcBef>
-                <a:spcPts val="0"/>
-              </a:spcBef>
-              <a:spcAft>
-                <a:spcPts val="0"/>
-              </a:spcAft>
-              <a:buNone/>
-            </a:pPr>
-            <a:r>
-              <a:t/>
-            </a:r>
-            <a:endParaRPr sz="1800">
-              <a:solidFill>
-                <a:schemeClr val="dk1"/>
-              </a:solidFill>
-            </a:endParaRPr>
-          </a:p>
-          <a:p>
-            <a:pPr indent="0" lvl="0" marL="0" rtl="0" algn="l">
-              <a:spcBef>
-                <a:spcPts val="0"/>
-              </a:spcBef>
-              <a:spcAft>
-                <a:spcPts val="0"/>
-              </a:spcAft>
-              <a:buNone/>
-            </a:pPr>
-            <a:r>
-              <a:rPr lang="en" sz="1800">
-                <a:solidFill>
-                  <a:schemeClr val="dk1"/>
-                </a:solidFill>
-                <a:highlight>
-                  <a:srgbClr val="FF0000"/>
-                </a:highlight>
-              </a:rPr>
-              <a:t>S2</a:t>
-            </a:r>
-            <a:r>
-              <a:rPr lang="en" sz="1800">
-                <a:solidFill>
-                  <a:schemeClr val="dk1"/>
-                </a:solidFill>
-              </a:rPr>
-              <a:t> and </a:t>
-            </a:r>
-            <a:r>
-              <a:rPr lang="en" sz="1800">
-                <a:solidFill>
-                  <a:schemeClr val="dk1"/>
-                </a:solidFill>
-                <a:highlight>
-                  <a:srgbClr val="BF9000"/>
-                </a:highlight>
-              </a:rPr>
-              <a:t>S3</a:t>
-            </a:r>
-            <a:r>
-              <a:rPr lang="en" sz="1800">
-                <a:solidFill>
-                  <a:schemeClr val="dk1"/>
-                </a:solidFill>
-              </a:rPr>
-              <a:t> no </a:t>
-            </a:r>
-            <a:r>
-              <a:rPr lang="en" sz="1800">
-                <a:solidFill>
-                  <a:schemeClr val="dk1"/>
-                </a:solidFill>
-              </a:rPr>
-              <a:t>intersection</a:t>
-            </a:r>
-            <a:r>
-              <a:rPr lang="en" sz="1800">
-                <a:solidFill>
-                  <a:schemeClr val="dk1"/>
-                </a:solidFill>
-              </a:rPr>
-              <a:t> with X </a:t>
-            </a:r>
-            <a:endParaRPr sz="1800">
-              <a:solidFill>
-                <a:schemeClr val="dk1"/>
-              </a:solidFill>
-            </a:endParaRPr>
-          </a:p>
-          <a:p>
-            <a:pPr indent="0" lvl="0" marL="0" rtl="0" algn="l">
-              <a:spcBef>
-                <a:spcPts val="0"/>
-              </a:spcBef>
-              <a:spcAft>
-                <a:spcPts val="0"/>
-              </a:spcAft>
-              <a:buNone/>
-            </a:pPr>
-            <a:r>
-              <a:t/>
-            </a:r>
-            <a:endParaRPr sz="1800">
-              <a:solidFill>
-                <a:schemeClr val="dk1"/>
-              </a:solidFill>
-            </a:endParaRPr>
-          </a:p>
-          <a:p>
-            <a:pPr indent="0" lvl="0" marL="0" rtl="0" algn="l">
-              <a:spcBef>
-                <a:spcPts val="0"/>
-              </a:spcBef>
-              <a:spcAft>
-                <a:spcPts val="0"/>
-              </a:spcAft>
-              <a:buNone/>
-            </a:pPr>
-            <a:r>
-              <a:rPr lang="en" sz="1800">
-                <a:solidFill>
-                  <a:schemeClr val="dk1"/>
-                </a:solidFill>
-                <a:highlight>
-                  <a:srgbClr val="BF9000"/>
-                </a:highlight>
-              </a:rPr>
-              <a:t>S3</a:t>
-            </a:r>
-            <a:r>
-              <a:rPr lang="en" sz="1800">
-                <a:solidFill>
-                  <a:schemeClr val="dk1"/>
-                </a:solidFill>
-              </a:rPr>
-              <a:t> is fully included in X, no split</a:t>
-            </a:r>
-            <a:endParaRPr sz="1800">
-              <a:solidFill>
-                <a:schemeClr val="dk1"/>
-              </a:solidFill>
-            </a:endParaRPr>
-          </a:p>
-        </p:txBody>
-      </p:sp>
-      <p:sp>
-        <p:nvSpPr>
-          <p:cNvPr id="130" name="Google Shape;130;p22"/>
-          <p:cNvSpPr txBox="1"/>
-          <p:nvPr/>
-        </p:nvSpPr>
-        <p:spPr>
-          <a:xfrm>
-            <a:off x="6149700" y="1324075"/>
-            <a:ext cx="2682600" cy="3509400"/>
-          </a:xfrm>
-          <a:prstGeom prst="rect">
-            <a:avLst/>
-          </a:prstGeom>
-          <a:noFill/>
-          <a:ln>
-            <a:noFill/>
-          </a:ln>
-        </p:spPr>
-        <p:txBody>
-          <a:bodyPr anchorCtr="0" anchor="t" bIns="91425" lIns="91425" spcFirstLastPara="1" rIns="91425" wrap="square" tIns="91425">
-            <a:spAutoFit/>
-          </a:bodyPr>
-          <a:lstStyle/>
-          <a:p>
-            <a:pPr indent="0" lvl="0" marL="0" rtl="0" algn="l">
-              <a:spcBef>
-                <a:spcPts val="0"/>
-              </a:spcBef>
-              <a:spcAft>
-                <a:spcPts val="0"/>
-              </a:spcAft>
-              <a:buNone/>
-            </a:pPr>
-            <a:r>
-              <a:rPr lang="en" sz="1800">
-                <a:solidFill>
-                  <a:schemeClr val="dk1"/>
-                </a:solidFill>
-              </a:rPr>
-              <a:t>Resulting</a:t>
-            </a:r>
-            <a:r>
-              <a:rPr lang="en" sz="1800">
-                <a:solidFill>
-                  <a:schemeClr val="dk1"/>
-                </a:solidFill>
-              </a:rPr>
-              <a:t> partitions </a:t>
-            </a:r>
-            <a:endParaRPr sz="1800">
-              <a:solidFill>
-                <a:schemeClr val="dk1"/>
-              </a:solidFill>
-            </a:endParaRPr>
-          </a:p>
-          <a:p>
-            <a:pPr indent="0" lvl="0" marL="0" rtl="0" algn="l">
-              <a:spcBef>
-                <a:spcPts val="0"/>
-              </a:spcBef>
-              <a:spcAft>
-                <a:spcPts val="0"/>
-              </a:spcAft>
-              <a:buNone/>
-            </a:pPr>
-            <a:r>
-              <a:rPr lang="en" sz="1800">
-                <a:solidFill>
-                  <a:schemeClr val="dk1"/>
-                </a:solidFill>
-                <a:highlight>
-                  <a:srgbClr val="38761D"/>
-                </a:highlight>
-              </a:rPr>
-              <a:t>S1</a:t>
-            </a:r>
-            <a:r>
-              <a:rPr lang="en" sz="1800">
-                <a:solidFill>
-                  <a:schemeClr val="dk1"/>
-                </a:solidFill>
-              </a:rPr>
-              <a:t> = {q3, q4} </a:t>
-            </a:r>
-            <a:endParaRPr sz="1800">
-              <a:solidFill>
-                <a:schemeClr val="dk1"/>
-              </a:solidFill>
-            </a:endParaRPr>
-          </a:p>
-          <a:p>
-            <a:pPr indent="0" lvl="0" marL="0" rtl="0" algn="l">
-              <a:spcBef>
-                <a:spcPts val="0"/>
-              </a:spcBef>
-              <a:spcAft>
-                <a:spcPts val="0"/>
-              </a:spcAft>
-              <a:buNone/>
-            </a:pPr>
-            <a:r>
-              <a:rPr lang="en" sz="1800">
-                <a:solidFill>
-                  <a:schemeClr val="dk1"/>
-                </a:solidFill>
-                <a:highlight>
-                  <a:srgbClr val="FF0000"/>
-                </a:highlight>
-              </a:rPr>
-              <a:t>S2</a:t>
-            </a:r>
-            <a:r>
-              <a:rPr lang="en" sz="1800">
-                <a:solidFill>
-                  <a:schemeClr val="dk1"/>
-                </a:solidFill>
-              </a:rPr>
-              <a:t> = {q2, q5}</a:t>
-            </a:r>
-            <a:endParaRPr sz="1800">
-              <a:solidFill>
-                <a:schemeClr val="dk1"/>
-              </a:solidFill>
-            </a:endParaRPr>
-          </a:p>
-          <a:p>
-            <a:pPr indent="0" lvl="0" marL="0" rtl="0" algn="l">
-              <a:spcBef>
-                <a:spcPts val="0"/>
-              </a:spcBef>
-              <a:spcAft>
-                <a:spcPts val="0"/>
-              </a:spcAft>
-              <a:buNone/>
-            </a:pPr>
-            <a:r>
-              <a:rPr lang="en" sz="1800">
-                <a:solidFill>
-                  <a:schemeClr val="dk1"/>
-                </a:solidFill>
-                <a:highlight>
-                  <a:srgbClr val="BF9000"/>
-                </a:highlight>
-              </a:rPr>
-              <a:t>S3</a:t>
-            </a:r>
-            <a:r>
-              <a:rPr lang="en" sz="1800">
-                <a:solidFill>
-                  <a:schemeClr val="dk1"/>
-                </a:solidFill>
-              </a:rPr>
-              <a:t> = {q0, q1}</a:t>
-            </a:r>
-            <a:endParaRPr sz="1800">
-              <a:solidFill>
-                <a:schemeClr val="dk1"/>
-              </a:solidFill>
-            </a:endParaRPr>
-          </a:p>
-          <a:p>
-            <a:pPr indent="0" lvl="0" marL="0" rtl="0" algn="l">
-              <a:spcBef>
-                <a:spcPts val="0"/>
-              </a:spcBef>
-              <a:spcAft>
-                <a:spcPts val="0"/>
-              </a:spcAft>
-              <a:buNone/>
-            </a:pPr>
-            <a:r>
-              <a:t/>
-            </a:r>
-            <a:endParaRPr sz="1800">
-              <a:solidFill>
-                <a:schemeClr val="dk1"/>
-              </a:solidFill>
-            </a:endParaRPr>
-          </a:p>
-          <a:p>
-            <a:pPr indent="0" lvl="0" marL="0" rtl="0" algn="l">
-              <a:spcBef>
-                <a:spcPts val="0"/>
-              </a:spcBef>
-              <a:spcAft>
-                <a:spcPts val="0"/>
-              </a:spcAft>
-              <a:buNone/>
-            </a:pPr>
-            <a:r>
-              <a:rPr lang="en" sz="1800">
-                <a:solidFill>
-                  <a:schemeClr val="dk1"/>
-                </a:solidFill>
-              </a:rPr>
-              <a:t>No conflicts so nothing added to worklist</a:t>
-            </a:r>
-            <a:endParaRPr sz="1800">
-              <a:solidFill>
-                <a:schemeClr val="dk1"/>
-              </a:solidFill>
-            </a:endParaRPr>
-          </a:p>
-          <a:p>
-            <a:pPr indent="0" lvl="0" marL="0" rtl="0" algn="l">
-              <a:spcBef>
-                <a:spcPts val="0"/>
-              </a:spcBef>
-              <a:spcAft>
-                <a:spcPts val="0"/>
-              </a:spcAft>
-              <a:buNone/>
-            </a:pPr>
-            <a:r>
-              <a:t/>
-            </a:r>
-            <a:endParaRPr sz="1800">
-              <a:solidFill>
-                <a:schemeClr val="dk1"/>
-              </a:solidFill>
-            </a:endParaRPr>
-          </a:p>
-          <a:p>
-            <a:pPr indent="0" lvl="0" marL="0" rtl="0" algn="l">
-              <a:spcBef>
-                <a:spcPts val="0"/>
-              </a:spcBef>
-              <a:spcAft>
-                <a:spcPts val="0"/>
-              </a:spcAft>
-              <a:buNone/>
-            </a:pPr>
-            <a:r>
-              <a:rPr lang="en" sz="1800">
-                <a:solidFill>
-                  <a:schemeClr val="dk1"/>
-                </a:solidFill>
-              </a:rPr>
-              <a:t>Worklist = {} </a:t>
-            </a:r>
-            <a:endParaRPr sz="1800">
-              <a:solidFill>
-                <a:schemeClr val="dk1"/>
-              </a:solidFill>
-            </a:endParaRPr>
-          </a:p>
-          <a:p>
-            <a:pPr indent="0" lvl="0" marL="0" rtl="0" algn="l">
-              <a:spcBef>
-                <a:spcPts val="0"/>
-              </a:spcBef>
-              <a:spcAft>
-                <a:spcPts val="0"/>
-              </a:spcAft>
-              <a:buNone/>
-            </a:pPr>
-            <a:r>
-              <a:t/>
-            </a:r>
-            <a:endParaRPr sz="1800">
-              <a:solidFill>
-                <a:schemeClr val="dk1"/>
-              </a:solidFill>
-            </a:endParaRPr>
-          </a:p>
-          <a:p>
-            <a:pPr indent="0" lvl="0" marL="0" rtl="0" algn="l">
-              <a:spcBef>
-                <a:spcPts val="0"/>
-              </a:spcBef>
-              <a:spcAft>
-                <a:spcPts val="0"/>
-              </a:spcAft>
-              <a:buNone/>
-            </a:pPr>
-            <a:r>
-              <a:rPr lang="en" sz="1800">
-                <a:solidFill>
-                  <a:schemeClr val="dk1"/>
-                </a:solidFill>
-              </a:rPr>
-              <a:t>Worklist empty, we’re done</a:t>
-            </a:r>
-            <a:endParaRPr sz="1800">
-              <a:solidFill>
-                <a:schemeClr val="dk1"/>
-              </a:solidFill>
-            </a:endParaRPr>
-          </a:p>
-        </p:txBody>
-      </p:sp>
     </p:spTree>
   </p:cSld>
   <p:clrMapOvr>
@@ -8858,849 +8151,6 @@
         </p:nvSpPr>
         <p:spPr>
           <a:xfrm>
-            <a:off x="311700" y="445025"/>
-            <a:ext cx="8520600" cy="572700"/>
-          </a:xfrm>
-          <a:prstGeom prst="rect">
-            <a:avLst/>
-          </a:prstGeom>
-        </p:spPr>
-        <p:txBody>
-          <a:bodyPr anchorCtr="0" anchor="t" bIns="91425" lIns="91425" spcFirstLastPara="1" rIns="91425" wrap="square" tIns="91425">
-            <a:normAutofit fontScale="90000"/>
-          </a:bodyPr>
-          <a:lstStyle/>
-          <a:p>
-            <a:pPr indent="0" lvl="0" marL="0" rtl="0" algn="l">
-              <a:spcBef>
-                <a:spcPts val="0"/>
-              </a:spcBef>
-              <a:spcAft>
-                <a:spcPts val="0"/>
-              </a:spcAft>
-              <a:buNone/>
-            </a:pPr>
-            <a:r>
-              <a:rPr lang="en"/>
-              <a:t>Example</a:t>
-            </a:r>
-            <a:endParaRPr/>
-          </a:p>
-        </p:txBody>
-      </p:sp>
-      <p:sp>
-        <p:nvSpPr>
-          <p:cNvPr id="136" name="Google Shape;136;p23"/>
-          <p:cNvSpPr txBox="1"/>
-          <p:nvPr/>
-        </p:nvSpPr>
-        <p:spPr>
-          <a:xfrm>
-            <a:off x="363150" y="1091500"/>
-            <a:ext cx="3761700" cy="4617600"/>
-          </a:xfrm>
-          <a:prstGeom prst="rect">
-            <a:avLst/>
-          </a:prstGeom>
-          <a:noFill/>
-          <a:ln>
-            <a:noFill/>
-          </a:ln>
-        </p:spPr>
-        <p:txBody>
-          <a:bodyPr anchorCtr="0" anchor="t" bIns="91425" lIns="91425" spcFirstLastPara="1" rIns="91425" wrap="square" tIns="91425">
-            <a:spAutoFit/>
-          </a:bodyPr>
-          <a:lstStyle/>
-          <a:p>
-            <a:pPr indent="0" lvl="0" marL="0" rtl="0" algn="l">
-              <a:spcBef>
-                <a:spcPts val="0"/>
-              </a:spcBef>
-              <a:spcAft>
-                <a:spcPts val="0"/>
-              </a:spcAft>
-              <a:buNone/>
-            </a:pPr>
-            <a:r>
-              <a:rPr lang="en" sz="1800">
-                <a:solidFill>
-                  <a:schemeClr val="dk1"/>
-                </a:solidFill>
-              </a:rPr>
-              <a:t>Final </a:t>
-            </a:r>
-            <a:r>
-              <a:rPr lang="en" sz="1800">
-                <a:solidFill>
-                  <a:schemeClr val="dk1"/>
-                </a:solidFill>
-              </a:rPr>
-              <a:t>Partitions </a:t>
-            </a:r>
-            <a:endParaRPr sz="1800">
-              <a:solidFill>
-                <a:schemeClr val="dk1"/>
-              </a:solidFill>
-            </a:endParaRPr>
-          </a:p>
-          <a:p>
-            <a:pPr indent="0" lvl="0" marL="0" rtl="0" algn="l">
-              <a:spcBef>
-                <a:spcPts val="0"/>
-              </a:spcBef>
-              <a:spcAft>
-                <a:spcPts val="0"/>
-              </a:spcAft>
-              <a:buNone/>
-            </a:pPr>
-            <a:r>
-              <a:rPr lang="en" sz="1800">
-                <a:solidFill>
-                  <a:schemeClr val="dk1"/>
-                </a:solidFill>
-                <a:highlight>
-                  <a:srgbClr val="38761D"/>
-                </a:highlight>
-              </a:rPr>
-              <a:t>S1</a:t>
-            </a:r>
-            <a:r>
-              <a:rPr lang="en" sz="1800">
-                <a:solidFill>
-                  <a:schemeClr val="dk1"/>
-                </a:solidFill>
-              </a:rPr>
-              <a:t> = {q3, q4} </a:t>
-            </a:r>
-            <a:endParaRPr sz="1800">
-              <a:solidFill>
-                <a:schemeClr val="dk1"/>
-              </a:solidFill>
-            </a:endParaRPr>
-          </a:p>
-          <a:p>
-            <a:pPr indent="0" lvl="0" marL="0" rtl="0" algn="l">
-              <a:spcBef>
-                <a:spcPts val="0"/>
-              </a:spcBef>
-              <a:spcAft>
-                <a:spcPts val="0"/>
-              </a:spcAft>
-              <a:buNone/>
-            </a:pPr>
-            <a:r>
-              <a:rPr lang="en" sz="1800">
-                <a:solidFill>
-                  <a:schemeClr val="dk1"/>
-                </a:solidFill>
-                <a:highlight>
-                  <a:srgbClr val="FF0000"/>
-                </a:highlight>
-              </a:rPr>
-              <a:t>S2</a:t>
-            </a:r>
-            <a:r>
-              <a:rPr lang="en" sz="1800">
-                <a:solidFill>
-                  <a:schemeClr val="dk1"/>
-                </a:solidFill>
-              </a:rPr>
-              <a:t> = {q2, q5}</a:t>
-            </a:r>
-            <a:endParaRPr sz="1800">
-              <a:solidFill>
-                <a:schemeClr val="dk1"/>
-              </a:solidFill>
-            </a:endParaRPr>
-          </a:p>
-          <a:p>
-            <a:pPr indent="0" lvl="0" marL="0" rtl="0" algn="l">
-              <a:spcBef>
-                <a:spcPts val="0"/>
-              </a:spcBef>
-              <a:spcAft>
-                <a:spcPts val="0"/>
-              </a:spcAft>
-              <a:buNone/>
-            </a:pPr>
-            <a:r>
-              <a:rPr lang="en" sz="1800">
-                <a:solidFill>
-                  <a:schemeClr val="dk1"/>
-                </a:solidFill>
-                <a:highlight>
-                  <a:srgbClr val="BF9000"/>
-                </a:highlight>
-              </a:rPr>
-              <a:t>S3</a:t>
-            </a:r>
-            <a:r>
-              <a:rPr lang="en" sz="1800">
-                <a:solidFill>
-                  <a:schemeClr val="dk1"/>
-                </a:solidFill>
-              </a:rPr>
-              <a:t> = {q0, q1}</a:t>
-            </a:r>
-            <a:endParaRPr sz="1800">
-              <a:solidFill>
-                <a:schemeClr val="dk1"/>
-              </a:solidFill>
-            </a:endParaRPr>
-          </a:p>
-          <a:p>
-            <a:pPr indent="0" lvl="0" marL="0" rtl="0" algn="l">
-              <a:spcBef>
-                <a:spcPts val="0"/>
-              </a:spcBef>
-              <a:spcAft>
-                <a:spcPts val="0"/>
-              </a:spcAft>
-              <a:buNone/>
-            </a:pPr>
-            <a:r>
-              <a:t/>
-            </a:r>
-            <a:endParaRPr sz="1800">
-              <a:solidFill>
-                <a:schemeClr val="dk1"/>
-              </a:solidFill>
-            </a:endParaRPr>
-          </a:p>
-          <a:p>
-            <a:pPr indent="0" lvl="0" marL="0" rtl="0" algn="l">
-              <a:spcBef>
-                <a:spcPts val="0"/>
-              </a:spcBef>
-              <a:spcAft>
-                <a:spcPts val="0"/>
-              </a:spcAft>
-              <a:buNone/>
-            </a:pPr>
-            <a:r>
-              <a:t/>
-            </a:r>
-            <a:endParaRPr sz="1800">
-              <a:solidFill>
-                <a:schemeClr val="dk1"/>
-              </a:solidFill>
-            </a:endParaRPr>
-          </a:p>
-          <a:p>
-            <a:pPr indent="0" lvl="0" marL="0" rtl="0" algn="l">
-              <a:spcBef>
-                <a:spcPts val="0"/>
-              </a:spcBef>
-              <a:spcAft>
-                <a:spcPts val="0"/>
-              </a:spcAft>
-              <a:buNone/>
-            </a:pPr>
-            <a:r>
-              <a:rPr lang="en" sz="1800">
-                <a:solidFill>
-                  <a:schemeClr val="dk1"/>
-                </a:solidFill>
-              </a:rPr>
-              <a:t>States are grouped that behave the same in relation to other partitions</a:t>
-            </a:r>
-            <a:endParaRPr sz="1800">
-              <a:solidFill>
-                <a:schemeClr val="dk1"/>
-              </a:solidFill>
-            </a:endParaRPr>
-          </a:p>
-          <a:p>
-            <a:pPr indent="0" lvl="0" marL="0" rtl="0" algn="l">
-              <a:spcBef>
-                <a:spcPts val="0"/>
-              </a:spcBef>
-              <a:spcAft>
-                <a:spcPts val="0"/>
-              </a:spcAft>
-              <a:buNone/>
-            </a:pPr>
-            <a:r>
-              <a:t/>
-            </a:r>
-            <a:endParaRPr sz="1800">
-              <a:solidFill>
-                <a:schemeClr val="dk1"/>
-              </a:solidFill>
-            </a:endParaRPr>
-          </a:p>
-          <a:p>
-            <a:pPr indent="0" lvl="0" marL="0" rtl="0" algn="l">
-              <a:spcBef>
-                <a:spcPts val="0"/>
-              </a:spcBef>
-              <a:spcAft>
-                <a:spcPts val="0"/>
-              </a:spcAft>
-              <a:buNone/>
-            </a:pPr>
-            <a:r>
-              <a:rPr lang="en" sz="1800">
-                <a:solidFill>
-                  <a:schemeClr val="dk1"/>
-                </a:solidFill>
-              </a:rPr>
-              <a:t>Each partition can be represented by a single state. </a:t>
-            </a:r>
-            <a:endParaRPr sz="1800">
-              <a:solidFill>
-                <a:schemeClr val="dk1"/>
-              </a:solidFill>
-            </a:endParaRPr>
-          </a:p>
-          <a:p>
-            <a:pPr indent="0" lvl="0" marL="0" rtl="0" algn="l">
-              <a:spcBef>
-                <a:spcPts val="0"/>
-              </a:spcBef>
-              <a:spcAft>
-                <a:spcPts val="0"/>
-              </a:spcAft>
-              <a:buNone/>
-            </a:pPr>
-            <a:r>
-              <a:t/>
-            </a:r>
-            <a:endParaRPr sz="1800">
-              <a:solidFill>
-                <a:schemeClr val="dk1"/>
-              </a:solidFill>
-            </a:endParaRPr>
-          </a:p>
-          <a:p>
-            <a:pPr indent="0" lvl="0" marL="0" rtl="0" algn="l">
-              <a:spcBef>
-                <a:spcPts val="0"/>
-              </a:spcBef>
-              <a:spcAft>
-                <a:spcPts val="0"/>
-              </a:spcAft>
-              <a:buNone/>
-            </a:pPr>
-            <a:r>
-              <a:t/>
-            </a:r>
-            <a:endParaRPr sz="1800">
-              <a:solidFill>
-                <a:schemeClr val="dk1"/>
-              </a:solidFill>
-            </a:endParaRPr>
-          </a:p>
-          <a:p>
-            <a:pPr indent="0" lvl="0" marL="0" rtl="0" algn="l">
-              <a:spcBef>
-                <a:spcPts val="0"/>
-              </a:spcBef>
-              <a:spcAft>
-                <a:spcPts val="0"/>
-              </a:spcAft>
-              <a:buNone/>
-            </a:pPr>
-            <a:r>
-              <a:t/>
-            </a:r>
-            <a:endParaRPr sz="1800">
-              <a:solidFill>
-                <a:schemeClr val="dk1"/>
-              </a:solidFill>
-            </a:endParaRPr>
-          </a:p>
-          <a:p>
-            <a:pPr indent="0" lvl="0" marL="0" rtl="0" algn="l">
-              <a:spcBef>
-                <a:spcPts val="0"/>
-              </a:spcBef>
-              <a:spcAft>
-                <a:spcPts val="0"/>
-              </a:spcAft>
-              <a:buNone/>
-            </a:pPr>
-            <a:r>
-              <a:t/>
-            </a:r>
-            <a:endParaRPr sz="1800">
-              <a:solidFill>
-                <a:schemeClr val="dk1"/>
-              </a:solidFill>
-            </a:endParaRPr>
-          </a:p>
-        </p:txBody>
-      </p:sp>
-      <p:pic>
-        <p:nvPicPr>
-          <p:cNvPr id="137" name="Google Shape;137;p23"/>
-          <p:cNvPicPr preferRelativeResize="0"/>
-          <p:nvPr/>
-        </p:nvPicPr>
-        <p:blipFill>
-          <a:blip r:embed="rId3">
-            <a:alphaModFix/>
-          </a:blip>
-          <a:stretch>
-            <a:fillRect/>
-          </a:stretch>
-        </p:blipFill>
-        <p:spPr>
-          <a:xfrm>
-            <a:off x="4352200" y="445026"/>
-            <a:ext cx="4420750" cy="3907250"/>
-          </a:xfrm>
-          <a:prstGeom prst="rect">
-            <a:avLst/>
-          </a:prstGeom>
-          <a:noFill/>
-          <a:ln>
-            <a:noFill/>
-          </a:ln>
-        </p:spPr>
-      </p:pic>
-      <p:graphicFrame>
-        <p:nvGraphicFramePr>
-          <p:cNvPr id="138" name="Google Shape;138;p23"/>
-          <p:cNvGraphicFramePr/>
-          <p:nvPr/>
-        </p:nvGraphicFramePr>
-        <p:xfrm>
-          <a:off x="2503163" y="872125"/>
-          <a:ext cx="3000000" cy="3000000"/>
-        </p:xfrm>
-        <a:graphic>
-          <a:graphicData uri="http://schemas.openxmlformats.org/drawingml/2006/table">
-            <a:tbl>
-              <a:tblPr>
-                <a:noFill/>
-                <a:tableStyleId>{7B1D232C-E315-488B-8EF8-48D490293407}</a:tableStyleId>
-              </a:tblPr>
-              <a:tblGrid>
-                <a:gridCol w="568125"/>
-                <a:gridCol w="568125"/>
-                <a:gridCol w="568125"/>
-              </a:tblGrid>
-              <a:tr h="392625">
-                <a:tc>
-                  <a:txBody>
-                    <a:bodyPr/>
-                    <a:lstStyle/>
-                    <a:p>
-                      <a:pPr indent="0" lvl="0" marL="0" rtl="0" algn="l">
-                        <a:spcBef>
-                          <a:spcPts val="0"/>
-                        </a:spcBef>
-                        <a:spcAft>
-                          <a:spcPts val="0"/>
-                        </a:spcAft>
-                        <a:buNone/>
-                      </a:pPr>
-                      <a:r>
-                        <a:rPr lang="en">
-                          <a:solidFill>
-                            <a:srgbClr val="FFFFFF"/>
-                          </a:solidFill>
-                        </a:rPr>
-                        <a:t>𝛿</a:t>
-                      </a:r>
-                      <a:endParaRPr>
-                        <a:solidFill>
-                          <a:srgbClr val="FFFFFF"/>
-                        </a:solidFill>
-                      </a:endParaRPr>
-                    </a:p>
-                  </a:txBody>
-                  <a:tcPr marT="91425" marB="91425" marR="91425" marL="91425"/>
-                </a:tc>
-                <a:tc>
-                  <a:txBody>
-                    <a:bodyPr/>
-                    <a:lstStyle/>
-                    <a:p>
-                      <a:pPr indent="0" lvl="0" marL="0" rtl="0" algn="l">
-                        <a:spcBef>
-                          <a:spcPts val="0"/>
-                        </a:spcBef>
-                        <a:spcAft>
-                          <a:spcPts val="0"/>
-                        </a:spcAft>
-                        <a:buNone/>
-                      </a:pPr>
-                      <a:r>
-                        <a:rPr lang="en">
-                          <a:solidFill>
-                            <a:srgbClr val="FFFFFF"/>
-                          </a:solidFill>
-                        </a:rPr>
-                        <a:t>0</a:t>
-                      </a:r>
-                      <a:endParaRPr>
-                        <a:solidFill>
-                          <a:srgbClr val="FFFFFF"/>
-                        </a:solidFill>
-                      </a:endParaRPr>
-                    </a:p>
-                  </a:txBody>
-                  <a:tcPr marT="91425" marB="91425" marR="91425" marL="91425"/>
-                </a:tc>
-                <a:tc>
-                  <a:txBody>
-                    <a:bodyPr/>
-                    <a:lstStyle/>
-                    <a:p>
-                      <a:pPr indent="0" lvl="0" marL="0" rtl="0" algn="l">
-                        <a:spcBef>
-                          <a:spcPts val="0"/>
-                        </a:spcBef>
-                        <a:spcAft>
-                          <a:spcPts val="0"/>
-                        </a:spcAft>
-                        <a:buNone/>
-                      </a:pPr>
-                      <a:r>
-                        <a:rPr lang="en">
-                          <a:solidFill>
-                            <a:srgbClr val="FFFFFF"/>
-                          </a:solidFill>
-                        </a:rPr>
-                        <a:t>1</a:t>
-                      </a:r>
-                      <a:endParaRPr>
-                        <a:solidFill>
-                          <a:srgbClr val="FFFFFF"/>
-                        </a:solidFill>
-                      </a:endParaRPr>
-                    </a:p>
-                  </a:txBody>
-                  <a:tcPr marT="91425" marB="91425" marR="91425" marL="91425"/>
-                </a:tc>
-              </a:tr>
-              <a:tr h="392625">
-                <a:tc>
-                  <a:txBody>
-                    <a:bodyPr/>
-                    <a:lstStyle/>
-                    <a:p>
-                      <a:pPr indent="0" lvl="0" marL="0" rtl="0" algn="l">
-                        <a:spcBef>
-                          <a:spcPts val="0"/>
-                        </a:spcBef>
-                        <a:spcAft>
-                          <a:spcPts val="0"/>
-                        </a:spcAft>
-                        <a:buNone/>
-                      </a:pPr>
-                      <a:r>
-                        <a:rPr lang="en">
-                          <a:solidFill>
-                            <a:srgbClr val="FFFFFF"/>
-                          </a:solidFill>
-                        </a:rPr>
-                        <a:t>s1</a:t>
-                      </a:r>
-                      <a:endParaRPr>
-                        <a:solidFill>
-                          <a:srgbClr val="FFFFFF"/>
-                        </a:solidFill>
-                      </a:endParaRPr>
-                    </a:p>
-                  </a:txBody>
-                  <a:tcPr marT="91425" marB="91425" marR="91425" marL="91425"/>
-                </a:tc>
-                <a:tc>
-                  <a:txBody>
-                    <a:bodyPr/>
-                    <a:lstStyle/>
-                    <a:p>
-                      <a:pPr indent="0" lvl="0" marL="0" rtl="0" algn="l">
-                        <a:spcBef>
-                          <a:spcPts val="0"/>
-                        </a:spcBef>
-                        <a:spcAft>
-                          <a:spcPts val="0"/>
-                        </a:spcAft>
-                        <a:buNone/>
-                      </a:pPr>
-                      <a:r>
-                        <a:rPr lang="en">
-                          <a:solidFill>
-                            <a:srgbClr val="FFFFFF"/>
-                          </a:solidFill>
-                        </a:rPr>
-                        <a:t>s1</a:t>
-                      </a:r>
-                      <a:endParaRPr>
-                        <a:solidFill>
-                          <a:srgbClr val="FFFFFF"/>
-                        </a:solidFill>
-                      </a:endParaRPr>
-                    </a:p>
-                  </a:txBody>
-                  <a:tcPr marT="91425" marB="91425" marR="91425" marL="91425"/>
-                </a:tc>
-                <a:tc>
-                  <a:txBody>
-                    <a:bodyPr/>
-                    <a:lstStyle/>
-                    <a:p>
-                      <a:pPr indent="0" lvl="0" marL="0" rtl="0" algn="l">
-                        <a:spcBef>
-                          <a:spcPts val="0"/>
-                        </a:spcBef>
-                        <a:spcAft>
-                          <a:spcPts val="0"/>
-                        </a:spcAft>
-                        <a:buNone/>
-                      </a:pPr>
-                      <a:r>
-                        <a:rPr lang="en">
-                          <a:solidFill>
-                            <a:srgbClr val="FFFFFF"/>
-                          </a:solidFill>
-                        </a:rPr>
-                        <a:t>s2</a:t>
-                      </a:r>
-                      <a:endParaRPr>
-                        <a:solidFill>
-                          <a:srgbClr val="FFFFFF"/>
-                        </a:solidFill>
-                      </a:endParaRPr>
-                    </a:p>
-                  </a:txBody>
-                  <a:tcPr marT="91425" marB="91425" marR="91425" marL="91425"/>
-                </a:tc>
-              </a:tr>
-              <a:tr h="392625">
-                <a:tc>
-                  <a:txBody>
-                    <a:bodyPr/>
-                    <a:lstStyle/>
-                    <a:p>
-                      <a:pPr indent="0" lvl="0" marL="0" rtl="0" algn="l">
-                        <a:spcBef>
-                          <a:spcPts val="0"/>
-                        </a:spcBef>
-                        <a:spcAft>
-                          <a:spcPts val="0"/>
-                        </a:spcAft>
-                        <a:buNone/>
-                      </a:pPr>
-                      <a:r>
-                        <a:rPr lang="en">
-                          <a:solidFill>
-                            <a:srgbClr val="FFFFFF"/>
-                          </a:solidFill>
-                        </a:rPr>
-                        <a:t>s2</a:t>
-                      </a:r>
-                      <a:endParaRPr>
-                        <a:solidFill>
-                          <a:srgbClr val="FFFFFF"/>
-                        </a:solidFill>
-                      </a:endParaRPr>
-                    </a:p>
-                  </a:txBody>
-                  <a:tcPr marT="91425" marB="91425" marR="91425" marL="91425"/>
-                </a:tc>
-                <a:tc>
-                  <a:txBody>
-                    <a:bodyPr/>
-                    <a:lstStyle/>
-                    <a:p>
-                      <a:pPr indent="0" lvl="0" marL="0" rtl="0" algn="l">
-                        <a:spcBef>
-                          <a:spcPts val="0"/>
-                        </a:spcBef>
-                        <a:spcAft>
-                          <a:spcPts val="0"/>
-                        </a:spcAft>
-                        <a:buNone/>
-                      </a:pPr>
-                      <a:r>
-                        <a:rPr lang="en">
-                          <a:solidFill>
-                            <a:srgbClr val="FFFFFF"/>
-                          </a:solidFill>
-                        </a:rPr>
-                        <a:t>s3</a:t>
-                      </a:r>
-                      <a:endParaRPr>
-                        <a:solidFill>
-                          <a:srgbClr val="FFFFFF"/>
-                        </a:solidFill>
-                      </a:endParaRPr>
-                    </a:p>
-                  </a:txBody>
-                  <a:tcPr marT="91425" marB="91425" marR="91425" marL="91425"/>
-                </a:tc>
-                <a:tc>
-                  <a:txBody>
-                    <a:bodyPr/>
-                    <a:lstStyle/>
-                    <a:p>
-                      <a:pPr indent="0" lvl="0" marL="0" rtl="0" algn="l">
-                        <a:spcBef>
-                          <a:spcPts val="0"/>
-                        </a:spcBef>
-                        <a:spcAft>
-                          <a:spcPts val="0"/>
-                        </a:spcAft>
-                        <a:buNone/>
-                      </a:pPr>
-                      <a:r>
-                        <a:rPr lang="en">
-                          <a:solidFill>
-                            <a:srgbClr val="FFFFFF"/>
-                          </a:solidFill>
-                        </a:rPr>
-                        <a:t>s2</a:t>
-                      </a:r>
-                      <a:endParaRPr>
-                        <a:solidFill>
-                          <a:srgbClr val="FFFFFF"/>
-                        </a:solidFill>
-                      </a:endParaRPr>
-                    </a:p>
-                  </a:txBody>
-                  <a:tcPr marT="91425" marB="91425" marR="91425" marL="91425"/>
-                </a:tc>
-              </a:tr>
-              <a:tr h="392625">
-                <a:tc>
-                  <a:txBody>
-                    <a:bodyPr/>
-                    <a:lstStyle/>
-                    <a:p>
-                      <a:pPr indent="0" lvl="0" marL="0" rtl="0" algn="l">
-                        <a:spcBef>
-                          <a:spcPts val="0"/>
-                        </a:spcBef>
-                        <a:spcAft>
-                          <a:spcPts val="0"/>
-                        </a:spcAft>
-                        <a:buNone/>
-                      </a:pPr>
-                      <a:r>
-                        <a:rPr lang="en">
-                          <a:solidFill>
-                            <a:srgbClr val="FFFFFF"/>
-                          </a:solidFill>
-                        </a:rPr>
-                        <a:t>s3</a:t>
-                      </a:r>
-                      <a:endParaRPr>
-                        <a:solidFill>
-                          <a:srgbClr val="FFFFFF"/>
-                        </a:solidFill>
-                      </a:endParaRPr>
-                    </a:p>
-                  </a:txBody>
-                  <a:tcPr marT="91425" marB="91425" marR="91425" marL="91425"/>
-                </a:tc>
-                <a:tc>
-                  <a:txBody>
-                    <a:bodyPr/>
-                    <a:lstStyle/>
-                    <a:p>
-                      <a:pPr indent="0" lvl="0" marL="0" rtl="0" algn="l">
-                        <a:spcBef>
-                          <a:spcPts val="0"/>
-                        </a:spcBef>
-                        <a:spcAft>
-                          <a:spcPts val="0"/>
-                        </a:spcAft>
-                        <a:buNone/>
-                      </a:pPr>
-                      <a:r>
-                        <a:rPr lang="en">
-                          <a:solidFill>
-                            <a:srgbClr val="FFFFFF"/>
-                          </a:solidFill>
-                        </a:rPr>
-                        <a:t>s3</a:t>
-                      </a:r>
-                      <a:endParaRPr>
-                        <a:solidFill>
-                          <a:srgbClr val="FFFFFF"/>
-                        </a:solidFill>
-                      </a:endParaRPr>
-                    </a:p>
-                  </a:txBody>
-                  <a:tcPr marT="91425" marB="91425" marR="91425" marL="91425"/>
-                </a:tc>
-                <a:tc>
-                  <a:txBody>
-                    <a:bodyPr/>
-                    <a:lstStyle/>
-                    <a:p>
-                      <a:pPr indent="0" lvl="0" marL="0" rtl="0" algn="l">
-                        <a:spcBef>
-                          <a:spcPts val="0"/>
-                        </a:spcBef>
-                        <a:spcAft>
-                          <a:spcPts val="0"/>
-                        </a:spcAft>
-                        <a:buNone/>
-                      </a:pPr>
-                      <a:r>
-                        <a:rPr lang="en">
-                          <a:solidFill>
-                            <a:srgbClr val="FFFFFF"/>
-                          </a:solidFill>
-                        </a:rPr>
-                        <a:t>s1</a:t>
-                      </a:r>
-                      <a:endParaRPr>
-                        <a:solidFill>
-                          <a:srgbClr val="FFFFFF"/>
-                        </a:solidFill>
-                      </a:endParaRPr>
-                    </a:p>
-                  </a:txBody>
-                  <a:tcPr marT="91425" marB="91425" marR="91425" marL="91425"/>
-                </a:tc>
-              </a:tr>
-            </a:tbl>
-          </a:graphicData>
-        </a:graphic>
-      </p:graphicFrame>
-    </p:spTree>
-  </p:cSld>
-  <p:clrMapOvr>
-    <a:masterClrMapping/>
-  </p:clrMapOvr>
-</p:sld>
-</file>
-
-<file path=ppt/slides/slide12.xml><?xml version="1.0" encoding="utf-8"?>
-<p:sld xmlns:a="http://schemas.openxmlformats.org/drawingml/2006/main" xmlns:r="http://schemas.openxmlformats.org/officeDocument/2006/relationships" xmlns:mc="http://schemas.openxmlformats.org/markup-compatibility/2006" xmlns:mv="urn:schemas-microsoft-com:mac:vml" xmlns:p="http://schemas.openxmlformats.org/presentationml/2006/main" xmlns:c="http://schemas.openxmlformats.org/drawingml/2006/chart" xmlns:dgm="http://schemas.openxmlformats.org/drawingml/2006/diagram" xmlns:o="urn:schemas-microsoft-com:office:office" xmlns:v="urn:schemas-microsoft-com:vml" xmlns:pvml="urn:schemas-microsoft-com:office:powerpoint" xmlns:com="http://schemas.openxmlformats.org/drawingml/2006/compatibility" xmlns:p14="http://schemas.microsoft.com/office/powerpoint/2010/main" xmlns:p15="http://schemas.microsoft.com/office/powerpoint/2012/main" xmlns:ahyp="http://schemas.microsoft.com/office/drawing/2018/hyperlinkcolor">
-  <p:cSld>
-    <p:spTree>
-      <p:nvGrpSpPr>
-        <p:cNvPr id="142" name="Shape 142"/>
-        <p:cNvGrpSpPr/>
-        <p:nvPr/>
-      </p:nvGrpSpPr>
-      <p:grpSpPr>
-        <a:xfrm>
-          <a:off x="0" y="0"/>
-          <a:ext cx="0" cy="0"/>
-          <a:chOff x="0" y="0"/>
-          <a:chExt cx="0" cy="0"/>
-        </a:xfrm>
-      </p:grpSpPr>
-      <p:sp>
-        <p:nvSpPr>
-          <p:cNvPr id="143" name="Google Shape;143;p24"/>
-          <p:cNvSpPr txBox="1"/>
-          <p:nvPr>
-            <p:ph type="title"/>
-          </p:nvPr>
-        </p:nvSpPr>
-        <p:spPr>
-          <a:xfrm>
             <a:off x="311700" y="376375"/>
             <a:ext cx="8520600" cy="572700"/>
           </a:xfrm>
@@ -9737,7 +8187,7 @@
       </p:sp>
       <p:sp>
         <p:nvSpPr>
-          <p:cNvPr id="144" name="Google Shape;144;p24"/>
+          <p:cNvPr id="136" name="Google Shape;136;p23"/>
           <p:cNvSpPr txBox="1"/>
           <p:nvPr/>
         </p:nvSpPr>
@@ -9830,7 +8280,7 @@
       </p:sp>
       <p:sp>
         <p:nvSpPr>
-          <p:cNvPr id="145" name="Google Shape;145;p24"/>
+          <p:cNvPr id="137" name="Google Shape;137;p23"/>
           <p:cNvSpPr txBox="1"/>
           <p:nvPr/>
         </p:nvSpPr>
@@ -10000,7 +8450,7 @@
       </p:sp>
       <p:pic>
         <p:nvPicPr>
-          <p:cNvPr id="146" name="Google Shape;146;p24" title="Screenshot 2026-04-26 at 12.27.30 PM.png"/>
+          <p:cNvPr id="138" name="Google Shape;138;p23" title="Screenshot 2026-04-26 at 12.27.30 PM.png"/>
           <p:cNvPicPr preferRelativeResize="0"/>
           <p:nvPr/>
         </p:nvPicPr>
@@ -10028,7 +8478,7 @@
       </p:pic>
       <p:sp>
         <p:nvSpPr>
-          <p:cNvPr id="147" name="Google Shape;147;p24"/>
+          <p:cNvPr id="139" name="Google Shape;139;p23"/>
           <p:cNvSpPr/>
           <p:nvPr/>
         </p:nvSpPr>
@@ -10075,7 +8525,7 @@
       </p:sp>
       <p:sp>
         <p:nvSpPr>
-          <p:cNvPr id="148" name="Google Shape;148;p24"/>
+          <p:cNvPr id="140" name="Google Shape;140;p23"/>
           <p:cNvSpPr/>
           <p:nvPr/>
         </p:nvSpPr>
@@ -10122,7 +8572,7 @@
       </p:sp>
       <p:sp>
         <p:nvSpPr>
-          <p:cNvPr id="149" name="Google Shape;149;p24"/>
+          <p:cNvPr id="141" name="Google Shape;141;p23"/>
           <p:cNvSpPr/>
           <p:nvPr/>
         </p:nvSpPr>
@@ -10175,12 +8625,12 @@
 </p:sld>
 </file>
 
-<file path=ppt/slides/slide13.xml><?xml version="1.0" encoding="utf-8"?>
+<file path=ppt/slides/slide12.xml><?xml version="1.0" encoding="utf-8"?>
 <p:sld xmlns:a="http://schemas.openxmlformats.org/drawingml/2006/main" xmlns:r="http://schemas.openxmlformats.org/officeDocument/2006/relationships" xmlns:mc="http://schemas.openxmlformats.org/markup-compatibility/2006" xmlns:mv="urn:schemas-microsoft-com:mac:vml" xmlns:p="http://schemas.openxmlformats.org/presentationml/2006/main" xmlns:c="http://schemas.openxmlformats.org/drawingml/2006/chart" xmlns:dgm="http://schemas.openxmlformats.org/drawingml/2006/diagram" xmlns:o="urn:schemas-microsoft-com:office:office" xmlns:v="urn:schemas-microsoft-com:vml" xmlns:pvml="urn:schemas-microsoft-com:office:powerpoint" xmlns:com="http://schemas.openxmlformats.org/drawingml/2006/compatibility" xmlns:p14="http://schemas.microsoft.com/office/powerpoint/2010/main" xmlns:p15="http://schemas.microsoft.com/office/powerpoint/2012/main" xmlns:ahyp="http://schemas.microsoft.com/office/drawing/2018/hyperlinkcolor">
   <p:cSld>
     <p:spTree>
       <p:nvGrpSpPr>
-        <p:cNvPr id="153" name="Shape 153"/>
+        <p:cNvPr id="145" name="Shape 145"/>
         <p:cNvGrpSpPr/>
         <p:nvPr/>
       </p:nvGrpSpPr>
@@ -10194,7 +8644,7 @@
       </p:grpSpPr>
       <p:sp>
         <p:nvSpPr>
-          <p:cNvPr id="154" name="Google Shape;154;p25"/>
+          <p:cNvPr id="146" name="Google Shape;146;p24"/>
           <p:cNvSpPr txBox="1"/>
           <p:nvPr>
             <p:ph type="title"/>
@@ -10238,7 +8688,7 @@
       </p:sp>
       <p:pic>
         <p:nvPicPr>
-          <p:cNvPr id="155" name="Google Shape;155;p25" title="Screenshot 2026-04-24 at 3.04.45 PM.png"/>
+          <p:cNvPr id="147" name="Google Shape;147;p24" title="Screenshot 2026-04-24 at 3.04.45 PM.png"/>
           <p:cNvPicPr preferRelativeResize="0"/>
           <p:nvPr/>
         </p:nvPicPr>
@@ -10266,7 +8716,7 @@
       </p:pic>
       <p:sp>
         <p:nvSpPr>
-          <p:cNvPr id="156" name="Google Shape;156;p25"/>
+          <p:cNvPr id="148" name="Google Shape;148;p24"/>
           <p:cNvSpPr txBox="1"/>
           <p:nvPr/>
         </p:nvSpPr>
@@ -10316,7 +8766,7 @@
       </p:sp>
       <p:sp>
         <p:nvSpPr>
-          <p:cNvPr id="157" name="Google Shape;157;p25"/>
+          <p:cNvPr id="149" name="Google Shape;149;p24"/>
           <p:cNvSpPr txBox="1"/>
           <p:nvPr/>
         </p:nvSpPr>
@@ -10422,7 +8872,7 @@
       </p:sp>
       <p:sp>
         <p:nvSpPr>
-          <p:cNvPr id="158" name="Google Shape;158;p25"/>
+          <p:cNvPr id="150" name="Google Shape;150;p24"/>
           <p:cNvSpPr/>
           <p:nvPr/>
         </p:nvSpPr>
@@ -10469,7 +8919,7 @@
       </p:sp>
       <p:sp>
         <p:nvSpPr>
-          <p:cNvPr id="159" name="Google Shape;159;p25"/>
+          <p:cNvPr id="151" name="Google Shape;151;p24"/>
           <p:cNvSpPr/>
           <p:nvPr/>
         </p:nvSpPr>
@@ -10516,7 +8966,7 @@
       </p:sp>
       <p:sp>
         <p:nvSpPr>
-          <p:cNvPr id="160" name="Google Shape;160;p25"/>
+          <p:cNvPr id="152" name="Google Shape;152;p24"/>
           <p:cNvSpPr/>
           <p:nvPr/>
         </p:nvSpPr>
@@ -10563,7 +9013,7 @@
       </p:sp>
       <p:sp>
         <p:nvSpPr>
-          <p:cNvPr id="161" name="Google Shape;161;p25"/>
+          <p:cNvPr id="153" name="Google Shape;153;p24"/>
           <p:cNvSpPr txBox="1"/>
           <p:nvPr/>
         </p:nvSpPr>
@@ -10675,12 +9125,12 @@
 </p:sld>
 </file>
 
-<file path=ppt/slides/slide14.xml><?xml version="1.0" encoding="utf-8"?>
+<file path=ppt/slides/slide13.xml><?xml version="1.0" encoding="utf-8"?>
 <p:sld xmlns:a="http://schemas.openxmlformats.org/drawingml/2006/main" xmlns:r="http://schemas.openxmlformats.org/officeDocument/2006/relationships" xmlns:mc="http://schemas.openxmlformats.org/markup-compatibility/2006" xmlns:mv="urn:schemas-microsoft-com:mac:vml" xmlns:p="http://schemas.openxmlformats.org/presentationml/2006/main" xmlns:c="http://schemas.openxmlformats.org/drawingml/2006/chart" xmlns:dgm="http://schemas.openxmlformats.org/drawingml/2006/diagram" xmlns:o="urn:schemas-microsoft-com:office:office" xmlns:v="urn:schemas-microsoft-com:vml" xmlns:pvml="urn:schemas-microsoft-com:office:powerpoint" xmlns:com="http://schemas.openxmlformats.org/drawingml/2006/compatibility" xmlns:p14="http://schemas.microsoft.com/office/powerpoint/2010/main" xmlns:p15="http://schemas.microsoft.com/office/powerpoint/2012/main" xmlns:ahyp="http://schemas.microsoft.com/office/drawing/2018/hyperlinkcolor">
   <p:cSld>
     <p:spTree>
       <p:nvGrpSpPr>
-        <p:cNvPr id="165" name="Shape 165"/>
+        <p:cNvPr id="157" name="Shape 157"/>
         <p:cNvGrpSpPr/>
         <p:nvPr/>
       </p:nvGrpSpPr>
@@ -10694,7 +9144,7 @@
       </p:grpSpPr>
       <p:sp>
         <p:nvSpPr>
-          <p:cNvPr id="166" name="Google Shape;166;p26"/>
+          <p:cNvPr id="158" name="Google Shape;158;p25"/>
           <p:cNvSpPr txBox="1"/>
           <p:nvPr>
             <p:ph type="title"/>
@@ -10734,7 +9184,7 @@
       </p:sp>
       <p:pic>
         <p:nvPicPr>
-          <p:cNvPr id="167" name="Google Shape;167;p26" title="Screenshot 2026-04-24 at 3.04.45 PM.png"/>
+          <p:cNvPr id="159" name="Google Shape;159;p25" title="Screenshot 2026-04-24 at 3.04.45 PM.png"/>
           <p:cNvPicPr preferRelativeResize="0"/>
           <p:nvPr/>
         </p:nvPicPr>
@@ -10762,7 +9212,7 @@
       </p:pic>
       <p:sp>
         <p:nvSpPr>
-          <p:cNvPr id="168" name="Google Shape;168;p26"/>
+          <p:cNvPr id="160" name="Google Shape;160;p25"/>
           <p:cNvSpPr/>
           <p:nvPr/>
         </p:nvSpPr>
@@ -10809,7 +9259,7 @@
       </p:sp>
       <p:sp>
         <p:nvSpPr>
-          <p:cNvPr id="169" name="Google Shape;169;p26"/>
+          <p:cNvPr id="161" name="Google Shape;161;p25"/>
           <p:cNvSpPr txBox="1"/>
           <p:nvPr/>
         </p:nvSpPr>
@@ -10963,7 +9413,7 @@
       </p:sp>
       <p:sp>
         <p:nvSpPr>
-          <p:cNvPr id="170" name="Google Shape;170;p26"/>
+          <p:cNvPr id="162" name="Google Shape;162;p25"/>
           <p:cNvSpPr/>
           <p:nvPr/>
         </p:nvSpPr>
@@ -11010,7 +9460,7 @@
       </p:sp>
       <p:sp>
         <p:nvSpPr>
-          <p:cNvPr id="171" name="Google Shape;171;p26"/>
+          <p:cNvPr id="163" name="Google Shape;163;p25"/>
           <p:cNvSpPr/>
           <p:nvPr/>
         </p:nvSpPr>
@@ -11057,7 +9507,7 @@
       </p:sp>
       <p:sp>
         <p:nvSpPr>
-          <p:cNvPr id="172" name="Google Shape;172;p26"/>
+          <p:cNvPr id="164" name="Google Shape;164;p25"/>
           <p:cNvSpPr txBox="1"/>
           <p:nvPr/>
         </p:nvSpPr>
@@ -11131,7 +9581,7 @@
       </p:sp>
       <p:sp>
         <p:nvSpPr>
-          <p:cNvPr id="173" name="Google Shape;173;p26"/>
+          <p:cNvPr id="165" name="Google Shape;165;p25"/>
           <p:cNvSpPr txBox="1"/>
           <p:nvPr/>
         </p:nvSpPr>
@@ -11181,7 +9631,7 @@
       </p:sp>
       <p:sp>
         <p:nvSpPr>
-          <p:cNvPr id="174" name="Google Shape;174;p26"/>
+          <p:cNvPr id="166" name="Google Shape;166;p25"/>
           <p:cNvSpPr/>
           <p:nvPr/>
         </p:nvSpPr>
@@ -11234,12 +9684,12 @@
 </p:sld>
 </file>
 
-<file path=ppt/slides/slide15.xml><?xml version="1.0" encoding="utf-8"?>
+<file path=ppt/slides/slide14.xml><?xml version="1.0" encoding="utf-8"?>
 <p:sld xmlns:a="http://schemas.openxmlformats.org/drawingml/2006/main" xmlns:r="http://schemas.openxmlformats.org/officeDocument/2006/relationships" xmlns:mc="http://schemas.openxmlformats.org/markup-compatibility/2006" xmlns:mv="urn:schemas-microsoft-com:mac:vml" xmlns:p="http://schemas.openxmlformats.org/presentationml/2006/main" xmlns:c="http://schemas.openxmlformats.org/drawingml/2006/chart" xmlns:dgm="http://schemas.openxmlformats.org/drawingml/2006/diagram" xmlns:o="urn:schemas-microsoft-com:office:office" xmlns:v="urn:schemas-microsoft-com:vml" xmlns:pvml="urn:schemas-microsoft-com:office:powerpoint" xmlns:com="http://schemas.openxmlformats.org/drawingml/2006/compatibility" xmlns:p14="http://schemas.microsoft.com/office/powerpoint/2010/main" xmlns:p15="http://schemas.microsoft.com/office/powerpoint/2012/main" xmlns:ahyp="http://schemas.microsoft.com/office/drawing/2018/hyperlinkcolor">
   <p:cSld>
     <p:spTree>
       <p:nvGrpSpPr>
-        <p:cNvPr id="178" name="Shape 178"/>
+        <p:cNvPr id="170" name="Shape 170"/>
         <p:cNvGrpSpPr/>
         <p:nvPr/>
       </p:nvGrpSpPr>
@@ -11253,7 +9703,7 @@
       </p:grpSpPr>
       <p:sp>
         <p:nvSpPr>
-          <p:cNvPr id="179" name="Google Shape;179;p27"/>
+          <p:cNvPr id="171" name="Google Shape;171;p26"/>
           <p:cNvSpPr txBox="1"/>
           <p:nvPr>
             <p:ph type="title"/>
@@ -11293,7 +9743,7 @@
       </p:sp>
       <p:sp>
         <p:nvSpPr>
-          <p:cNvPr id="180" name="Google Shape;180;p27"/>
+          <p:cNvPr id="172" name="Google Shape;172;p26"/>
           <p:cNvSpPr txBox="1"/>
           <p:nvPr>
             <p:ph idx="1" type="body"/>
@@ -11466,7 +9916,7 @@
       </p:sp>
       <p:pic>
         <p:nvPicPr>
-          <p:cNvPr id="181" name="Google Shape;181;p27" title="Screenshot 2026-04-24 at 3.04.45 PM.png"/>
+          <p:cNvPr id="173" name="Google Shape;173;p26" title="Screenshot 2026-04-24 at 3.04.45 PM.png"/>
           <p:cNvPicPr preferRelativeResize="0"/>
           <p:nvPr/>
         </p:nvPicPr>
@@ -11500,12 +9950,12 @@
 </p:sld>
 </file>
 
-<file path=ppt/slides/slide16.xml><?xml version="1.0" encoding="utf-8"?>
+<file path=ppt/slides/slide15.xml><?xml version="1.0" encoding="utf-8"?>
 <p:sld xmlns:a="http://schemas.openxmlformats.org/drawingml/2006/main" xmlns:r="http://schemas.openxmlformats.org/officeDocument/2006/relationships" xmlns:mc="http://schemas.openxmlformats.org/markup-compatibility/2006" xmlns:mv="urn:schemas-microsoft-com:mac:vml" xmlns:p="http://schemas.openxmlformats.org/presentationml/2006/main" xmlns:c="http://schemas.openxmlformats.org/drawingml/2006/chart" xmlns:dgm="http://schemas.openxmlformats.org/drawingml/2006/diagram" xmlns:o="urn:schemas-microsoft-com:office:office" xmlns:v="urn:schemas-microsoft-com:vml" xmlns:pvml="urn:schemas-microsoft-com:office:powerpoint" xmlns:com="http://schemas.openxmlformats.org/drawingml/2006/compatibility" xmlns:p14="http://schemas.microsoft.com/office/powerpoint/2010/main" xmlns:p15="http://schemas.microsoft.com/office/powerpoint/2012/main" xmlns:ahyp="http://schemas.microsoft.com/office/drawing/2018/hyperlinkcolor">
   <p:cSld>
     <p:spTree>
       <p:nvGrpSpPr>
-        <p:cNvPr id="185" name="Shape 185"/>
+        <p:cNvPr id="177" name="Shape 177"/>
         <p:cNvGrpSpPr/>
         <p:nvPr/>
       </p:nvGrpSpPr>
@@ -11519,7 +9969,7 @@
       </p:grpSpPr>
       <p:sp>
         <p:nvSpPr>
-          <p:cNvPr id="186" name="Google Shape;186;p28"/>
+          <p:cNvPr id="178" name="Google Shape;178;p27"/>
           <p:cNvSpPr txBox="1"/>
           <p:nvPr>
             <p:ph type="title"/>
@@ -11559,7 +10009,7 @@
       </p:sp>
       <p:sp>
         <p:nvSpPr>
-          <p:cNvPr id="187" name="Google Shape;187;p28"/>
+          <p:cNvPr id="179" name="Google Shape;179;p27"/>
           <p:cNvSpPr txBox="1"/>
           <p:nvPr>
             <p:ph idx="1" type="body"/>
@@ -11738,7 +10188,7 @@
       </p:sp>
       <p:pic>
         <p:nvPicPr>
-          <p:cNvPr id="188" name="Google Shape;188;p28" title="Screenshot 2026-04-26 at 12.27.30 PM.png"/>
+          <p:cNvPr id="180" name="Google Shape;180;p27" title="Screenshot 2026-04-26 at 12.27.30 PM.png"/>
           <p:cNvPicPr preferRelativeResize="0"/>
           <p:nvPr/>
         </p:nvPicPr>
@@ -11752,7 +10202,7 @@
         </p:blipFill>
         <p:spPr>
           <a:xfrm>
-            <a:off x="4354503" y="642625"/>
+            <a:off x="4354503" y="632733"/>
             <a:ext cx="4732549" cy="3858250"/>
           </a:xfrm>
           <a:prstGeom prst="rect">
@@ -11772,12 +10222,12 @@
 </p:sld>
 </file>
 
-<file path=ppt/slides/slide17.xml><?xml version="1.0" encoding="utf-8"?>
+<file path=ppt/slides/slide16.xml><?xml version="1.0" encoding="utf-8"?>
 <p:sld xmlns:a="http://schemas.openxmlformats.org/drawingml/2006/main" xmlns:r="http://schemas.openxmlformats.org/officeDocument/2006/relationships" xmlns:mc="http://schemas.openxmlformats.org/markup-compatibility/2006" xmlns:mv="urn:schemas-microsoft-com:mac:vml" xmlns:p="http://schemas.openxmlformats.org/presentationml/2006/main" xmlns:c="http://schemas.openxmlformats.org/drawingml/2006/chart" xmlns:dgm="http://schemas.openxmlformats.org/drawingml/2006/diagram" xmlns:o="urn:schemas-microsoft-com:office:office" xmlns:v="urn:schemas-microsoft-com:vml" xmlns:pvml="urn:schemas-microsoft-com:office:powerpoint" xmlns:com="http://schemas.openxmlformats.org/drawingml/2006/compatibility" xmlns:p14="http://schemas.microsoft.com/office/powerpoint/2010/main" xmlns:p15="http://schemas.microsoft.com/office/powerpoint/2012/main" xmlns:ahyp="http://schemas.microsoft.com/office/drawing/2018/hyperlinkcolor">
   <p:cSld>
     <p:spTree>
       <p:nvGrpSpPr>
-        <p:cNvPr id="192" name="Shape 192"/>
+        <p:cNvPr id="184" name="Shape 184"/>
         <p:cNvGrpSpPr/>
         <p:nvPr/>
       </p:nvGrpSpPr>
@@ -11791,7 +10241,7 @@
       </p:grpSpPr>
       <p:sp>
         <p:nvSpPr>
-          <p:cNvPr id="193" name="Google Shape;193;p29"/>
+          <p:cNvPr id="185" name="Google Shape;185;p28"/>
           <p:cNvSpPr txBox="1"/>
           <p:nvPr>
             <p:ph type="title"/>
@@ -11831,7 +10281,7 @@
       </p:sp>
       <p:sp>
         <p:nvSpPr>
-          <p:cNvPr id="194" name="Google Shape;194;p29"/>
+          <p:cNvPr id="186" name="Google Shape;186;p28"/>
           <p:cNvSpPr txBox="1"/>
           <p:nvPr>
             <p:ph idx="1" type="body"/>
@@ -12103,7 +10553,7 @@
       </p:sp>
       <p:pic>
         <p:nvPicPr>
-          <p:cNvPr id="195" name="Google Shape;195;p29"/>
+          <p:cNvPr id="187" name="Google Shape;187;p28"/>
           <p:cNvPicPr preferRelativeResize="0"/>
           <p:nvPr/>
         </p:nvPicPr>
@@ -13397,7 +11847,7 @@
             <a:tbl>
               <a:tblPr>
                 <a:noFill/>
-                <a:tableStyleId>{7B1D232C-E315-488B-8EF8-48D490293407}</a:tableStyleId>
+                <a:tableStyleId>{B52B1555-68B5-4C20-843E-69694589948E}</a:tableStyleId>
               </a:tblPr>
               <a:tblGrid>
                 <a:gridCol w="568125"/>
@@ -14146,8 +12596,8 @@
         </p:nvSpPr>
         <p:spPr>
           <a:xfrm>
-            <a:off x="311700" y="1156225"/>
-            <a:ext cx="2919900" cy="1015800"/>
+            <a:off x="162925" y="1139350"/>
+            <a:ext cx="3434100" cy="738900"/>
           </a:xfrm>
           <a:prstGeom prst="rect">
             <a:avLst/>
@@ -14182,35 +12632,7 @@
                   <a:schemeClr val="dk1"/>
                 </a:solidFill>
               </a:rPr>
-              <a:t>Remove any unreachable states</a:t>
-            </a:r>
-            <a:endParaRPr sz="1800">
-              <a:solidFill>
-                <a:schemeClr val="dk1"/>
-              </a:solidFill>
-            </a:endParaRPr>
-          </a:p>
-          <a:p>
-            <a:pPr indent="-342900" lvl="0" marL="457200" rtl="0" algn="l">
-              <a:spcBef>
-                <a:spcPts val="0"/>
-              </a:spcBef>
-              <a:spcAft>
-                <a:spcPts val="0"/>
-              </a:spcAft>
-              <a:buClr>
-                <a:schemeClr val="dk1"/>
-              </a:buClr>
-              <a:buSzPts val="1800"/>
-              <a:buAutoNum type="arabicPeriod"/>
-            </a:pPr>
-            <a:r>
-              <a:rPr lang="en" sz="1800">
-                <a:solidFill>
-                  <a:schemeClr val="dk1"/>
-                </a:solidFill>
-              </a:rPr>
-              <a:t>In our case none </a:t>
+              <a:t>Partition into accept and non-accept states</a:t>
             </a:r>
             <a:endParaRPr sz="1800">
               <a:solidFill>
@@ -14248,697 +12670,255 @@
           </a:ln>
         </p:spPr>
       </p:pic>
-      <p:graphicFrame>
-        <p:nvGraphicFramePr>
+      <p:sp>
+        <p:nvSpPr>
           <p:cNvPr id="90" name="Google Shape;90;p17"/>
-          <p:cNvGraphicFramePr/>
+          <p:cNvSpPr txBox="1"/>
           <p:nvPr/>
-        </p:nvGraphicFramePr>
-        <p:xfrm>
-          <a:off x="719925" y="2172025"/>
-          <a:ext cx="3000000" cy="3000000"/>
-        </p:xfrm>
-        <a:graphic>
-          <a:graphicData uri="http://schemas.openxmlformats.org/drawingml/2006/table">
-            <a:tbl>
-              <a:tblPr>
-                <a:noFill/>
-                <a:tableStyleId>{7B1D232C-E315-488B-8EF8-48D490293407}</a:tableStyleId>
-              </a:tblPr>
-              <a:tblGrid>
-                <a:gridCol w="568125"/>
-                <a:gridCol w="568125"/>
-                <a:gridCol w="568125"/>
-              </a:tblGrid>
-              <a:tr h="392625">
-                <a:tc>
-                  <a:txBody>
-                    <a:bodyPr/>
-                    <a:lstStyle/>
-                    <a:p>
-                      <a:pPr indent="0" lvl="0" marL="0" rtl="0" algn="l">
-                        <a:spcBef>
-                          <a:spcPts val="0"/>
-                        </a:spcBef>
-                        <a:spcAft>
-                          <a:spcPts val="0"/>
-                        </a:spcAft>
-                        <a:buNone/>
-                      </a:pPr>
-                      <a:r>
-                        <a:rPr lang="en">
-                          <a:solidFill>
-                            <a:srgbClr val="FFFFFF"/>
-                          </a:solidFill>
-                        </a:rPr>
-                        <a:t>𝛿</a:t>
-                      </a:r>
-                      <a:endParaRPr>
-                        <a:solidFill>
-                          <a:srgbClr val="FFFFFF"/>
-                        </a:solidFill>
-                      </a:endParaRPr>
-                    </a:p>
-                  </a:txBody>
-                  <a:tcPr marT="91425" marB="91425" marR="91425" marL="91425"/>
-                </a:tc>
-                <a:tc>
-                  <a:txBody>
-                    <a:bodyPr/>
-                    <a:lstStyle/>
-                    <a:p>
-                      <a:pPr indent="0" lvl="0" marL="0" rtl="0" algn="l">
-                        <a:spcBef>
-                          <a:spcPts val="0"/>
-                        </a:spcBef>
-                        <a:spcAft>
-                          <a:spcPts val="0"/>
-                        </a:spcAft>
-                        <a:buNone/>
-                      </a:pPr>
-                      <a:r>
-                        <a:rPr lang="en">
-                          <a:solidFill>
-                            <a:srgbClr val="FFFFFF"/>
-                          </a:solidFill>
-                        </a:rPr>
-                        <a:t>0</a:t>
-                      </a:r>
-                      <a:endParaRPr>
-                        <a:solidFill>
-                          <a:srgbClr val="FFFFFF"/>
-                        </a:solidFill>
-                      </a:endParaRPr>
-                    </a:p>
-                  </a:txBody>
-                  <a:tcPr marT="91425" marB="91425" marR="91425" marL="91425"/>
-                </a:tc>
-                <a:tc>
-                  <a:txBody>
-                    <a:bodyPr/>
-                    <a:lstStyle/>
-                    <a:p>
-                      <a:pPr indent="0" lvl="0" marL="0" rtl="0" algn="l">
-                        <a:spcBef>
-                          <a:spcPts val="0"/>
-                        </a:spcBef>
-                        <a:spcAft>
-                          <a:spcPts val="0"/>
-                        </a:spcAft>
-                        <a:buNone/>
-                      </a:pPr>
-                      <a:r>
-                        <a:rPr lang="en">
-                          <a:solidFill>
-                            <a:srgbClr val="FFFFFF"/>
-                          </a:solidFill>
-                        </a:rPr>
-                        <a:t>1</a:t>
-                      </a:r>
-                      <a:endParaRPr>
-                        <a:solidFill>
-                          <a:srgbClr val="FFFFFF"/>
-                        </a:solidFill>
-                      </a:endParaRPr>
-                    </a:p>
-                  </a:txBody>
-                  <a:tcPr marT="91425" marB="91425" marR="91425" marL="91425"/>
-                </a:tc>
-              </a:tr>
-              <a:tr h="392625">
-                <a:tc>
-                  <a:txBody>
-                    <a:bodyPr/>
-                    <a:lstStyle/>
-                    <a:p>
-                      <a:pPr indent="0" lvl="0" marL="0" rtl="0" algn="l">
-                        <a:spcBef>
-                          <a:spcPts val="0"/>
-                        </a:spcBef>
-                        <a:spcAft>
-                          <a:spcPts val="0"/>
-                        </a:spcAft>
-                        <a:buNone/>
-                      </a:pPr>
-                      <a:r>
-                        <a:rPr lang="en">
-                          <a:solidFill>
-                            <a:srgbClr val="FFFFFF"/>
-                          </a:solidFill>
-                        </a:rPr>
-                        <a:t>q0</a:t>
-                      </a:r>
-                      <a:endParaRPr>
-                        <a:solidFill>
-                          <a:srgbClr val="FFFFFF"/>
-                        </a:solidFill>
-                      </a:endParaRPr>
-                    </a:p>
-                  </a:txBody>
-                  <a:tcPr marT="91425" marB="91425" marR="91425" marL="91425"/>
-                </a:tc>
-                <a:tc>
-                  <a:txBody>
-                    <a:bodyPr/>
-                    <a:lstStyle/>
-                    <a:p>
-                      <a:pPr indent="0" lvl="0" marL="0" rtl="0" algn="l">
-                        <a:spcBef>
-                          <a:spcPts val="0"/>
-                        </a:spcBef>
-                        <a:spcAft>
-                          <a:spcPts val="0"/>
-                        </a:spcAft>
-                        <a:buNone/>
-                      </a:pPr>
-                      <a:r>
-                        <a:rPr lang="en">
-                          <a:solidFill>
-                            <a:srgbClr val="FFFFFF"/>
-                          </a:solidFill>
-                        </a:rPr>
-                        <a:t>q1</a:t>
-                      </a:r>
-                      <a:endParaRPr>
-                        <a:solidFill>
-                          <a:srgbClr val="FFFFFF"/>
-                        </a:solidFill>
-                      </a:endParaRPr>
-                    </a:p>
-                  </a:txBody>
-                  <a:tcPr marT="91425" marB="91425" marR="91425" marL="91425"/>
-                </a:tc>
-                <a:tc>
-                  <a:txBody>
-                    <a:bodyPr/>
-                    <a:lstStyle/>
-                    <a:p>
-                      <a:pPr indent="0" lvl="0" marL="0" rtl="0" algn="l">
-                        <a:spcBef>
-                          <a:spcPts val="0"/>
-                        </a:spcBef>
-                        <a:spcAft>
-                          <a:spcPts val="0"/>
-                        </a:spcAft>
-                        <a:buNone/>
-                      </a:pPr>
-                      <a:r>
-                        <a:rPr lang="en">
-                          <a:solidFill>
-                            <a:srgbClr val="FFFFFF"/>
-                          </a:solidFill>
-                        </a:rPr>
-                        <a:t>q3</a:t>
-                      </a:r>
-                      <a:endParaRPr>
-                        <a:solidFill>
-                          <a:srgbClr val="FFFFFF"/>
-                        </a:solidFill>
-                      </a:endParaRPr>
-                    </a:p>
-                  </a:txBody>
-                  <a:tcPr marT="91425" marB="91425" marR="91425" marL="91425"/>
-                </a:tc>
-              </a:tr>
-              <a:tr h="392625">
-                <a:tc>
-                  <a:txBody>
-                    <a:bodyPr/>
-                    <a:lstStyle/>
-                    <a:p>
-                      <a:pPr indent="0" lvl="0" marL="0" rtl="0" algn="l">
-                        <a:spcBef>
-                          <a:spcPts val="0"/>
-                        </a:spcBef>
-                        <a:spcAft>
-                          <a:spcPts val="0"/>
-                        </a:spcAft>
-                        <a:buNone/>
-                      </a:pPr>
-                      <a:r>
-                        <a:rPr lang="en">
-                          <a:solidFill>
-                            <a:srgbClr val="FFFFFF"/>
-                          </a:solidFill>
-                        </a:rPr>
-                        <a:t>q1</a:t>
-                      </a:r>
-                      <a:endParaRPr>
-                        <a:solidFill>
-                          <a:srgbClr val="FFFFFF"/>
-                        </a:solidFill>
-                      </a:endParaRPr>
-                    </a:p>
-                  </a:txBody>
-                  <a:tcPr marT="91425" marB="91425" marR="91425" marL="91425"/>
-                </a:tc>
-                <a:tc>
-                  <a:txBody>
-                    <a:bodyPr/>
-                    <a:lstStyle/>
-                    <a:p>
-                      <a:pPr indent="0" lvl="0" marL="0" rtl="0" algn="l">
-                        <a:spcBef>
-                          <a:spcPts val="0"/>
-                        </a:spcBef>
-                        <a:spcAft>
-                          <a:spcPts val="0"/>
-                        </a:spcAft>
-                        <a:buNone/>
-                      </a:pPr>
-                      <a:r>
-                        <a:rPr lang="en">
-                          <a:solidFill>
-                            <a:srgbClr val="FFFFFF"/>
-                          </a:solidFill>
-                        </a:rPr>
-                        <a:t>q1</a:t>
-                      </a:r>
-                      <a:endParaRPr>
-                        <a:solidFill>
-                          <a:srgbClr val="FFFFFF"/>
-                        </a:solidFill>
-                      </a:endParaRPr>
-                    </a:p>
-                  </a:txBody>
-                  <a:tcPr marT="91425" marB="91425" marR="91425" marL="91425"/>
-                </a:tc>
-                <a:tc>
-                  <a:txBody>
-                    <a:bodyPr/>
-                    <a:lstStyle/>
-                    <a:p>
-                      <a:pPr indent="0" lvl="0" marL="0" rtl="0" algn="l">
-                        <a:spcBef>
-                          <a:spcPts val="0"/>
-                        </a:spcBef>
-                        <a:spcAft>
-                          <a:spcPts val="0"/>
-                        </a:spcAft>
-                        <a:buNone/>
-                      </a:pPr>
-                      <a:r>
-                        <a:rPr lang="en">
-                          <a:solidFill>
-                            <a:srgbClr val="FFFFFF"/>
-                          </a:solidFill>
-                        </a:rPr>
-                        <a:t>q4</a:t>
-                      </a:r>
-                      <a:endParaRPr>
-                        <a:solidFill>
-                          <a:srgbClr val="FFFFFF"/>
-                        </a:solidFill>
-                      </a:endParaRPr>
-                    </a:p>
-                  </a:txBody>
-                  <a:tcPr marT="91425" marB="91425" marR="91425" marL="91425"/>
-                </a:tc>
-              </a:tr>
-              <a:tr h="392625">
-                <a:tc>
-                  <a:txBody>
-                    <a:bodyPr/>
-                    <a:lstStyle/>
-                    <a:p>
-                      <a:pPr indent="0" lvl="0" marL="0" rtl="0" algn="l">
-                        <a:spcBef>
-                          <a:spcPts val="0"/>
-                        </a:spcBef>
-                        <a:spcAft>
-                          <a:spcPts val="0"/>
-                        </a:spcAft>
-                        <a:buNone/>
-                      </a:pPr>
-                      <a:r>
-                        <a:rPr lang="en">
-                          <a:solidFill>
-                            <a:srgbClr val="FFFFFF"/>
-                          </a:solidFill>
-                        </a:rPr>
-                        <a:t>q2</a:t>
-                      </a:r>
-                      <a:endParaRPr>
-                        <a:solidFill>
-                          <a:srgbClr val="FFFFFF"/>
-                        </a:solidFill>
-                      </a:endParaRPr>
-                    </a:p>
-                  </a:txBody>
-                  <a:tcPr marT="91425" marB="91425" marR="91425" marL="91425"/>
-                </a:tc>
-                <a:tc>
-                  <a:txBody>
-                    <a:bodyPr/>
-                    <a:lstStyle/>
-                    <a:p>
-                      <a:pPr indent="0" lvl="0" marL="0" rtl="0" algn="l">
-                        <a:spcBef>
-                          <a:spcPts val="0"/>
-                        </a:spcBef>
-                        <a:spcAft>
-                          <a:spcPts val="0"/>
-                        </a:spcAft>
-                        <a:buNone/>
-                      </a:pPr>
-                      <a:r>
-                        <a:rPr lang="en">
-                          <a:solidFill>
-                            <a:srgbClr val="FFFFFF"/>
-                          </a:solidFill>
-                        </a:rPr>
-                        <a:t>q0</a:t>
-                      </a:r>
-                      <a:endParaRPr>
-                        <a:solidFill>
-                          <a:srgbClr val="FFFFFF"/>
-                        </a:solidFill>
-                      </a:endParaRPr>
-                    </a:p>
-                  </a:txBody>
-                  <a:tcPr marT="91425" marB="91425" marR="91425" marL="91425"/>
-                </a:tc>
-                <a:tc>
-                  <a:txBody>
-                    <a:bodyPr/>
-                    <a:lstStyle/>
-                    <a:p>
-                      <a:pPr indent="0" lvl="0" marL="0" rtl="0" algn="l">
-                        <a:spcBef>
-                          <a:spcPts val="0"/>
-                        </a:spcBef>
-                        <a:spcAft>
-                          <a:spcPts val="0"/>
-                        </a:spcAft>
-                        <a:buNone/>
-                      </a:pPr>
-                      <a:r>
-                        <a:rPr lang="en">
-                          <a:solidFill>
-                            <a:srgbClr val="FFFFFF"/>
-                          </a:solidFill>
-                        </a:rPr>
-                        <a:t>q2</a:t>
-                      </a:r>
-                      <a:endParaRPr>
-                        <a:solidFill>
-                          <a:srgbClr val="FFFFFF"/>
-                        </a:solidFill>
-                      </a:endParaRPr>
-                    </a:p>
-                  </a:txBody>
-                  <a:tcPr marT="91425" marB="91425" marR="91425" marL="91425"/>
-                </a:tc>
-              </a:tr>
-              <a:tr h="392625">
-                <a:tc>
-                  <a:txBody>
-                    <a:bodyPr/>
-                    <a:lstStyle/>
-                    <a:p>
-                      <a:pPr indent="0" lvl="0" marL="0" rtl="0" algn="l">
-                        <a:spcBef>
-                          <a:spcPts val="0"/>
-                        </a:spcBef>
-                        <a:spcAft>
-                          <a:spcPts val="0"/>
-                        </a:spcAft>
-                        <a:buNone/>
-                      </a:pPr>
-                      <a:r>
-                        <a:rPr lang="en">
-                          <a:solidFill>
-                            <a:srgbClr val="FFFFFF"/>
-                          </a:solidFill>
-                        </a:rPr>
-                        <a:t>q3</a:t>
-                      </a:r>
-                      <a:endParaRPr>
-                        <a:solidFill>
-                          <a:srgbClr val="FFFFFF"/>
-                        </a:solidFill>
-                      </a:endParaRPr>
-                    </a:p>
-                  </a:txBody>
-                  <a:tcPr marT="91425" marB="91425" marR="91425" marL="91425"/>
-                </a:tc>
-                <a:tc>
-                  <a:txBody>
-                    <a:bodyPr/>
-                    <a:lstStyle/>
-                    <a:p>
-                      <a:pPr indent="0" lvl="0" marL="0" rtl="0" algn="l">
-                        <a:spcBef>
-                          <a:spcPts val="0"/>
-                        </a:spcBef>
-                        <a:spcAft>
-                          <a:spcPts val="0"/>
-                        </a:spcAft>
-                        <a:buNone/>
-                      </a:pPr>
-                      <a:r>
-                        <a:rPr lang="en">
-                          <a:solidFill>
-                            <a:srgbClr val="FFFFFF"/>
-                          </a:solidFill>
-                        </a:rPr>
-                        <a:t>q3</a:t>
-                      </a:r>
-                      <a:endParaRPr>
-                        <a:solidFill>
-                          <a:srgbClr val="FFFFFF"/>
-                        </a:solidFill>
-                      </a:endParaRPr>
-                    </a:p>
-                  </a:txBody>
-                  <a:tcPr marT="91425" marB="91425" marR="91425" marL="91425"/>
-                </a:tc>
-                <a:tc>
-                  <a:txBody>
-                    <a:bodyPr/>
-                    <a:lstStyle/>
-                    <a:p>
-                      <a:pPr indent="0" lvl="0" marL="0" rtl="0" algn="l">
-                        <a:spcBef>
-                          <a:spcPts val="0"/>
-                        </a:spcBef>
-                        <a:spcAft>
-                          <a:spcPts val="0"/>
-                        </a:spcAft>
-                        <a:buNone/>
-                      </a:pPr>
-                      <a:r>
-                        <a:rPr lang="en">
-                          <a:solidFill>
-                            <a:srgbClr val="FFFFFF"/>
-                          </a:solidFill>
-                        </a:rPr>
-                        <a:t>q2</a:t>
-                      </a:r>
-                      <a:endParaRPr>
-                        <a:solidFill>
-                          <a:srgbClr val="FFFFFF"/>
-                        </a:solidFill>
-                      </a:endParaRPr>
-                    </a:p>
-                  </a:txBody>
-                  <a:tcPr marT="91425" marB="91425" marR="91425" marL="91425"/>
-                </a:tc>
-              </a:tr>
-              <a:tr h="392625">
-                <a:tc>
-                  <a:txBody>
-                    <a:bodyPr/>
-                    <a:lstStyle/>
-                    <a:p>
-                      <a:pPr indent="0" lvl="0" marL="0" rtl="0" algn="l">
-                        <a:spcBef>
-                          <a:spcPts val="0"/>
-                        </a:spcBef>
-                        <a:spcAft>
-                          <a:spcPts val="0"/>
-                        </a:spcAft>
-                        <a:buNone/>
-                      </a:pPr>
-                      <a:r>
-                        <a:rPr lang="en">
-                          <a:solidFill>
-                            <a:srgbClr val="FFFFFF"/>
-                          </a:solidFill>
-                        </a:rPr>
-                        <a:t>q4 </a:t>
-                      </a:r>
-                      <a:endParaRPr>
-                        <a:solidFill>
-                          <a:srgbClr val="FFFFFF"/>
-                        </a:solidFill>
-                      </a:endParaRPr>
-                    </a:p>
-                  </a:txBody>
-                  <a:tcPr marT="91425" marB="91425" marR="91425" marL="91425"/>
-                </a:tc>
-                <a:tc>
-                  <a:txBody>
-                    <a:bodyPr/>
-                    <a:lstStyle/>
-                    <a:p>
-                      <a:pPr indent="0" lvl="0" marL="0" rtl="0" algn="l">
-                        <a:spcBef>
-                          <a:spcPts val="0"/>
-                        </a:spcBef>
-                        <a:spcAft>
-                          <a:spcPts val="0"/>
-                        </a:spcAft>
-                        <a:buNone/>
-                      </a:pPr>
-                      <a:r>
-                        <a:rPr lang="en">
-                          <a:solidFill>
-                            <a:srgbClr val="FFFFFF"/>
-                          </a:solidFill>
-                        </a:rPr>
-                        <a:t>q4</a:t>
-                      </a:r>
-                      <a:endParaRPr>
-                        <a:solidFill>
-                          <a:srgbClr val="FFFFFF"/>
-                        </a:solidFill>
-                      </a:endParaRPr>
-                    </a:p>
-                  </a:txBody>
-                  <a:tcPr marT="91425" marB="91425" marR="91425" marL="91425"/>
-                </a:tc>
-                <a:tc>
-                  <a:txBody>
-                    <a:bodyPr/>
-                    <a:lstStyle/>
-                    <a:p>
-                      <a:pPr indent="0" lvl="0" marL="0" rtl="0" algn="l">
-                        <a:spcBef>
-                          <a:spcPts val="0"/>
-                        </a:spcBef>
-                        <a:spcAft>
-                          <a:spcPts val="0"/>
-                        </a:spcAft>
-                        <a:buNone/>
-                      </a:pPr>
-                      <a:r>
-                        <a:rPr lang="en">
-                          <a:solidFill>
-                            <a:srgbClr val="FFFFFF"/>
-                          </a:solidFill>
-                        </a:rPr>
-                        <a:t>q5</a:t>
-                      </a:r>
-                      <a:endParaRPr>
-                        <a:solidFill>
-                          <a:srgbClr val="FFFFFF"/>
-                        </a:solidFill>
-                      </a:endParaRPr>
-                    </a:p>
-                  </a:txBody>
-                  <a:tcPr marT="91425" marB="91425" marR="91425" marL="91425"/>
-                </a:tc>
-              </a:tr>
-              <a:tr h="392625">
-                <a:tc>
-                  <a:txBody>
-                    <a:bodyPr/>
-                    <a:lstStyle/>
-                    <a:p>
-                      <a:pPr indent="0" lvl="0" marL="0" rtl="0" algn="l">
-                        <a:spcBef>
-                          <a:spcPts val="0"/>
-                        </a:spcBef>
-                        <a:spcAft>
-                          <a:spcPts val="0"/>
-                        </a:spcAft>
-                        <a:buNone/>
-                      </a:pPr>
-                      <a:r>
-                        <a:rPr lang="en">
-                          <a:solidFill>
-                            <a:srgbClr val="FFFFFF"/>
-                          </a:solidFill>
-                        </a:rPr>
-                        <a:t>q5</a:t>
-                      </a:r>
-                      <a:endParaRPr>
-                        <a:solidFill>
-                          <a:srgbClr val="FFFFFF"/>
-                        </a:solidFill>
-                      </a:endParaRPr>
-                    </a:p>
-                  </a:txBody>
-                  <a:tcPr marT="91425" marB="91425" marR="91425" marL="91425"/>
-                </a:tc>
-                <a:tc>
-                  <a:txBody>
-                    <a:bodyPr/>
-                    <a:lstStyle/>
-                    <a:p>
-                      <a:pPr indent="0" lvl="0" marL="0" rtl="0" algn="l">
-                        <a:spcBef>
-                          <a:spcPts val="0"/>
-                        </a:spcBef>
-                        <a:spcAft>
-                          <a:spcPts val="0"/>
-                        </a:spcAft>
-                        <a:buNone/>
-                      </a:pPr>
-                      <a:r>
-                        <a:rPr lang="en">
-                          <a:solidFill>
-                            <a:srgbClr val="FFFFFF"/>
-                          </a:solidFill>
-                        </a:rPr>
-                        <a:t>q0</a:t>
-                      </a:r>
-                      <a:endParaRPr>
-                        <a:solidFill>
-                          <a:srgbClr val="FFFFFF"/>
-                        </a:solidFill>
-                      </a:endParaRPr>
-                    </a:p>
-                  </a:txBody>
-                  <a:tcPr marT="91425" marB="91425" marR="91425" marL="91425"/>
-                </a:tc>
-                <a:tc>
-                  <a:txBody>
-                    <a:bodyPr/>
-                    <a:lstStyle/>
-                    <a:p>
-                      <a:pPr indent="0" lvl="0" marL="0" rtl="0" algn="l">
-                        <a:spcBef>
-                          <a:spcPts val="0"/>
-                        </a:spcBef>
-                        <a:spcAft>
-                          <a:spcPts val="0"/>
-                        </a:spcAft>
-                        <a:buNone/>
-                      </a:pPr>
-                      <a:r>
-                        <a:rPr lang="en">
-                          <a:solidFill>
-                            <a:srgbClr val="FFFFFF"/>
-                          </a:solidFill>
-                        </a:rPr>
-                        <a:t>q2</a:t>
-                      </a:r>
-                      <a:endParaRPr>
-                        <a:solidFill>
-                          <a:srgbClr val="FFFFFF"/>
-                        </a:solidFill>
-                      </a:endParaRPr>
-                    </a:p>
-                  </a:txBody>
-                  <a:tcPr marT="91425" marB="91425" marR="91425" marL="91425"/>
-                </a:tc>
-              </a:tr>
-            </a:tbl>
-          </a:graphicData>
-        </a:graphic>
-      </p:graphicFrame>
+        </p:nvSpPr>
+        <p:spPr>
+          <a:xfrm>
+            <a:off x="598650" y="1999875"/>
+            <a:ext cx="2394000" cy="2678100"/>
+          </a:xfrm>
+          <a:prstGeom prst="rect">
+            <a:avLst/>
+          </a:prstGeom>
+          <a:noFill/>
+          <a:ln>
+            <a:noFill/>
+          </a:ln>
+        </p:spPr>
+        <p:txBody>
+          <a:bodyPr anchorCtr="0" anchor="t" bIns="91425" lIns="91425" spcFirstLastPara="1" rIns="91425" wrap="square" tIns="91425">
+            <a:spAutoFit/>
+          </a:bodyPr>
+          <a:lstStyle/>
+          <a:p>
+            <a:pPr indent="0" lvl="0" marL="0" rtl="0" algn="l">
+              <a:spcBef>
+                <a:spcPts val="0"/>
+              </a:spcBef>
+              <a:spcAft>
+                <a:spcPts val="0"/>
+              </a:spcAft>
+              <a:buNone/>
+            </a:pPr>
+            <a:r>
+              <a:rPr lang="en" sz="1800">
+                <a:solidFill>
+                  <a:schemeClr val="dk1"/>
+                </a:solidFill>
+              </a:rPr>
+              <a:t>Initial Partition </a:t>
+            </a:r>
+            <a:r>
+              <a:rPr lang="en" sz="1800">
+                <a:solidFill>
+                  <a:schemeClr val="dk1"/>
+                </a:solidFill>
+              </a:rPr>
+              <a:t>Sets </a:t>
+            </a:r>
+            <a:endParaRPr sz="1800">
+              <a:solidFill>
+                <a:schemeClr val="dk1"/>
+              </a:solidFill>
+            </a:endParaRPr>
+          </a:p>
+          <a:p>
+            <a:pPr indent="0" lvl="0" marL="0" rtl="0" algn="l">
+              <a:spcBef>
+                <a:spcPts val="0"/>
+              </a:spcBef>
+              <a:spcAft>
+                <a:spcPts val="0"/>
+              </a:spcAft>
+              <a:buNone/>
+            </a:pPr>
+            <a:r>
+              <a:rPr lang="en" sz="1800">
+                <a:solidFill>
+                  <a:schemeClr val="dk1"/>
+                </a:solidFill>
+                <a:highlight>
+                  <a:srgbClr val="38761D"/>
+                </a:highlight>
+              </a:rPr>
+              <a:t>S1</a:t>
+            </a:r>
+            <a:r>
+              <a:rPr lang="en" sz="1800">
+                <a:solidFill>
+                  <a:schemeClr val="dk1"/>
+                </a:solidFill>
+              </a:rPr>
+              <a:t> = </a:t>
+            </a:r>
+            <a:r>
+              <a:rPr lang="en" sz="1800">
+                <a:solidFill>
+                  <a:schemeClr val="dk1"/>
+                </a:solidFill>
+              </a:rPr>
+              <a:t>{q0, q1, q3, q4} </a:t>
+            </a:r>
+            <a:r>
+              <a:rPr lang="en" sz="1800">
+                <a:solidFill>
+                  <a:schemeClr val="dk1"/>
+                </a:solidFill>
+              </a:rPr>
+              <a:t> </a:t>
+            </a:r>
+            <a:endParaRPr sz="1800">
+              <a:solidFill>
+                <a:schemeClr val="dk1"/>
+              </a:solidFill>
+            </a:endParaRPr>
+          </a:p>
+          <a:p>
+            <a:pPr indent="0" lvl="0" marL="0" rtl="0" algn="l">
+              <a:spcBef>
+                <a:spcPts val="0"/>
+              </a:spcBef>
+              <a:spcAft>
+                <a:spcPts val="0"/>
+              </a:spcAft>
+              <a:buNone/>
+            </a:pPr>
+            <a:r>
+              <a:rPr lang="en" sz="1800">
+                <a:solidFill>
+                  <a:schemeClr val="dk1"/>
+                </a:solidFill>
+                <a:highlight>
+                  <a:srgbClr val="FF0000"/>
+                </a:highlight>
+              </a:rPr>
+              <a:t>S2</a:t>
+            </a:r>
+            <a:r>
+              <a:rPr lang="en" sz="1800">
+                <a:solidFill>
+                  <a:schemeClr val="dk1"/>
+                </a:solidFill>
+              </a:rPr>
+              <a:t> = {q2, q5}</a:t>
+            </a:r>
+            <a:endParaRPr sz="1800">
+              <a:solidFill>
+                <a:schemeClr val="dk1"/>
+              </a:solidFill>
+            </a:endParaRPr>
+          </a:p>
+          <a:p>
+            <a:pPr indent="0" lvl="0" marL="0" rtl="0" algn="l">
+              <a:spcBef>
+                <a:spcPts val="0"/>
+              </a:spcBef>
+              <a:spcAft>
+                <a:spcPts val="0"/>
+              </a:spcAft>
+              <a:buNone/>
+            </a:pPr>
+            <a:r>
+              <a:t/>
+            </a:r>
+            <a:endParaRPr sz="1800">
+              <a:solidFill>
+                <a:schemeClr val="dk1"/>
+              </a:solidFill>
+            </a:endParaRPr>
+          </a:p>
+          <a:p>
+            <a:pPr indent="0" lvl="0" marL="0" rtl="0" algn="l">
+              <a:spcBef>
+                <a:spcPts val="0"/>
+              </a:spcBef>
+              <a:spcAft>
+                <a:spcPts val="0"/>
+              </a:spcAft>
+              <a:buNone/>
+            </a:pPr>
+            <a:r>
+              <a:rPr lang="en" sz="1800">
+                <a:solidFill>
+                  <a:schemeClr val="dk1"/>
+                </a:solidFill>
+              </a:rPr>
+              <a:t>Pick the smallest partition to form a worklist.</a:t>
+            </a:r>
+            <a:endParaRPr sz="1800">
+              <a:solidFill>
+                <a:schemeClr val="dk1"/>
+              </a:solidFill>
+            </a:endParaRPr>
+          </a:p>
+          <a:p>
+            <a:pPr indent="0" lvl="0" marL="0" rtl="0" algn="l">
+              <a:spcBef>
+                <a:spcPts val="0"/>
+              </a:spcBef>
+              <a:spcAft>
+                <a:spcPts val="0"/>
+              </a:spcAft>
+              <a:buNone/>
+            </a:pPr>
+            <a:r>
+              <a:t/>
+            </a:r>
+            <a:endParaRPr sz="1800">
+              <a:solidFill>
+                <a:schemeClr val="dk1"/>
+              </a:solidFill>
+            </a:endParaRPr>
+          </a:p>
+          <a:p>
+            <a:pPr indent="0" lvl="0" marL="0" rtl="0" algn="l">
+              <a:spcBef>
+                <a:spcPts val="0"/>
+              </a:spcBef>
+              <a:spcAft>
+                <a:spcPts val="0"/>
+              </a:spcAft>
+              <a:buNone/>
+            </a:pPr>
+            <a:r>
+              <a:rPr lang="en" sz="1800">
+                <a:solidFill>
+                  <a:schemeClr val="dk1"/>
+                </a:solidFill>
+              </a:rPr>
+              <a:t>Worklist = {</a:t>
+            </a:r>
+            <a:r>
+              <a:rPr lang="en" sz="1800">
+                <a:solidFill>
+                  <a:schemeClr val="dk1"/>
+                </a:solidFill>
+                <a:highlight>
+                  <a:srgbClr val="FF0000"/>
+                </a:highlight>
+              </a:rPr>
+              <a:t>S2</a:t>
+            </a:r>
+            <a:r>
+              <a:rPr lang="en" sz="1800">
+                <a:solidFill>
+                  <a:schemeClr val="dk1"/>
+                </a:solidFill>
+              </a:rPr>
+              <a:t>}</a:t>
+            </a:r>
+            <a:endParaRPr sz="1800">
+              <a:solidFill>
+                <a:schemeClr val="dk1"/>
+              </a:solidFill>
+            </a:endParaRPr>
+          </a:p>
+        </p:txBody>
+      </p:sp>
     </p:spTree>
   </p:cSld>
   <p:clrMapOvr>
@@ -15004,16 +12984,731 @@
           </a:p>
         </p:txBody>
       </p:sp>
+      <p:graphicFrame>
+        <p:nvGraphicFramePr>
+          <p:cNvPr id="96" name="Google Shape;96;p18"/>
+          <p:cNvGraphicFramePr/>
+          <p:nvPr/>
+        </p:nvGraphicFramePr>
+        <p:xfrm>
+          <a:off x="3937413" y="1185050"/>
+          <a:ext cx="3000000" cy="3000000"/>
+        </p:xfrm>
+        <a:graphic>
+          <a:graphicData uri="http://schemas.openxmlformats.org/drawingml/2006/table">
+            <a:tbl>
+              <a:tblPr>
+                <a:noFill/>
+                <a:tableStyleId>{B52B1555-68B5-4C20-843E-69694589948E}</a:tableStyleId>
+              </a:tblPr>
+              <a:tblGrid>
+                <a:gridCol w="568125"/>
+                <a:gridCol w="568125"/>
+                <a:gridCol w="568125"/>
+              </a:tblGrid>
+              <a:tr h="387425">
+                <a:tc>
+                  <a:txBody>
+                    <a:bodyPr/>
+                    <a:lstStyle/>
+                    <a:p>
+                      <a:pPr indent="0" lvl="0" marL="0" rtl="0" algn="l">
+                        <a:spcBef>
+                          <a:spcPts val="0"/>
+                        </a:spcBef>
+                        <a:spcAft>
+                          <a:spcPts val="0"/>
+                        </a:spcAft>
+                        <a:buNone/>
+                      </a:pPr>
+                      <a:r>
+                        <a:rPr lang="en">
+                          <a:solidFill>
+                            <a:srgbClr val="FFFFFF"/>
+                          </a:solidFill>
+                        </a:rPr>
+                        <a:t>𝛿</a:t>
+                      </a:r>
+                      <a:endParaRPr>
+                        <a:solidFill>
+                          <a:srgbClr val="FFFFFF"/>
+                        </a:solidFill>
+                      </a:endParaRPr>
+                    </a:p>
+                  </a:txBody>
+                  <a:tcPr marT="91425" marB="91425" marR="91425" marL="91425"/>
+                </a:tc>
+                <a:tc>
+                  <a:txBody>
+                    <a:bodyPr/>
+                    <a:lstStyle/>
+                    <a:p>
+                      <a:pPr indent="0" lvl="0" marL="0" rtl="0" algn="l">
+                        <a:spcBef>
+                          <a:spcPts val="0"/>
+                        </a:spcBef>
+                        <a:spcAft>
+                          <a:spcPts val="0"/>
+                        </a:spcAft>
+                        <a:buNone/>
+                      </a:pPr>
+                      <a:r>
+                        <a:rPr lang="en">
+                          <a:solidFill>
+                            <a:srgbClr val="FFFFFF"/>
+                          </a:solidFill>
+                        </a:rPr>
+                        <a:t>0</a:t>
+                      </a:r>
+                      <a:endParaRPr>
+                        <a:solidFill>
+                          <a:srgbClr val="FFFFFF"/>
+                        </a:solidFill>
+                      </a:endParaRPr>
+                    </a:p>
+                  </a:txBody>
+                  <a:tcPr marT="91425" marB="91425" marR="91425" marL="91425"/>
+                </a:tc>
+                <a:tc>
+                  <a:txBody>
+                    <a:bodyPr/>
+                    <a:lstStyle/>
+                    <a:p>
+                      <a:pPr indent="0" lvl="0" marL="0" rtl="0" algn="l">
+                        <a:spcBef>
+                          <a:spcPts val="0"/>
+                        </a:spcBef>
+                        <a:spcAft>
+                          <a:spcPts val="0"/>
+                        </a:spcAft>
+                        <a:buNone/>
+                      </a:pPr>
+                      <a:r>
+                        <a:rPr lang="en">
+                          <a:solidFill>
+                            <a:srgbClr val="FFFFFF"/>
+                          </a:solidFill>
+                        </a:rPr>
+                        <a:t>1</a:t>
+                      </a:r>
+                      <a:endParaRPr>
+                        <a:solidFill>
+                          <a:srgbClr val="FFFFFF"/>
+                        </a:solidFill>
+                      </a:endParaRPr>
+                    </a:p>
+                  </a:txBody>
+                  <a:tcPr marT="91425" marB="91425" marR="91425" marL="91425"/>
+                </a:tc>
+              </a:tr>
+              <a:tr h="387425">
+                <a:tc>
+                  <a:txBody>
+                    <a:bodyPr/>
+                    <a:lstStyle/>
+                    <a:p>
+                      <a:pPr indent="0" lvl="0" marL="0" rtl="0" algn="l">
+                        <a:spcBef>
+                          <a:spcPts val="0"/>
+                        </a:spcBef>
+                        <a:spcAft>
+                          <a:spcPts val="0"/>
+                        </a:spcAft>
+                        <a:buNone/>
+                      </a:pPr>
+                      <a:r>
+                        <a:rPr lang="en">
+                          <a:solidFill>
+                            <a:srgbClr val="FFFFFF"/>
+                          </a:solidFill>
+                        </a:rPr>
+                        <a:t>q0</a:t>
+                      </a:r>
+                      <a:endParaRPr>
+                        <a:solidFill>
+                          <a:srgbClr val="FFFFFF"/>
+                        </a:solidFill>
+                      </a:endParaRPr>
+                    </a:p>
+                  </a:txBody>
+                  <a:tcPr marT="91425" marB="91425" marR="91425" marL="91425"/>
+                </a:tc>
+                <a:tc>
+                  <a:txBody>
+                    <a:bodyPr/>
+                    <a:lstStyle/>
+                    <a:p>
+                      <a:pPr indent="0" lvl="0" marL="0" rtl="0" algn="l">
+                        <a:spcBef>
+                          <a:spcPts val="0"/>
+                        </a:spcBef>
+                        <a:spcAft>
+                          <a:spcPts val="0"/>
+                        </a:spcAft>
+                        <a:buNone/>
+                      </a:pPr>
+                      <a:r>
+                        <a:rPr lang="en">
+                          <a:solidFill>
+                            <a:srgbClr val="FFFFFF"/>
+                          </a:solidFill>
+                        </a:rPr>
+                        <a:t>q1</a:t>
+                      </a:r>
+                      <a:endParaRPr>
+                        <a:solidFill>
+                          <a:srgbClr val="FFFFFF"/>
+                        </a:solidFill>
+                      </a:endParaRPr>
+                    </a:p>
+                  </a:txBody>
+                  <a:tcPr marT="91425" marB="91425" marR="91425" marL="91425"/>
+                </a:tc>
+                <a:tc>
+                  <a:txBody>
+                    <a:bodyPr/>
+                    <a:lstStyle/>
+                    <a:p>
+                      <a:pPr indent="0" lvl="0" marL="0" rtl="0" algn="l">
+                        <a:spcBef>
+                          <a:spcPts val="0"/>
+                        </a:spcBef>
+                        <a:spcAft>
+                          <a:spcPts val="0"/>
+                        </a:spcAft>
+                        <a:buNone/>
+                      </a:pPr>
+                      <a:r>
+                        <a:rPr lang="en">
+                          <a:solidFill>
+                            <a:srgbClr val="FFFFFF"/>
+                          </a:solidFill>
+                        </a:rPr>
+                        <a:t>q3</a:t>
+                      </a:r>
+                      <a:endParaRPr>
+                        <a:solidFill>
+                          <a:srgbClr val="FFFFFF"/>
+                        </a:solidFill>
+                      </a:endParaRPr>
+                    </a:p>
+                  </a:txBody>
+                  <a:tcPr marT="91425" marB="91425" marR="91425" marL="91425"/>
+                </a:tc>
+              </a:tr>
+              <a:tr h="387425">
+                <a:tc>
+                  <a:txBody>
+                    <a:bodyPr/>
+                    <a:lstStyle/>
+                    <a:p>
+                      <a:pPr indent="0" lvl="0" marL="0" rtl="0" algn="l">
+                        <a:spcBef>
+                          <a:spcPts val="0"/>
+                        </a:spcBef>
+                        <a:spcAft>
+                          <a:spcPts val="0"/>
+                        </a:spcAft>
+                        <a:buNone/>
+                      </a:pPr>
+                      <a:r>
+                        <a:rPr lang="en">
+                          <a:solidFill>
+                            <a:srgbClr val="FFFFFF"/>
+                          </a:solidFill>
+                        </a:rPr>
+                        <a:t>q1</a:t>
+                      </a:r>
+                      <a:endParaRPr>
+                        <a:solidFill>
+                          <a:srgbClr val="FFFFFF"/>
+                        </a:solidFill>
+                      </a:endParaRPr>
+                    </a:p>
+                  </a:txBody>
+                  <a:tcPr marT="91425" marB="91425" marR="91425" marL="91425"/>
+                </a:tc>
+                <a:tc>
+                  <a:txBody>
+                    <a:bodyPr/>
+                    <a:lstStyle/>
+                    <a:p>
+                      <a:pPr indent="0" lvl="0" marL="0" rtl="0" algn="l">
+                        <a:spcBef>
+                          <a:spcPts val="0"/>
+                        </a:spcBef>
+                        <a:spcAft>
+                          <a:spcPts val="0"/>
+                        </a:spcAft>
+                        <a:buNone/>
+                      </a:pPr>
+                      <a:r>
+                        <a:rPr lang="en">
+                          <a:solidFill>
+                            <a:srgbClr val="FFFFFF"/>
+                          </a:solidFill>
+                        </a:rPr>
+                        <a:t>q1</a:t>
+                      </a:r>
+                      <a:endParaRPr>
+                        <a:solidFill>
+                          <a:srgbClr val="FFFFFF"/>
+                        </a:solidFill>
+                      </a:endParaRPr>
+                    </a:p>
+                  </a:txBody>
+                  <a:tcPr marT="91425" marB="91425" marR="91425" marL="91425"/>
+                </a:tc>
+                <a:tc>
+                  <a:txBody>
+                    <a:bodyPr/>
+                    <a:lstStyle/>
+                    <a:p>
+                      <a:pPr indent="0" lvl="0" marL="0" rtl="0" algn="l">
+                        <a:spcBef>
+                          <a:spcPts val="0"/>
+                        </a:spcBef>
+                        <a:spcAft>
+                          <a:spcPts val="0"/>
+                        </a:spcAft>
+                        <a:buNone/>
+                      </a:pPr>
+                      <a:r>
+                        <a:rPr lang="en">
+                          <a:solidFill>
+                            <a:srgbClr val="FFFFFF"/>
+                          </a:solidFill>
+                        </a:rPr>
+                        <a:t>q4</a:t>
+                      </a:r>
+                      <a:endParaRPr>
+                        <a:solidFill>
+                          <a:srgbClr val="FFFFFF"/>
+                        </a:solidFill>
+                      </a:endParaRPr>
+                    </a:p>
+                  </a:txBody>
+                  <a:tcPr marT="91425" marB="91425" marR="91425" marL="91425"/>
+                </a:tc>
+              </a:tr>
+              <a:tr h="387425">
+                <a:tc>
+                  <a:txBody>
+                    <a:bodyPr/>
+                    <a:lstStyle/>
+                    <a:p>
+                      <a:pPr indent="0" lvl="0" marL="0" rtl="0" algn="l">
+                        <a:spcBef>
+                          <a:spcPts val="0"/>
+                        </a:spcBef>
+                        <a:spcAft>
+                          <a:spcPts val="0"/>
+                        </a:spcAft>
+                        <a:buNone/>
+                      </a:pPr>
+                      <a:r>
+                        <a:rPr lang="en">
+                          <a:solidFill>
+                            <a:srgbClr val="FFFFFF"/>
+                          </a:solidFill>
+                        </a:rPr>
+                        <a:t>q2</a:t>
+                      </a:r>
+                      <a:endParaRPr>
+                        <a:solidFill>
+                          <a:srgbClr val="FFFFFF"/>
+                        </a:solidFill>
+                      </a:endParaRPr>
+                    </a:p>
+                  </a:txBody>
+                  <a:tcPr marT="91425" marB="91425" marR="91425" marL="91425"/>
+                </a:tc>
+                <a:tc>
+                  <a:txBody>
+                    <a:bodyPr/>
+                    <a:lstStyle/>
+                    <a:p>
+                      <a:pPr indent="0" lvl="0" marL="0" rtl="0" algn="l">
+                        <a:spcBef>
+                          <a:spcPts val="0"/>
+                        </a:spcBef>
+                        <a:spcAft>
+                          <a:spcPts val="0"/>
+                        </a:spcAft>
+                        <a:buNone/>
+                      </a:pPr>
+                      <a:r>
+                        <a:rPr lang="en">
+                          <a:solidFill>
+                            <a:srgbClr val="FFFFFF"/>
+                          </a:solidFill>
+                        </a:rPr>
+                        <a:t>q0</a:t>
+                      </a:r>
+                      <a:endParaRPr>
+                        <a:solidFill>
+                          <a:srgbClr val="FFFFFF"/>
+                        </a:solidFill>
+                      </a:endParaRPr>
+                    </a:p>
+                  </a:txBody>
+                  <a:tcPr marT="91425" marB="91425" marR="91425" marL="91425"/>
+                </a:tc>
+                <a:tc>
+                  <a:txBody>
+                    <a:bodyPr/>
+                    <a:lstStyle/>
+                    <a:p>
+                      <a:pPr indent="0" lvl="0" marL="0" rtl="0" algn="l">
+                        <a:spcBef>
+                          <a:spcPts val="0"/>
+                        </a:spcBef>
+                        <a:spcAft>
+                          <a:spcPts val="0"/>
+                        </a:spcAft>
+                        <a:buNone/>
+                      </a:pPr>
+                      <a:r>
+                        <a:rPr lang="en">
+                          <a:solidFill>
+                            <a:srgbClr val="FFFFFF"/>
+                          </a:solidFill>
+                          <a:highlight>
+                            <a:srgbClr val="FF0000"/>
+                          </a:highlight>
+                        </a:rPr>
+                        <a:t>q2</a:t>
+                      </a:r>
+                      <a:endParaRPr>
+                        <a:solidFill>
+                          <a:srgbClr val="FFFFFF"/>
+                        </a:solidFill>
+                        <a:highlight>
+                          <a:srgbClr val="FF0000"/>
+                        </a:highlight>
+                      </a:endParaRPr>
+                    </a:p>
+                  </a:txBody>
+                  <a:tcPr marT="91425" marB="91425" marR="91425" marL="91425"/>
+                </a:tc>
+              </a:tr>
+              <a:tr h="387425">
+                <a:tc>
+                  <a:txBody>
+                    <a:bodyPr/>
+                    <a:lstStyle/>
+                    <a:p>
+                      <a:pPr indent="0" lvl="0" marL="0" rtl="0" algn="l">
+                        <a:spcBef>
+                          <a:spcPts val="0"/>
+                        </a:spcBef>
+                        <a:spcAft>
+                          <a:spcPts val="0"/>
+                        </a:spcAft>
+                        <a:buNone/>
+                      </a:pPr>
+                      <a:r>
+                        <a:rPr lang="en">
+                          <a:solidFill>
+                            <a:srgbClr val="FFFFFF"/>
+                          </a:solidFill>
+                        </a:rPr>
+                        <a:t>q3</a:t>
+                      </a:r>
+                      <a:endParaRPr>
+                        <a:solidFill>
+                          <a:srgbClr val="FFFFFF"/>
+                        </a:solidFill>
+                      </a:endParaRPr>
+                    </a:p>
+                  </a:txBody>
+                  <a:tcPr marT="91425" marB="91425" marR="91425" marL="91425"/>
+                </a:tc>
+                <a:tc>
+                  <a:txBody>
+                    <a:bodyPr/>
+                    <a:lstStyle/>
+                    <a:p>
+                      <a:pPr indent="0" lvl="0" marL="0" rtl="0" algn="l">
+                        <a:spcBef>
+                          <a:spcPts val="0"/>
+                        </a:spcBef>
+                        <a:spcAft>
+                          <a:spcPts val="0"/>
+                        </a:spcAft>
+                        <a:buNone/>
+                      </a:pPr>
+                      <a:r>
+                        <a:rPr lang="en">
+                          <a:solidFill>
+                            <a:srgbClr val="FFFFFF"/>
+                          </a:solidFill>
+                        </a:rPr>
+                        <a:t>q3</a:t>
+                      </a:r>
+                      <a:endParaRPr>
+                        <a:solidFill>
+                          <a:srgbClr val="FFFFFF"/>
+                        </a:solidFill>
+                      </a:endParaRPr>
+                    </a:p>
+                  </a:txBody>
+                  <a:tcPr marT="91425" marB="91425" marR="91425" marL="91425"/>
+                </a:tc>
+                <a:tc>
+                  <a:txBody>
+                    <a:bodyPr/>
+                    <a:lstStyle/>
+                    <a:p>
+                      <a:pPr indent="0" lvl="0" marL="0" rtl="0" algn="l">
+                        <a:spcBef>
+                          <a:spcPts val="0"/>
+                        </a:spcBef>
+                        <a:spcAft>
+                          <a:spcPts val="0"/>
+                        </a:spcAft>
+                        <a:buNone/>
+                      </a:pPr>
+                      <a:r>
+                        <a:rPr lang="en">
+                          <a:solidFill>
+                            <a:srgbClr val="FFFFFF"/>
+                          </a:solidFill>
+                          <a:highlight>
+                            <a:srgbClr val="FF0000"/>
+                          </a:highlight>
+                        </a:rPr>
+                        <a:t>q2</a:t>
+                      </a:r>
+                      <a:endParaRPr>
+                        <a:solidFill>
+                          <a:srgbClr val="FFFFFF"/>
+                        </a:solidFill>
+                        <a:highlight>
+                          <a:srgbClr val="FF0000"/>
+                        </a:highlight>
+                      </a:endParaRPr>
+                    </a:p>
+                  </a:txBody>
+                  <a:tcPr marT="91425" marB="91425" marR="91425" marL="91425"/>
+                </a:tc>
+              </a:tr>
+              <a:tr h="387425">
+                <a:tc>
+                  <a:txBody>
+                    <a:bodyPr/>
+                    <a:lstStyle/>
+                    <a:p>
+                      <a:pPr indent="0" lvl="0" marL="0" rtl="0" algn="l">
+                        <a:spcBef>
+                          <a:spcPts val="0"/>
+                        </a:spcBef>
+                        <a:spcAft>
+                          <a:spcPts val="0"/>
+                        </a:spcAft>
+                        <a:buNone/>
+                      </a:pPr>
+                      <a:r>
+                        <a:rPr lang="en">
+                          <a:solidFill>
+                            <a:srgbClr val="FFFFFF"/>
+                          </a:solidFill>
+                        </a:rPr>
+                        <a:t>q4 </a:t>
+                      </a:r>
+                      <a:endParaRPr>
+                        <a:solidFill>
+                          <a:srgbClr val="FFFFFF"/>
+                        </a:solidFill>
+                      </a:endParaRPr>
+                    </a:p>
+                  </a:txBody>
+                  <a:tcPr marT="91425" marB="91425" marR="91425" marL="91425"/>
+                </a:tc>
+                <a:tc>
+                  <a:txBody>
+                    <a:bodyPr/>
+                    <a:lstStyle/>
+                    <a:p>
+                      <a:pPr indent="0" lvl="0" marL="0" rtl="0" algn="l">
+                        <a:spcBef>
+                          <a:spcPts val="0"/>
+                        </a:spcBef>
+                        <a:spcAft>
+                          <a:spcPts val="0"/>
+                        </a:spcAft>
+                        <a:buNone/>
+                      </a:pPr>
+                      <a:r>
+                        <a:rPr lang="en">
+                          <a:solidFill>
+                            <a:srgbClr val="FFFFFF"/>
+                          </a:solidFill>
+                        </a:rPr>
+                        <a:t>q4</a:t>
+                      </a:r>
+                      <a:endParaRPr>
+                        <a:solidFill>
+                          <a:srgbClr val="FFFFFF"/>
+                        </a:solidFill>
+                      </a:endParaRPr>
+                    </a:p>
+                  </a:txBody>
+                  <a:tcPr marT="91425" marB="91425" marR="91425" marL="91425"/>
+                </a:tc>
+                <a:tc>
+                  <a:txBody>
+                    <a:bodyPr/>
+                    <a:lstStyle/>
+                    <a:p>
+                      <a:pPr indent="0" lvl="0" marL="0" rtl="0" algn="l">
+                        <a:spcBef>
+                          <a:spcPts val="0"/>
+                        </a:spcBef>
+                        <a:spcAft>
+                          <a:spcPts val="0"/>
+                        </a:spcAft>
+                        <a:buNone/>
+                      </a:pPr>
+                      <a:r>
+                        <a:rPr lang="en">
+                          <a:solidFill>
+                            <a:srgbClr val="FFFFFF"/>
+                          </a:solidFill>
+                          <a:highlight>
+                            <a:srgbClr val="FF0000"/>
+                          </a:highlight>
+                        </a:rPr>
+                        <a:t>q5</a:t>
+                      </a:r>
+                      <a:endParaRPr>
+                        <a:solidFill>
+                          <a:srgbClr val="FFFFFF"/>
+                        </a:solidFill>
+                        <a:highlight>
+                          <a:srgbClr val="FF0000"/>
+                        </a:highlight>
+                      </a:endParaRPr>
+                    </a:p>
+                  </a:txBody>
+                  <a:tcPr marT="91425" marB="91425" marR="91425" marL="91425"/>
+                </a:tc>
+              </a:tr>
+              <a:tr h="387425">
+                <a:tc>
+                  <a:txBody>
+                    <a:bodyPr/>
+                    <a:lstStyle/>
+                    <a:p>
+                      <a:pPr indent="0" lvl="0" marL="0" rtl="0" algn="l">
+                        <a:spcBef>
+                          <a:spcPts val="0"/>
+                        </a:spcBef>
+                        <a:spcAft>
+                          <a:spcPts val="0"/>
+                        </a:spcAft>
+                        <a:buNone/>
+                      </a:pPr>
+                      <a:r>
+                        <a:rPr lang="en">
+                          <a:solidFill>
+                            <a:srgbClr val="FFFFFF"/>
+                          </a:solidFill>
+                        </a:rPr>
+                        <a:t>q5</a:t>
+                      </a:r>
+                      <a:endParaRPr>
+                        <a:solidFill>
+                          <a:srgbClr val="FFFFFF"/>
+                        </a:solidFill>
+                      </a:endParaRPr>
+                    </a:p>
+                  </a:txBody>
+                  <a:tcPr marT="91425" marB="91425" marR="91425" marL="91425"/>
+                </a:tc>
+                <a:tc>
+                  <a:txBody>
+                    <a:bodyPr/>
+                    <a:lstStyle/>
+                    <a:p>
+                      <a:pPr indent="0" lvl="0" marL="0" rtl="0" algn="l">
+                        <a:spcBef>
+                          <a:spcPts val="0"/>
+                        </a:spcBef>
+                        <a:spcAft>
+                          <a:spcPts val="0"/>
+                        </a:spcAft>
+                        <a:buNone/>
+                      </a:pPr>
+                      <a:r>
+                        <a:rPr lang="en">
+                          <a:solidFill>
+                            <a:srgbClr val="FFFFFF"/>
+                          </a:solidFill>
+                        </a:rPr>
+                        <a:t>q0</a:t>
+                      </a:r>
+                      <a:endParaRPr>
+                        <a:solidFill>
+                          <a:srgbClr val="FFFFFF"/>
+                        </a:solidFill>
+                      </a:endParaRPr>
+                    </a:p>
+                  </a:txBody>
+                  <a:tcPr marT="91425" marB="91425" marR="91425" marL="91425"/>
+                </a:tc>
+                <a:tc>
+                  <a:txBody>
+                    <a:bodyPr/>
+                    <a:lstStyle/>
+                    <a:p>
+                      <a:pPr indent="0" lvl="0" marL="0" rtl="0" algn="l">
+                        <a:spcBef>
+                          <a:spcPts val="0"/>
+                        </a:spcBef>
+                        <a:spcAft>
+                          <a:spcPts val="0"/>
+                        </a:spcAft>
+                        <a:buNone/>
+                      </a:pPr>
+                      <a:r>
+                        <a:rPr lang="en">
+                          <a:solidFill>
+                            <a:srgbClr val="FFFFFF"/>
+                          </a:solidFill>
+                          <a:highlight>
+                            <a:srgbClr val="FF0000"/>
+                          </a:highlight>
+                        </a:rPr>
+                        <a:t>q2</a:t>
+                      </a:r>
+                      <a:endParaRPr>
+                        <a:solidFill>
+                          <a:srgbClr val="FFFFFF"/>
+                        </a:solidFill>
+                        <a:highlight>
+                          <a:srgbClr val="FF0000"/>
+                        </a:highlight>
+                      </a:endParaRPr>
+                    </a:p>
+                  </a:txBody>
+                  <a:tcPr marT="91425" marB="91425" marR="91425" marL="91425"/>
+                </a:tc>
+              </a:tr>
+            </a:tbl>
+          </a:graphicData>
+        </a:graphic>
+      </p:graphicFrame>
       <p:sp>
         <p:nvSpPr>
-          <p:cNvPr id="96" name="Google Shape;96;p18"/>
+          <p:cNvPr id="97" name="Google Shape;97;p18"/>
           <p:cNvSpPr txBox="1"/>
           <p:nvPr/>
         </p:nvSpPr>
         <p:spPr>
           <a:xfrm>
-            <a:off x="162925" y="1139350"/>
-            <a:ext cx="3434100" cy="738900"/>
+            <a:off x="363150" y="1091500"/>
+            <a:ext cx="3761700" cy="4617600"/>
           </a:xfrm>
           <a:prstGeom prst="rect">
             <a:avLst/>
@@ -15029,18 +13724,14 @@
           </a:bodyPr>
           <a:lstStyle/>
           <a:p>
-            <a:pPr indent="-342900" lvl="0" marL="457200" rtl="0" algn="l">
-              <a:spcBef>
-                <a:spcPts val="0"/>
-              </a:spcBef>
-              <a:spcAft>
-                <a:spcPts val="0"/>
-              </a:spcAft>
-              <a:buClr>
-                <a:schemeClr val="dk1"/>
-              </a:buClr>
-              <a:buSzPts val="1800"/>
-              <a:buAutoNum type="arabicPeriod"/>
+            <a:pPr indent="0" lvl="0" marL="0" rtl="0" algn="l">
+              <a:spcBef>
+                <a:spcPts val="0"/>
+              </a:spcBef>
+              <a:spcAft>
+                <a:spcPts val="0"/>
+              </a:spcAft>
+              <a:buNone/>
             </a:pPr>
             <a:r>
               <a:rPr lang="en" sz="1800">
@@ -15048,7 +13739,15 @@
                   <a:schemeClr val="dk1"/>
                 </a:solidFill>
               </a:rPr>
-              <a:t>Partition into accept and non-accept states</a:t>
+              <a:t>Partitions</a:t>
+            </a:r>
+            <a:r>
+              <a:rPr lang="en" sz="1800">
+                <a:solidFill>
+                  <a:schemeClr val="dk1"/>
+                </a:solidFill>
+              </a:rPr>
+              <a:t> </a:t>
             </a:r>
             <a:endParaRPr sz="1800">
               <a:solidFill>
@@ -15056,36 +13755,378 @@
               </a:solidFill>
             </a:endParaRPr>
           </a:p>
+          <a:p>
+            <a:pPr indent="0" lvl="0" marL="0" rtl="0" algn="l">
+              <a:spcBef>
+                <a:spcPts val="0"/>
+              </a:spcBef>
+              <a:spcAft>
+                <a:spcPts val="0"/>
+              </a:spcAft>
+              <a:buNone/>
+            </a:pPr>
+            <a:r>
+              <a:rPr lang="en" sz="1800">
+                <a:solidFill>
+                  <a:schemeClr val="dk1"/>
+                </a:solidFill>
+                <a:highlight>
+                  <a:srgbClr val="38761D"/>
+                </a:highlight>
+              </a:rPr>
+              <a:t>S1</a:t>
+            </a:r>
+            <a:r>
+              <a:rPr lang="en" sz="1800">
+                <a:solidFill>
+                  <a:schemeClr val="dk1"/>
+                </a:solidFill>
+              </a:rPr>
+              <a:t> = {q0, q1, q3, q4} </a:t>
+            </a:r>
+            <a:endParaRPr sz="1800">
+              <a:solidFill>
+                <a:schemeClr val="dk1"/>
+              </a:solidFill>
+            </a:endParaRPr>
+          </a:p>
+          <a:p>
+            <a:pPr indent="0" lvl="0" marL="0" rtl="0" algn="l">
+              <a:spcBef>
+                <a:spcPts val="0"/>
+              </a:spcBef>
+              <a:spcAft>
+                <a:spcPts val="0"/>
+              </a:spcAft>
+              <a:buNone/>
+            </a:pPr>
+            <a:r>
+              <a:rPr lang="en" sz="1800">
+                <a:solidFill>
+                  <a:schemeClr val="dk1"/>
+                </a:solidFill>
+                <a:highlight>
+                  <a:srgbClr val="FF0000"/>
+                </a:highlight>
+              </a:rPr>
+              <a:t>S2</a:t>
+            </a:r>
+            <a:r>
+              <a:rPr lang="en" sz="1800">
+                <a:solidFill>
+                  <a:schemeClr val="dk1"/>
+                </a:solidFill>
+              </a:rPr>
+              <a:t> = {q2, q5}</a:t>
+            </a:r>
+            <a:endParaRPr sz="1800">
+              <a:solidFill>
+                <a:schemeClr val="dk1"/>
+              </a:solidFill>
+            </a:endParaRPr>
+          </a:p>
+          <a:p>
+            <a:pPr indent="0" lvl="0" marL="0" rtl="0" algn="l">
+              <a:spcBef>
+                <a:spcPts val="0"/>
+              </a:spcBef>
+              <a:spcAft>
+                <a:spcPts val="0"/>
+              </a:spcAft>
+              <a:buNone/>
+            </a:pPr>
+            <a:r>
+              <a:t/>
+            </a:r>
+            <a:endParaRPr sz="1800">
+              <a:solidFill>
+                <a:schemeClr val="dk1"/>
+              </a:solidFill>
+            </a:endParaRPr>
+          </a:p>
+          <a:p>
+            <a:pPr indent="0" lvl="0" marL="0" rtl="0" algn="l">
+              <a:spcBef>
+                <a:spcPts val="0"/>
+              </a:spcBef>
+              <a:spcAft>
+                <a:spcPts val="0"/>
+              </a:spcAft>
+              <a:buNone/>
+            </a:pPr>
+            <a:r>
+              <a:rPr lang="en" sz="1800">
+                <a:solidFill>
+                  <a:schemeClr val="dk1"/>
+                </a:solidFill>
+              </a:rPr>
+              <a:t>Worklist = {} </a:t>
+            </a:r>
+            <a:br>
+              <a:rPr lang="en" sz="1800">
+                <a:solidFill>
+                  <a:schemeClr val="dk1"/>
+                </a:solidFill>
+              </a:rPr>
+            </a:br>
+            <a:r>
+              <a:rPr lang="en" sz="1800">
+                <a:solidFill>
+                  <a:schemeClr val="dk1"/>
+                </a:solidFill>
+              </a:rPr>
+              <a:t>Current splitter: {</a:t>
+            </a:r>
+            <a:r>
+              <a:rPr lang="en" sz="1800">
+                <a:solidFill>
+                  <a:schemeClr val="dk1"/>
+                </a:solidFill>
+                <a:highlight>
+                  <a:srgbClr val="FF0000"/>
+                </a:highlight>
+              </a:rPr>
+              <a:t>S2</a:t>
+            </a:r>
+            <a:r>
+              <a:rPr lang="en" sz="1800">
+                <a:solidFill>
+                  <a:schemeClr val="dk1"/>
+                </a:solidFill>
+              </a:rPr>
+              <a:t>}</a:t>
+            </a:r>
+            <a:endParaRPr sz="1800">
+              <a:solidFill>
+                <a:schemeClr val="dk1"/>
+              </a:solidFill>
+            </a:endParaRPr>
+          </a:p>
+          <a:p>
+            <a:pPr indent="0" lvl="0" marL="0" rtl="0" algn="l">
+              <a:spcBef>
+                <a:spcPts val="0"/>
+              </a:spcBef>
+              <a:spcAft>
+                <a:spcPts val="0"/>
+              </a:spcAft>
+              <a:buNone/>
+            </a:pPr>
+            <a:r>
+              <a:t/>
+            </a:r>
+            <a:endParaRPr sz="1800">
+              <a:solidFill>
+                <a:schemeClr val="dk1"/>
+              </a:solidFill>
+            </a:endParaRPr>
+          </a:p>
+          <a:p>
+            <a:pPr indent="0" lvl="0" marL="0" rtl="0" algn="l">
+              <a:spcBef>
+                <a:spcPts val="0"/>
+              </a:spcBef>
+              <a:spcAft>
+                <a:spcPts val="0"/>
+              </a:spcAft>
+              <a:buNone/>
+            </a:pPr>
+            <a:r>
+              <a:rPr lang="en" sz="1800">
+                <a:solidFill>
+                  <a:schemeClr val="dk1"/>
+                </a:solidFill>
+              </a:rPr>
+              <a:t>Predecessors: </a:t>
+            </a:r>
+            <a:endParaRPr sz="1800">
+              <a:solidFill>
+                <a:schemeClr val="dk1"/>
+              </a:solidFill>
+            </a:endParaRPr>
+          </a:p>
+          <a:p>
+            <a:pPr indent="0" lvl="0" marL="0" rtl="0" algn="l">
+              <a:spcBef>
+                <a:spcPts val="0"/>
+              </a:spcBef>
+              <a:spcAft>
+                <a:spcPts val="0"/>
+              </a:spcAft>
+              <a:buNone/>
+            </a:pPr>
+            <a:r>
+              <a:rPr lang="en" sz="1800">
+                <a:solidFill>
+                  <a:schemeClr val="dk1"/>
+                </a:solidFill>
+              </a:rPr>
+              <a:t>On symbol 0:</a:t>
+            </a:r>
+            <a:endParaRPr sz="1800">
+              <a:solidFill>
+                <a:schemeClr val="dk1"/>
+              </a:solidFill>
+            </a:endParaRPr>
+          </a:p>
+          <a:p>
+            <a:pPr indent="0" lvl="0" marL="0" rtl="0" algn="l">
+              <a:spcBef>
+                <a:spcPts val="0"/>
+              </a:spcBef>
+              <a:spcAft>
+                <a:spcPts val="0"/>
+              </a:spcAft>
+              <a:buNone/>
+            </a:pPr>
+            <a:r>
+              <a:rPr lang="en" sz="1800">
+                <a:solidFill>
+                  <a:schemeClr val="dk1"/>
+                </a:solidFill>
+              </a:rPr>
+              <a:t>No state goes to q2 or q5</a:t>
+            </a:r>
+            <a:endParaRPr sz="1800">
+              <a:solidFill>
+                <a:schemeClr val="dk1"/>
+              </a:solidFill>
+            </a:endParaRPr>
+          </a:p>
+          <a:p>
+            <a:pPr indent="0" lvl="0" marL="0" rtl="0" algn="l">
+              <a:spcBef>
+                <a:spcPts val="0"/>
+              </a:spcBef>
+              <a:spcAft>
+                <a:spcPts val="0"/>
+              </a:spcAft>
+              <a:buNone/>
+            </a:pPr>
+            <a:r>
+              <a:t/>
+            </a:r>
+            <a:endParaRPr sz="1800">
+              <a:solidFill>
+                <a:schemeClr val="dk1"/>
+              </a:solidFill>
+            </a:endParaRPr>
+          </a:p>
+          <a:p>
+            <a:pPr indent="0" lvl="0" marL="0" rtl="0" algn="l">
+              <a:spcBef>
+                <a:spcPts val="0"/>
+              </a:spcBef>
+              <a:spcAft>
+                <a:spcPts val="0"/>
+              </a:spcAft>
+              <a:buNone/>
+            </a:pPr>
+            <a:r>
+              <a:rPr lang="en" sz="1800">
+                <a:solidFill>
+                  <a:schemeClr val="dk1"/>
+                </a:solidFill>
+              </a:rPr>
+              <a:t>On symbol 1: </a:t>
+            </a:r>
+            <a:endParaRPr sz="1800">
+              <a:solidFill>
+                <a:schemeClr val="dk1"/>
+              </a:solidFill>
+            </a:endParaRPr>
+          </a:p>
+          <a:p>
+            <a:pPr indent="0" lvl="0" marL="0" rtl="0" algn="l">
+              <a:spcBef>
+                <a:spcPts val="0"/>
+              </a:spcBef>
+              <a:spcAft>
+                <a:spcPts val="0"/>
+              </a:spcAft>
+              <a:buNone/>
+            </a:pPr>
+            <a:r>
+              <a:rPr lang="en" sz="1800">
+                <a:solidFill>
+                  <a:schemeClr val="dk1"/>
+                </a:solidFill>
+              </a:rPr>
+              <a:t>X = </a:t>
+            </a:r>
+            <a:r>
+              <a:rPr lang="en" sz="1800">
+                <a:solidFill>
+                  <a:schemeClr val="dk1"/>
+                </a:solidFill>
+              </a:rPr>
+              <a:t>{q2, q3, q4, q5} go to q2 or q5</a:t>
+            </a:r>
+            <a:endParaRPr sz="1800">
+              <a:solidFill>
+                <a:schemeClr val="dk1"/>
+              </a:solidFill>
+            </a:endParaRPr>
+          </a:p>
+          <a:p>
+            <a:pPr indent="0" lvl="0" marL="0" rtl="0" algn="l">
+              <a:spcBef>
+                <a:spcPts val="0"/>
+              </a:spcBef>
+              <a:spcAft>
+                <a:spcPts val="0"/>
+              </a:spcAft>
+              <a:buNone/>
+            </a:pPr>
+            <a:r>
+              <a:t/>
+            </a:r>
+            <a:endParaRPr sz="1800">
+              <a:solidFill>
+                <a:schemeClr val="dk1"/>
+              </a:solidFill>
+            </a:endParaRPr>
+          </a:p>
+          <a:p>
+            <a:pPr indent="0" lvl="0" marL="0" rtl="0" algn="l">
+              <a:spcBef>
+                <a:spcPts val="0"/>
+              </a:spcBef>
+              <a:spcAft>
+                <a:spcPts val="0"/>
+              </a:spcAft>
+              <a:buNone/>
+            </a:pPr>
+            <a:r>
+              <a:t/>
+            </a:r>
+            <a:endParaRPr sz="1800">
+              <a:solidFill>
+                <a:schemeClr val="dk1"/>
+              </a:solidFill>
+            </a:endParaRPr>
+          </a:p>
+          <a:p>
+            <a:pPr indent="0" lvl="0" marL="0" rtl="0" algn="l">
+              <a:spcBef>
+                <a:spcPts val="0"/>
+              </a:spcBef>
+              <a:spcAft>
+                <a:spcPts val="0"/>
+              </a:spcAft>
+              <a:buNone/>
+            </a:pPr>
+            <a:r>
+              <a:t/>
+            </a:r>
+            <a:endParaRPr sz="1800">
+              <a:solidFill>
+                <a:schemeClr val="dk1"/>
+              </a:solidFill>
+            </a:endParaRPr>
+          </a:p>
         </p:txBody>
       </p:sp>
-      <p:pic>
-        <p:nvPicPr>
-          <p:cNvPr id="97" name="Google Shape;97;p18"/>
-          <p:cNvPicPr preferRelativeResize="0"/>
-          <p:nvPr/>
-        </p:nvPicPr>
-        <p:blipFill>
-          <a:blip r:embed="rId3">
-            <a:alphaModFix/>
-          </a:blip>
-          <a:stretch>
-            <a:fillRect/>
-          </a:stretch>
-        </p:blipFill>
-        <p:spPr>
-          <a:xfrm>
-            <a:off x="3805950" y="445025"/>
-            <a:ext cx="4717470" cy="4104201"/>
-          </a:xfrm>
-          <a:prstGeom prst="rect">
-            <a:avLst/>
-          </a:prstGeom>
-          <a:noFill/>
-          <a:ln>
-            <a:noFill/>
-          </a:ln>
-        </p:spPr>
-      </p:pic>
       <p:sp>
         <p:nvSpPr>
           <p:cNvPr id="98" name="Google Shape;98;p18"/>
@@ -15094,8 +14135,8 @@
         </p:nvSpPr>
         <p:spPr>
           <a:xfrm>
-            <a:off x="598650" y="1999875"/>
-            <a:ext cx="2394000" cy="2678100"/>
+            <a:off x="6149700" y="1581250"/>
+            <a:ext cx="2682600" cy="1569900"/>
           </a:xfrm>
           <a:prstGeom prst="rect">
             <a:avLst/>
@@ -15126,15 +14167,50 @@
                   <a:schemeClr val="dk1"/>
                 </a:solidFill>
               </a:rPr>
-              <a:t>Initial Partition </a:t>
-            </a:r>
+              <a:t>Resulting sets</a:t>
+            </a:r>
+            <a:endParaRPr sz="1800">
+              <a:solidFill>
+                <a:schemeClr val="dk1"/>
+              </a:solidFill>
+            </a:endParaRPr>
+          </a:p>
+          <a:p>
+            <a:pPr indent="0" lvl="0" marL="0" rtl="0" algn="l">
+              <a:spcBef>
+                <a:spcPts val="0"/>
+              </a:spcBef>
+              <a:spcAft>
+                <a:spcPts val="0"/>
+              </a:spcAft>
+              <a:buNone/>
+            </a:pPr>
+            <a:r>
+              <a:t/>
+            </a:r>
+            <a:endParaRPr sz="1800">
+              <a:solidFill>
+                <a:schemeClr val="dk1"/>
+              </a:solidFill>
+            </a:endParaRPr>
+          </a:p>
+          <a:p>
+            <a:pPr indent="0" lvl="0" marL="0" rtl="0" algn="l">
+              <a:spcBef>
+                <a:spcPts val="0"/>
+              </a:spcBef>
+              <a:spcAft>
+                <a:spcPts val="0"/>
+              </a:spcAft>
+              <a:buNone/>
+            </a:pPr>
             <a:r>
               <a:rPr lang="en" sz="1800">
                 <a:solidFill>
                   <a:schemeClr val="dk1"/>
                 </a:solidFill>
               </a:rPr>
-              <a:t>Sets </a:t>
+              <a:t>X = {q2, q3, q4, q5}, </a:t>
             </a:r>
             <a:endParaRPr sz="1800">
               <a:solidFill>
@@ -15169,23 +14245,7 @@
                   <a:schemeClr val="dk1"/>
                 </a:solidFill>
               </a:rPr>
-              <a:t> = </a:t>
-            </a:r>
-            <a:r>
-              <a:rPr lang="en" sz="1800">
-                <a:solidFill>
-                  <a:schemeClr val="dk1"/>
-                </a:solidFill>
-              </a:rPr>
-              <a:t>{q0, q1, q3, q4} </a:t>
-            </a:r>
-            <a:r>
-              <a:rPr lang="en" sz="1800">
-                <a:solidFill>
-                  <a:schemeClr val="dk1"/>
-                </a:solidFill>
-              </a:rPr>
-              <a:t> </a:t>
+              <a:t> = {q0, q1, q3, q4} </a:t>
             </a:r>
             <a:endParaRPr sz="1800">
               <a:solidFill>
@@ -15221,111 +14281,6 @@
                 </a:solidFill>
               </a:rPr>
               <a:t> = {q2, q5}</a:t>
-            </a:r>
-            <a:endParaRPr sz="1800">
-              <a:solidFill>
-                <a:schemeClr val="dk1"/>
-              </a:solidFill>
-            </a:endParaRPr>
-          </a:p>
-          <a:p>
-            <a:pPr indent="0" lvl="0" marL="0" rtl="0" algn="l">
-              <a:spcBef>
-                <a:spcPts val="0"/>
-              </a:spcBef>
-              <a:spcAft>
-                <a:spcPts val="0"/>
-              </a:spcAft>
-              <a:buNone/>
-            </a:pPr>
-            <a:r>
-              <a:t/>
-            </a:r>
-            <a:endParaRPr sz="1800">
-              <a:solidFill>
-                <a:schemeClr val="dk1"/>
-              </a:solidFill>
-            </a:endParaRPr>
-          </a:p>
-          <a:p>
-            <a:pPr indent="0" lvl="0" marL="0" rtl="0" algn="l">
-              <a:spcBef>
-                <a:spcPts val="0"/>
-              </a:spcBef>
-              <a:spcAft>
-                <a:spcPts val="0"/>
-              </a:spcAft>
-              <a:buNone/>
-            </a:pPr>
-            <a:r>
-              <a:rPr lang="en" sz="1800">
-                <a:solidFill>
-                  <a:schemeClr val="dk1"/>
-                </a:solidFill>
-              </a:rPr>
-              <a:t>Pick the smallest partition to form a worklist.</a:t>
-            </a:r>
-            <a:endParaRPr sz="1800">
-              <a:solidFill>
-                <a:schemeClr val="dk1"/>
-              </a:solidFill>
-            </a:endParaRPr>
-          </a:p>
-          <a:p>
-            <a:pPr indent="0" lvl="0" marL="0" rtl="0" algn="l">
-              <a:spcBef>
-                <a:spcPts val="0"/>
-              </a:spcBef>
-              <a:spcAft>
-                <a:spcPts val="0"/>
-              </a:spcAft>
-              <a:buNone/>
-            </a:pPr>
-            <a:r>
-              <a:t/>
-            </a:r>
-            <a:endParaRPr sz="1800">
-              <a:solidFill>
-                <a:schemeClr val="dk1"/>
-              </a:solidFill>
-            </a:endParaRPr>
-          </a:p>
-          <a:p>
-            <a:pPr indent="0" lvl="0" marL="0" rtl="0" algn="l">
-              <a:spcBef>
-                <a:spcPts val="0"/>
-              </a:spcBef>
-              <a:spcAft>
-                <a:spcPts val="0"/>
-              </a:spcAft>
-              <a:buNone/>
-            </a:pPr>
-            <a:r>
-              <a:rPr lang="en" sz="1800">
-                <a:solidFill>
-                  <a:schemeClr val="dk1"/>
-                </a:solidFill>
-              </a:rPr>
-              <a:t>Worklist = {</a:t>
-            </a:r>
-            <a:r>
-              <a:rPr lang="en" sz="1800">
-                <a:solidFill>
-                  <a:schemeClr val="dk1"/>
-                </a:solidFill>
-                <a:highlight>
-                  <a:srgbClr val="FF0000"/>
-                </a:highlight>
-              </a:rPr>
-              <a:t>S2</a:t>
-            </a:r>
-            <a:r>
-              <a:rPr lang="en" sz="1800">
-                <a:solidFill>
-                  <a:schemeClr val="dk1"/>
-                </a:solidFill>
-              </a:rPr>
-              <a:t>}</a:t>
             </a:r>
             <a:endParaRPr sz="1800">
               <a:solidFill>
@@ -15407,7 +14362,7 @@
           <p:nvPr/>
         </p:nvGraphicFramePr>
         <p:xfrm>
-          <a:off x="3937413" y="1185050"/>
+          <a:off x="4343425" y="1185050"/>
           <a:ext cx="3000000" cy="3000000"/>
         </p:xfrm>
         <a:graphic>
@@ -15415,7 +14370,7 @@
             <a:tbl>
               <a:tblPr>
                 <a:noFill/>
-                <a:tableStyleId>{7B1D232C-E315-488B-8EF8-48D490293407}</a:tableStyleId>
+                <a:tableStyleId>{B52B1555-68B5-4C20-843E-69694589948E}</a:tableStyleId>
               </a:tblPr>
               <a:tblGrid>
                 <a:gridCol w="568125"/>
@@ -15537,6 +14492,9 @@
                           <a:solidFill>
                             <a:srgbClr val="FFFFFF"/>
                           </a:solidFill>
+                          <a:highlight>
+                            <a:srgbClr val="38761D"/>
+                          </a:highlight>
                         </a:rPr>
                         <a:t>q0</a:t>
                       </a:r>
@@ -15544,6 +14502,9 @@
                         <a:solidFill>
                           <a:srgbClr val="FFFFFF"/>
                         </a:solidFill>
+                        <a:highlight>
+                          <a:srgbClr val="38761D"/>
+                        </a:highlight>
                       </a:endParaRPr>
                     </a:p>
                   </a:txBody>
@@ -15632,6 +14593,9 @@
                           <a:solidFill>
                             <a:srgbClr val="FFFFFF"/>
                           </a:solidFill>
+                          <a:highlight>
+                            <a:srgbClr val="38761D"/>
+                          </a:highlight>
                         </a:rPr>
                         <a:t>q1</a:t>
                       </a:r>
@@ -15639,6 +14603,9 @@
                         <a:solidFill>
                           <a:srgbClr val="FFFFFF"/>
                         </a:solidFill>
+                        <a:highlight>
+                          <a:srgbClr val="38761D"/>
+                        </a:highlight>
                       </a:endParaRPr>
                     </a:p>
                   </a:txBody>
@@ -15727,6 +14694,9 @@
                           <a:solidFill>
                             <a:srgbClr val="FFFFFF"/>
                           </a:solidFill>
+                          <a:highlight>
+                            <a:srgbClr val="FF0000"/>
+                          </a:highlight>
                         </a:rPr>
                         <a:t>q2</a:t>
                       </a:r>
@@ -15734,6 +14704,9 @@
                         <a:solidFill>
                           <a:srgbClr val="FFFFFF"/>
                         </a:solidFill>
+                        <a:highlight>
+                          <a:srgbClr val="FF0000"/>
+                        </a:highlight>
                       </a:endParaRPr>
                     </a:p>
                   </a:txBody>
@@ -15828,6 +14801,9 @@
                           <a:solidFill>
                             <a:srgbClr val="FFFFFF"/>
                           </a:solidFill>
+                          <a:highlight>
+                            <a:srgbClr val="38761D"/>
+                          </a:highlight>
                         </a:rPr>
                         <a:t>q3</a:t>
                       </a:r>
@@ -15835,6 +14811,9 @@
                         <a:solidFill>
                           <a:srgbClr val="FFFFFF"/>
                         </a:solidFill>
+                        <a:highlight>
+                          <a:srgbClr val="38761D"/>
+                        </a:highlight>
                       </a:endParaRPr>
                     </a:p>
                   </a:txBody>
@@ -15929,6 +14908,9 @@
                           <a:solidFill>
                             <a:srgbClr val="FFFFFF"/>
                           </a:solidFill>
+                          <a:highlight>
+                            <a:srgbClr val="38761D"/>
+                          </a:highlight>
                         </a:rPr>
                         <a:t>q4 </a:t>
                       </a:r>
@@ -15936,6 +14918,9 @@
                         <a:solidFill>
                           <a:srgbClr val="FFFFFF"/>
                         </a:solidFill>
+                        <a:highlight>
+                          <a:srgbClr val="38761D"/>
+                        </a:highlight>
                       </a:endParaRPr>
                     </a:p>
                   </a:txBody>
@@ -16030,6 +15015,9 @@
                           <a:solidFill>
                             <a:srgbClr val="FFFFFF"/>
                           </a:solidFill>
+                          <a:highlight>
+                            <a:srgbClr val="FF0000"/>
+                          </a:highlight>
                         </a:rPr>
                         <a:t>q5</a:t>
                       </a:r>
@@ -16037,6 +15025,9 @@
                         <a:solidFill>
                           <a:srgbClr val="FFFFFF"/>
                         </a:solidFill>
+                        <a:highlight>
+                          <a:srgbClr val="FF0000"/>
+                        </a:highlight>
                       </a:endParaRPr>
                     </a:p>
                   </a:txBody>
@@ -16124,7 +15115,7 @@
         <p:spPr>
           <a:xfrm>
             <a:off x="363150" y="1091500"/>
-            <a:ext cx="3761700" cy="4617600"/>
+            <a:ext cx="3909900" cy="4063500"/>
           </a:xfrm>
           <a:prstGeom prst="rect">
             <a:avLst/>
@@ -16155,15 +15146,7 @@
                   <a:schemeClr val="dk1"/>
                 </a:solidFill>
               </a:rPr>
-              <a:t>Partitions</a:t>
-            </a:r>
-            <a:r>
-              <a:rPr lang="en" sz="1800">
-                <a:solidFill>
-                  <a:schemeClr val="dk1"/>
-                </a:solidFill>
-              </a:rPr>
-              <a:t> </a:t>
+              <a:t>X = {q2, q3, q4, q5}, </a:t>
             </a:r>
             <a:endParaRPr sz="1800">
               <a:solidFill>
@@ -16276,23 +15259,110 @@
                   <a:schemeClr val="dk1"/>
                 </a:solidFill>
               </a:rPr>
-              <a:t>Worklist = {} </a:t>
-            </a:r>
-            <a:br>
+              <a:t>Compare predecessors </a:t>
+            </a:r>
+            <a:r>
               <a:rPr lang="en" sz="1800">
                 <a:solidFill>
                   <a:schemeClr val="dk1"/>
                 </a:solidFill>
               </a:rPr>
-            </a:br>
+              <a:t>to our original partitions. </a:t>
+            </a:r>
+            <a:endParaRPr sz="1800">
+              <a:solidFill>
+                <a:schemeClr val="dk1"/>
+              </a:solidFill>
+            </a:endParaRPr>
+          </a:p>
+          <a:p>
+            <a:pPr indent="0" lvl="0" marL="0" rtl="0" algn="l">
+              <a:spcBef>
+                <a:spcPts val="0"/>
+              </a:spcBef>
+              <a:spcAft>
+                <a:spcPts val="0"/>
+              </a:spcAft>
+              <a:buNone/>
+            </a:pPr>
+            <a:r>
+              <a:t/>
+            </a:r>
+            <a:endParaRPr sz="1800">
+              <a:solidFill>
+                <a:schemeClr val="dk1"/>
+              </a:solidFill>
+            </a:endParaRPr>
+          </a:p>
+          <a:p>
+            <a:pPr indent="0" lvl="0" marL="0" rtl="0" algn="l">
+              <a:spcBef>
+                <a:spcPts val="0"/>
+              </a:spcBef>
+              <a:spcAft>
+                <a:spcPts val="0"/>
+              </a:spcAft>
+              <a:buNone/>
+            </a:pPr>
             <a:r>
               <a:rPr lang="en" sz="1800">
                 <a:solidFill>
                   <a:schemeClr val="dk1"/>
                 </a:solidFill>
               </a:rPr>
-              <a:t>Current splitter: {</a:t>
-            </a:r>
+              <a:t>Our goal is to find states that behave differently </a:t>
+            </a:r>
+            <a:r>
+              <a:rPr lang="en" sz="1800">
+                <a:solidFill>
+                  <a:schemeClr val="dk1"/>
+                </a:solidFill>
+              </a:rPr>
+              <a:t>for the </a:t>
+            </a:r>
+            <a:r>
+              <a:rPr lang="en" sz="1800">
+                <a:solidFill>
+                  <a:schemeClr val="dk1"/>
+                </a:solidFill>
+              </a:rPr>
+              <a:t>specific splitter. </a:t>
+            </a:r>
+            <a:endParaRPr sz="1800">
+              <a:solidFill>
+                <a:schemeClr val="dk1"/>
+              </a:solidFill>
+            </a:endParaRPr>
+          </a:p>
+          <a:p>
+            <a:pPr indent="0" lvl="0" marL="0" rtl="0" algn="l">
+              <a:spcBef>
+                <a:spcPts val="0"/>
+              </a:spcBef>
+              <a:spcAft>
+                <a:spcPts val="0"/>
+              </a:spcAft>
+              <a:buNone/>
+            </a:pPr>
+            <a:r>
+              <a:t/>
+            </a:r>
+            <a:endParaRPr sz="1800">
+              <a:solidFill>
+                <a:schemeClr val="dk1"/>
+              </a:solidFill>
+            </a:endParaRPr>
+          </a:p>
+          <a:p>
+            <a:pPr indent="0" lvl="0" marL="0" rtl="0" algn="l">
+              <a:spcBef>
+                <a:spcPts val="0"/>
+              </a:spcBef>
+              <a:spcAft>
+                <a:spcPts val="0"/>
+              </a:spcAft>
+              <a:buNone/>
+            </a:pPr>
             <a:r>
               <a:rPr lang="en" sz="1800">
                 <a:solidFill>
@@ -16310,7 +15380,7 @@
                   <a:schemeClr val="dk1"/>
                 </a:solidFill>
               </a:rPr>
-              <a:t>}</a:t>
+              <a:t> is fully included in X so no split. </a:t>
             </a:r>
             <a:endParaRPr sz="1800">
               <a:solidFill>
@@ -16353,187 +15423,45 @@
                   <a:schemeClr val="dk1"/>
                 </a:solidFill>
               </a:rPr>
-              <a:t>Predecessors: </a:t>
-            </a:r>
-            <a:endParaRPr sz="1800">
-              <a:solidFill>
-                <a:schemeClr val="dk1"/>
-              </a:solidFill>
-            </a:endParaRPr>
-          </a:p>
-          <a:p>
-            <a:pPr indent="0" lvl="0" marL="0" rtl="0" algn="l">
-              <a:spcBef>
-                <a:spcPts val="0"/>
-              </a:spcBef>
-              <a:spcAft>
-                <a:spcPts val="0"/>
-              </a:spcAft>
-              <a:buNone/>
-            </a:pPr>
+              <a:t>For </a:t>
+            </a:r>
             <a:r>
               <a:rPr lang="en" sz="1800">
                 <a:solidFill>
                   <a:schemeClr val="dk1"/>
                 </a:solidFill>
-              </a:rPr>
-              <a:t>On symbol 0:</a:t>
-            </a:r>
-            <a:endParaRPr sz="1800">
-              <a:solidFill>
-                <a:schemeClr val="dk1"/>
-              </a:solidFill>
-            </a:endParaRPr>
-          </a:p>
-          <a:p>
-            <a:pPr indent="0" lvl="0" marL="0" rtl="0" algn="l">
-              <a:spcBef>
-                <a:spcPts val="0"/>
-              </a:spcBef>
-              <a:spcAft>
-                <a:spcPts val="0"/>
-              </a:spcAft>
-              <a:buNone/>
-            </a:pPr>
+                <a:highlight>
+                  <a:srgbClr val="38761D"/>
+                </a:highlight>
+              </a:rPr>
+              <a:t>S1</a:t>
+            </a:r>
             <a:r>
               <a:rPr lang="en" sz="1800">
                 <a:solidFill>
                   <a:schemeClr val="dk1"/>
                 </a:solidFill>
               </a:rPr>
-              <a:t>No state goes to q2 or q5</a:t>
-            </a:r>
-            <a:endParaRPr sz="1800">
-              <a:solidFill>
-                <a:schemeClr val="dk1"/>
-              </a:solidFill>
-            </a:endParaRPr>
-          </a:p>
-          <a:p>
-            <a:pPr indent="0" lvl="0" marL="0" rtl="0" algn="l">
-              <a:spcBef>
-                <a:spcPts val="0"/>
-              </a:spcBef>
-              <a:spcAft>
-                <a:spcPts val="0"/>
-              </a:spcAft>
-              <a:buNone/>
-            </a:pPr>
-            <a:r>
-              <a:t/>
-            </a:r>
-            <a:endParaRPr sz="1800">
-              <a:solidFill>
-                <a:schemeClr val="dk1"/>
-              </a:solidFill>
-            </a:endParaRPr>
-          </a:p>
-          <a:p>
-            <a:pPr indent="0" lvl="0" marL="0" rtl="0" algn="l">
-              <a:spcBef>
-                <a:spcPts val="0"/>
-              </a:spcBef>
-              <a:spcAft>
-                <a:spcPts val="0"/>
-              </a:spcAft>
-              <a:buNone/>
-            </a:pPr>
+              <a:t>, only q3 and q4 are in X, so we split </a:t>
+            </a:r>
             <a:r>
               <a:rPr lang="en" sz="1800">
                 <a:solidFill>
                   <a:schemeClr val="dk1"/>
                 </a:solidFill>
-              </a:rPr>
-              <a:t>On symbol 1: </a:t>
-            </a:r>
-            <a:endParaRPr sz="1800">
-              <a:solidFill>
-                <a:schemeClr val="dk1"/>
-              </a:solidFill>
-            </a:endParaRPr>
-          </a:p>
-          <a:p>
-            <a:pPr indent="0" lvl="0" marL="0" rtl="0" algn="l">
-              <a:spcBef>
-                <a:spcPts val="0"/>
-              </a:spcBef>
-              <a:spcAft>
-                <a:spcPts val="0"/>
-              </a:spcAft>
-              <a:buNone/>
-            </a:pPr>
+                <a:highlight>
+                  <a:srgbClr val="38761D"/>
+                </a:highlight>
+              </a:rPr>
+              <a:t>S1</a:t>
+            </a:r>
             <a:r>
               <a:rPr lang="en" sz="1800">
                 <a:solidFill>
                   <a:schemeClr val="dk1"/>
                 </a:solidFill>
               </a:rPr>
-              <a:t>X = </a:t>
-            </a:r>
-            <a:r>
-              <a:rPr lang="en" sz="1800">
-                <a:solidFill>
-                  <a:schemeClr val="dk1"/>
-                </a:solidFill>
-              </a:rPr>
-              <a:t>{q2, q3, q4, q5} go to q2 or q5</a:t>
-            </a:r>
-            <a:endParaRPr sz="1800">
-              <a:solidFill>
-                <a:schemeClr val="dk1"/>
-              </a:solidFill>
-            </a:endParaRPr>
-          </a:p>
-          <a:p>
-            <a:pPr indent="0" lvl="0" marL="0" rtl="0" algn="l">
-              <a:spcBef>
-                <a:spcPts val="0"/>
-              </a:spcBef>
-              <a:spcAft>
-                <a:spcPts val="0"/>
-              </a:spcAft>
-              <a:buNone/>
-            </a:pPr>
-            <a:r>
-              <a:t/>
-            </a:r>
-            <a:endParaRPr sz="1800">
-              <a:solidFill>
-                <a:schemeClr val="dk1"/>
-              </a:solidFill>
-            </a:endParaRPr>
-          </a:p>
-          <a:p>
-            <a:pPr indent="0" lvl="0" marL="0" rtl="0" algn="l">
-              <a:spcBef>
-                <a:spcPts val="0"/>
-              </a:spcBef>
-              <a:spcAft>
-                <a:spcPts val="0"/>
-              </a:spcAft>
-              <a:buNone/>
-            </a:pPr>
-            <a:r>
-              <a:t/>
-            </a:r>
-            <a:endParaRPr sz="1800">
-              <a:solidFill>
-                <a:schemeClr val="dk1"/>
-              </a:solidFill>
-            </a:endParaRPr>
-          </a:p>
-          <a:p>
-            <a:pPr indent="0" lvl="0" marL="0" rtl="0" algn="l">
-              <a:spcBef>
-                <a:spcPts val="0"/>
-              </a:spcBef>
-              <a:spcAft>
-                <a:spcPts val="0"/>
-              </a:spcAft>
-              <a:buNone/>
-            </a:pPr>
-            <a:r>
-              <a:t/>
+              <a:t>. </a:t>
             </a:r>
             <a:endParaRPr sz="1800">
               <a:solidFill>
@@ -16551,8 +15479,8 @@
         </p:nvSpPr>
         <p:spPr>
           <a:xfrm>
-            <a:off x="6149700" y="1581250"/>
-            <a:ext cx="2682600" cy="1569900"/>
+            <a:off x="6373800" y="1091500"/>
+            <a:ext cx="2458500" cy="2955300"/>
           </a:xfrm>
           <a:prstGeom prst="rect">
             <a:avLst/>
@@ -16583,50 +15511,7 @@
                   <a:schemeClr val="dk1"/>
                 </a:solidFill>
               </a:rPr>
-              <a:t>Resulting sets</a:t>
-            </a:r>
-            <a:endParaRPr sz="1800">
-              <a:solidFill>
-                <a:schemeClr val="dk1"/>
-              </a:solidFill>
-            </a:endParaRPr>
-          </a:p>
-          <a:p>
-            <a:pPr indent="0" lvl="0" marL="0" rtl="0" algn="l">
-              <a:spcBef>
-                <a:spcPts val="0"/>
-              </a:spcBef>
-              <a:spcAft>
-                <a:spcPts val="0"/>
-              </a:spcAft>
-              <a:buNone/>
-            </a:pPr>
-            <a:r>
-              <a:t/>
-            </a:r>
-            <a:endParaRPr sz="1800">
-              <a:solidFill>
-                <a:schemeClr val="dk1"/>
-              </a:solidFill>
-            </a:endParaRPr>
-          </a:p>
-          <a:p>
-            <a:pPr indent="0" lvl="0" marL="0" rtl="0" algn="l">
-              <a:spcBef>
-                <a:spcPts val="0"/>
-              </a:spcBef>
-              <a:spcAft>
-                <a:spcPts val="0"/>
-              </a:spcAft>
-              <a:buNone/>
-            </a:pPr>
-            <a:r>
-              <a:rPr lang="en" sz="1800">
-                <a:solidFill>
-                  <a:schemeClr val="dk1"/>
-                </a:solidFill>
-              </a:rPr>
-              <a:t>X = {q2, q3, q4, q5}, </a:t>
+              <a:t>New Partitions </a:t>
             </a:r>
             <a:endParaRPr sz="1800">
               <a:solidFill>
@@ -16661,7 +15546,7 @@
                   <a:schemeClr val="dk1"/>
                 </a:solidFill>
               </a:rPr>
-              <a:t> = {q0, q1, q3, q4} </a:t>
+              <a:t> = {q3, q4} </a:t>
             </a:r>
             <a:endParaRPr sz="1800">
               <a:solidFill>
@@ -16701,6 +15586,184 @@
             <a:endParaRPr sz="1800">
               <a:solidFill>
                 <a:schemeClr val="dk1"/>
+              </a:solidFill>
+            </a:endParaRPr>
+          </a:p>
+          <a:p>
+            <a:pPr indent="0" lvl="0" marL="0" rtl="0" algn="l">
+              <a:spcBef>
+                <a:spcPts val="0"/>
+              </a:spcBef>
+              <a:spcAft>
+                <a:spcPts val="0"/>
+              </a:spcAft>
+              <a:buNone/>
+            </a:pPr>
+            <a:r>
+              <a:rPr lang="en" sz="1800">
+                <a:solidFill>
+                  <a:schemeClr val="dk1"/>
+                </a:solidFill>
+                <a:highlight>
+                  <a:srgbClr val="BF9000"/>
+                </a:highlight>
+              </a:rPr>
+              <a:t>S3</a:t>
+            </a:r>
+            <a:r>
+              <a:rPr lang="en" sz="1800">
+                <a:solidFill>
+                  <a:schemeClr val="dk1"/>
+                </a:solidFill>
+              </a:rPr>
+              <a:t> = {q0, q1}</a:t>
+            </a:r>
+            <a:endParaRPr sz="1800">
+              <a:solidFill>
+                <a:schemeClr val="dk1"/>
+              </a:solidFill>
+            </a:endParaRPr>
+          </a:p>
+          <a:p>
+            <a:pPr indent="0" lvl="0" marL="0" rtl="0" algn="l">
+              <a:spcBef>
+                <a:spcPts val="0"/>
+              </a:spcBef>
+              <a:spcAft>
+                <a:spcPts val="0"/>
+              </a:spcAft>
+              <a:buNone/>
+            </a:pPr>
+            <a:r>
+              <a:t/>
+            </a:r>
+            <a:endParaRPr sz="1800">
+              <a:solidFill>
+                <a:schemeClr val="dk1"/>
+              </a:solidFill>
+            </a:endParaRPr>
+          </a:p>
+          <a:p>
+            <a:pPr indent="0" lvl="0" marL="0" rtl="0" algn="l">
+              <a:spcBef>
+                <a:spcPts val="0"/>
+              </a:spcBef>
+              <a:spcAft>
+                <a:spcPts val="0"/>
+              </a:spcAft>
+              <a:buNone/>
+            </a:pPr>
+            <a:r>
+              <a:rPr lang="en" sz="1800">
+                <a:solidFill>
+                  <a:schemeClr val="dk1"/>
+                </a:solidFill>
+              </a:rPr>
+              <a:t>We pick the smallest partition (size of </a:t>
+            </a:r>
+            <a:r>
+              <a:rPr lang="en" sz="1800">
+                <a:solidFill>
+                  <a:schemeClr val="dk1"/>
+                </a:solidFill>
+                <a:highlight>
+                  <a:srgbClr val="38761D"/>
+                </a:highlight>
+              </a:rPr>
+              <a:t>S1</a:t>
+            </a:r>
+            <a:r>
+              <a:rPr lang="en" sz="1800">
+                <a:solidFill>
+                  <a:schemeClr val="dk1"/>
+                </a:solidFill>
+              </a:rPr>
+              <a:t> = </a:t>
+            </a:r>
+            <a:r>
+              <a:rPr lang="en" sz="1800">
+                <a:solidFill>
+                  <a:schemeClr val="dk1"/>
+                </a:solidFill>
+                <a:highlight>
+                  <a:srgbClr val="BF9000"/>
+                </a:highlight>
+              </a:rPr>
+              <a:t>S3</a:t>
+            </a:r>
+            <a:r>
+              <a:rPr lang="en" sz="1800">
+                <a:solidFill>
+                  <a:schemeClr val="dk1"/>
+                </a:solidFill>
+              </a:rPr>
+              <a:t> arbitrary) </a:t>
+            </a:r>
+            <a:endParaRPr sz="1800">
+              <a:solidFill>
+                <a:schemeClr val="dk1"/>
+              </a:solidFill>
+            </a:endParaRPr>
+          </a:p>
+          <a:p>
+            <a:pPr indent="0" lvl="0" marL="0" rtl="0" algn="l">
+              <a:spcBef>
+                <a:spcPts val="0"/>
+              </a:spcBef>
+              <a:spcAft>
+                <a:spcPts val="0"/>
+              </a:spcAft>
+              <a:buNone/>
+            </a:pPr>
+            <a:r>
+              <a:t/>
+            </a:r>
+            <a:endParaRPr sz="1800">
+              <a:solidFill>
+                <a:schemeClr val="dk1"/>
+              </a:solidFill>
+            </a:endParaRPr>
+          </a:p>
+          <a:p>
+            <a:pPr indent="0" lvl="0" marL="0" rtl="0" algn="l">
+              <a:spcBef>
+                <a:spcPts val="0"/>
+              </a:spcBef>
+              <a:spcAft>
+                <a:spcPts val="0"/>
+              </a:spcAft>
+              <a:buNone/>
+            </a:pPr>
+            <a:r>
+              <a:rPr lang="en" sz="1800">
+                <a:solidFill>
+                  <a:schemeClr val="dk1"/>
+                </a:solidFill>
+              </a:rPr>
+              <a:t>Worklist = {</a:t>
+            </a:r>
+            <a:r>
+              <a:rPr lang="en" sz="1800">
+                <a:solidFill>
+                  <a:schemeClr val="dk1"/>
+                </a:solidFill>
+                <a:highlight>
+                  <a:srgbClr val="38761D"/>
+                </a:highlight>
+              </a:rPr>
+              <a:t>S1</a:t>
+            </a:r>
+            <a:r>
+              <a:rPr lang="en" sz="1800">
+                <a:solidFill>
+                  <a:schemeClr val="dk1"/>
+                </a:solidFill>
+              </a:rPr>
+              <a:t>} </a:t>
+            </a:r>
+            <a:endParaRPr sz="1800">
+              <a:solidFill>
+                <a:schemeClr val="lt2"/>
               </a:solidFill>
             </a:endParaRPr>
           </a:p>
@@ -16778,7 +15841,7 @@
           <p:nvPr/>
         </p:nvGraphicFramePr>
         <p:xfrm>
-          <a:off x="4343425" y="1185050"/>
+          <a:off x="4038725" y="1185050"/>
           <a:ext cx="3000000" cy="3000000"/>
         </p:xfrm>
         <a:graphic>
@@ -16786,7 +15849,7 @@
             <a:tbl>
               <a:tblPr>
                 <a:noFill/>
-                <a:tableStyleId>{7B1D232C-E315-488B-8EF8-48D490293407}</a:tableStyleId>
+                <a:tableStyleId>{B52B1555-68B5-4C20-843E-69694589948E}</a:tableStyleId>
               </a:tblPr>
               <a:tblGrid>
                 <a:gridCol w="568125"/>
@@ -16908,9 +15971,6 @@
                           <a:solidFill>
                             <a:srgbClr val="FFFFFF"/>
                           </a:solidFill>
-                          <a:highlight>
-                            <a:srgbClr val="38761D"/>
-                          </a:highlight>
                         </a:rPr>
                         <a:t>q0</a:t>
                       </a:r>
@@ -16918,9 +15978,6 @@
                         <a:solidFill>
                           <a:srgbClr val="FFFFFF"/>
                         </a:solidFill>
-                        <a:highlight>
-                          <a:srgbClr val="38761D"/>
-                        </a:highlight>
                       </a:endParaRPr>
                     </a:p>
                   </a:txBody>
@@ -17009,9 +16066,6 @@
                           <a:solidFill>
                             <a:srgbClr val="FFFFFF"/>
                           </a:solidFill>
-                          <a:highlight>
-                            <a:srgbClr val="38761D"/>
-                          </a:highlight>
                         </a:rPr>
                         <a:t>q1</a:t>
                       </a:r>
@@ -17019,9 +16073,6 @@
                         <a:solidFill>
                           <a:srgbClr val="FFFFFF"/>
                         </a:solidFill>
-                        <a:highlight>
-                          <a:srgbClr val="38761D"/>
-                        </a:highlight>
                       </a:endParaRPr>
                     </a:p>
                   </a:txBody>
@@ -17110,9 +16161,6 @@
                           <a:solidFill>
                             <a:srgbClr val="FFFFFF"/>
                           </a:solidFill>
-                          <a:highlight>
-                            <a:srgbClr val="FF0000"/>
-                          </a:highlight>
                         </a:rPr>
                         <a:t>q2</a:t>
                       </a:r>
@@ -17120,9 +16168,6 @@
                         <a:solidFill>
                           <a:srgbClr val="FFFFFF"/>
                         </a:solidFill>
-                        <a:highlight>
-                          <a:srgbClr val="FF0000"/>
-                        </a:highlight>
                       </a:endParaRPr>
                     </a:p>
                   </a:txBody>
@@ -17178,9 +16223,6 @@
                           <a:solidFill>
                             <a:srgbClr val="FFFFFF"/>
                           </a:solidFill>
-                          <a:highlight>
-                            <a:srgbClr val="FF0000"/>
-                          </a:highlight>
                         </a:rPr>
                         <a:t>q2</a:t>
                       </a:r>
@@ -17188,9 +16230,6 @@
                         <a:solidFill>
                           <a:srgbClr val="FFFFFF"/>
                         </a:solidFill>
-                        <a:highlight>
-                          <a:srgbClr val="FF0000"/>
-                        </a:highlight>
                       </a:endParaRPr>
                     </a:p>
                   </a:txBody>
@@ -17254,6 +16293,9 @@
                           <a:solidFill>
                             <a:srgbClr val="FFFFFF"/>
                           </a:solidFill>
+                          <a:highlight>
+                            <a:srgbClr val="38761D"/>
+                          </a:highlight>
                         </a:rPr>
                         <a:t>q3</a:t>
                       </a:r>
@@ -17261,6 +16303,9 @@
                         <a:solidFill>
                           <a:srgbClr val="FFFFFF"/>
                         </a:solidFill>
+                        <a:highlight>
+                          <a:srgbClr val="38761D"/>
+                        </a:highlight>
                       </a:endParaRPr>
                     </a:p>
                   </a:txBody>
@@ -17285,9 +16330,6 @@
                           <a:solidFill>
                             <a:srgbClr val="FFFFFF"/>
                           </a:solidFill>
-                          <a:highlight>
-                            <a:srgbClr val="FF0000"/>
-                          </a:highlight>
                         </a:rPr>
                         <a:t>q2</a:t>
                       </a:r>
@@ -17295,9 +16337,6 @@
                         <a:solidFill>
                           <a:srgbClr val="FFFFFF"/>
                         </a:solidFill>
-                        <a:highlight>
-                          <a:srgbClr val="FF0000"/>
-                        </a:highlight>
                       </a:endParaRPr>
                     </a:p>
                   </a:txBody>
@@ -17361,6 +16400,9 @@
                           <a:solidFill>
                             <a:srgbClr val="FFFFFF"/>
                           </a:solidFill>
+                          <a:highlight>
+                            <a:srgbClr val="38761D"/>
+                          </a:highlight>
                         </a:rPr>
                         <a:t>q4</a:t>
                       </a:r>
@@ -17368,6 +16410,9 @@
                         <a:solidFill>
                           <a:srgbClr val="FFFFFF"/>
                         </a:solidFill>
+                        <a:highlight>
+                          <a:srgbClr val="38761D"/>
+                        </a:highlight>
                       </a:endParaRPr>
                     </a:p>
                   </a:txBody>
@@ -17392,9 +16437,6 @@
                           <a:solidFill>
                             <a:srgbClr val="FFFFFF"/>
                           </a:solidFill>
-                          <a:highlight>
-                            <a:srgbClr val="FF0000"/>
-                          </a:highlight>
                         </a:rPr>
                         <a:t>q5</a:t>
                       </a:r>
@@ -17402,9 +16444,6 @@
                         <a:solidFill>
                           <a:srgbClr val="FFFFFF"/>
                         </a:solidFill>
-                        <a:highlight>
-                          <a:srgbClr val="FF0000"/>
-                        </a:highlight>
                       </a:endParaRPr>
                     </a:p>
                   </a:txBody>
@@ -17431,9 +16470,6 @@
                           <a:solidFill>
                             <a:srgbClr val="FFFFFF"/>
                           </a:solidFill>
-                          <a:highlight>
-                            <a:srgbClr val="FF0000"/>
-                          </a:highlight>
                         </a:rPr>
                         <a:t>q5</a:t>
                       </a:r>
@@ -17441,9 +16477,6 @@
                         <a:solidFill>
                           <a:srgbClr val="FFFFFF"/>
                         </a:solidFill>
-                        <a:highlight>
-                          <a:srgbClr val="FF0000"/>
-                        </a:highlight>
                       </a:endParaRPr>
                     </a:p>
                   </a:txBody>
@@ -17499,9 +16532,6 @@
                           <a:solidFill>
                             <a:srgbClr val="FFFFFF"/>
                           </a:solidFill>
-                          <a:highlight>
-                            <a:srgbClr val="FF0000"/>
-                          </a:highlight>
                         </a:rPr>
                         <a:t>q2</a:t>
                       </a:r>
@@ -17509,9 +16539,6 @@
                         <a:solidFill>
                           <a:srgbClr val="FFFFFF"/>
                         </a:solidFill>
-                        <a:highlight>
-                          <a:srgbClr val="FF0000"/>
-                        </a:highlight>
                       </a:endParaRPr>
                     </a:p>
                   </a:txBody>
@@ -17531,7 +16558,7 @@
         <p:spPr>
           <a:xfrm>
             <a:off x="363150" y="1091500"/>
-            <a:ext cx="3909900" cy="4063500"/>
+            <a:ext cx="3761700" cy="4063500"/>
           </a:xfrm>
           <a:prstGeom prst="rect">
             <a:avLst/>
@@ -17562,7 +16589,7 @@
                   <a:schemeClr val="dk1"/>
                 </a:solidFill>
               </a:rPr>
-              <a:t>X = {q2, q3, q4, q5}, </a:t>
+              <a:t>Partitions </a:t>
             </a:r>
             <a:endParaRPr sz="1800">
               <a:solidFill>
@@ -17597,7 +16624,7 @@
                   <a:schemeClr val="dk1"/>
                 </a:solidFill>
               </a:rPr>
-              <a:t> = {q0, q1, q3, q4} </a:t>
+              <a:t> = {q3, q4} </a:t>
             </a:r>
             <a:endParaRPr sz="1800">
               <a:solidFill>
@@ -17651,7 +16678,23 @@
               <a:buNone/>
             </a:pPr>
             <a:r>
-              <a:t/>
+              <a:rPr lang="en" sz="1800">
+                <a:solidFill>
+                  <a:schemeClr val="dk1"/>
+                </a:solidFill>
+                <a:highlight>
+                  <a:srgbClr val="BF9000"/>
+                </a:highlight>
+              </a:rPr>
+              <a:t>S3</a:t>
+            </a:r>
+            <a:r>
+              <a:rPr lang="en" sz="1800">
+                <a:solidFill>
+                  <a:schemeClr val="dk1"/>
+                </a:solidFill>
+              </a:rPr>
+              <a:t> = {q0, q1}</a:t>
             </a:r>
             <a:endParaRPr sz="1800">
               <a:solidFill>
@@ -17675,15 +16718,7 @@
                   <a:schemeClr val="dk1"/>
                 </a:solidFill>
               </a:rPr>
-              <a:t>Compare predecessors </a:t>
-            </a:r>
-            <a:r>
-              <a:rPr lang="en" sz="1800">
-                <a:solidFill>
-                  <a:schemeClr val="dk1"/>
-                </a:solidFill>
-              </a:rPr>
-              <a:t>to our original partitions. </a:t>
+              <a:t>Worklist: {}</a:t>
             </a:r>
             <a:endParaRPr sz="1800">
               <a:solidFill>
@@ -17702,7 +16737,42 @@
               <a:buNone/>
             </a:pPr>
             <a:r>
-              <a:t/>
+              <a:rPr lang="en" sz="1800">
+                <a:solidFill>
+                  <a:schemeClr val="dk1"/>
+                </a:solidFill>
+              </a:rPr>
+              <a:t>Current splitter: {</a:t>
+            </a:r>
+            <a:r>
+              <a:rPr lang="en" sz="1800">
+                <a:solidFill>
+                  <a:schemeClr val="dk1"/>
+                </a:solidFill>
+                <a:highlight>
+                  <a:srgbClr val="38761D"/>
+                </a:highlight>
+              </a:rPr>
+              <a:t>S1</a:t>
+            </a:r>
+            <a:r>
+              <a:rPr lang="en" sz="1800">
+                <a:solidFill>
+                  <a:schemeClr val="dk1"/>
+                </a:solidFill>
+              </a:rPr>
+              <a:t>}</a:t>
+            </a:r>
+            <a:r>
+              <a:rPr lang="en" sz="1800">
+                <a:solidFill>
+                  <a:schemeClr val="dk1"/>
+                </a:solidFill>
+                <a:highlight>
+                  <a:srgbClr val="38761D"/>
+                </a:highlight>
+              </a:rPr>
+              <a:t> </a:t>
             </a:r>
             <a:endParaRPr sz="1800">
               <a:solidFill>
@@ -17721,28 +16791,55 @@
               <a:buNone/>
             </a:pPr>
             <a:r>
+              <a:t/>
+            </a:r>
+            <a:endParaRPr sz="1800">
+              <a:solidFill>
+                <a:schemeClr val="dk1"/>
+              </a:solidFill>
+            </a:endParaRPr>
+          </a:p>
+          <a:p>
+            <a:pPr indent="0" lvl="0" marL="0" rtl="0" algn="l">
+              <a:spcBef>
+                <a:spcPts val="0"/>
+              </a:spcBef>
+              <a:spcAft>
+                <a:spcPts val="0"/>
+              </a:spcAft>
+              <a:buNone/>
+            </a:pPr>
+            <a:r>
               <a:rPr lang="en" sz="1800">
                 <a:solidFill>
                   <a:schemeClr val="dk1"/>
                 </a:solidFill>
               </a:rPr>
-              <a:t>Our goal is to find states that behave differently </a:t>
-            </a:r>
+              <a:t>On symbol 0:</a:t>
+            </a:r>
+            <a:endParaRPr sz="1800">
+              <a:solidFill>
+                <a:schemeClr val="dk1"/>
+              </a:solidFill>
+            </a:endParaRPr>
+          </a:p>
+          <a:p>
+            <a:pPr indent="0" lvl="0" marL="0" rtl="0" algn="l">
+              <a:spcBef>
+                <a:spcPts val="0"/>
+              </a:spcBef>
+              <a:spcAft>
+                <a:spcPts val="0"/>
+              </a:spcAft>
+              <a:buNone/>
+            </a:pPr>
             <a:r>
               <a:rPr lang="en" sz="1800">
                 <a:solidFill>
                   <a:schemeClr val="dk1"/>
                 </a:solidFill>
               </a:rPr>
-              <a:t>for the </a:t>
-            </a:r>
-            <a:r>
-              <a:rPr lang="en" sz="1800">
-                <a:solidFill>
-                  <a:schemeClr val="dk1"/>
-                </a:solidFill>
-              </a:rPr>
-              <a:t>specific splitter. </a:t>
+              <a:t>X = {q3, q4} go to q3 or q4</a:t>
             </a:r>
             <a:endParaRPr sz="1800">
               <a:solidFill>
@@ -17796,7 +16893,26 @@
                   <a:schemeClr val="dk1"/>
                 </a:solidFill>
               </a:rPr>
-              <a:t> is fully included in X so no split. </a:t>
+              <a:t> and </a:t>
+            </a:r>
+            <a:r>
+              <a:rPr lang="en" sz="1800">
+                <a:solidFill>
+                  <a:schemeClr val="dk1"/>
+                </a:solidFill>
+                <a:highlight>
+                  <a:srgbClr val="BF9000"/>
+                </a:highlight>
+              </a:rPr>
+              <a:t>S3</a:t>
+            </a:r>
+            <a:r>
+              <a:rPr lang="en" sz="1800">
+                <a:solidFill>
+                  <a:schemeClr val="dk1"/>
+                </a:solidFill>
+              </a:rPr>
+              <a:t> no intersection with X</a:t>
             </a:r>
             <a:endParaRPr sz="1800">
               <a:solidFill>
@@ -17833,14 +16949,6 @@
               </a:spcAft>
               <a:buNone/>
             </a:pPr>
-            <a:r>
-              <a:rPr lang="en" sz="1800">
-                <a:solidFill>
-                  <a:schemeClr val="dk1"/>
-                </a:solidFill>
-              </a:rPr>
-              <a:t>For </a:t>
-            </a:r>
             <a:r>
               <a:rPr lang="en" sz="1800">
                 <a:solidFill>
@@ -17858,26 +16966,26 @@
                   <a:schemeClr val="dk1"/>
                 </a:solidFill>
               </a:rPr>
-              <a:t>, only q3 and q4 are in X, so we split </a:t>
-            </a:r>
-            <a:r>
-              <a:rPr lang="en" sz="1800">
-                <a:solidFill>
-                  <a:schemeClr val="dk1"/>
-                </a:solidFill>
-                <a:highlight>
-                  <a:srgbClr val="38761D"/>
-                </a:highlight>
-              </a:rPr>
-              <a:t>S1</a:t>
-            </a:r>
-            <a:r>
-              <a:rPr lang="en" sz="1800">
-                <a:solidFill>
-                  <a:schemeClr val="dk1"/>
-                </a:solidFill>
-              </a:rPr>
-              <a:t>. </a:t>
+              <a:t> is fully included in X, no split</a:t>
+            </a:r>
+            <a:endParaRPr sz="1800">
+              <a:solidFill>
+                <a:schemeClr val="dk1"/>
+              </a:solidFill>
+            </a:endParaRPr>
+          </a:p>
+          <a:p>
+            <a:pPr indent="0" lvl="0" marL="0" rtl="0" algn="l">
+              <a:spcBef>
+                <a:spcPts val="0"/>
+              </a:spcBef>
+              <a:spcAft>
+                <a:spcPts val="0"/>
+              </a:spcAft>
+              <a:buNone/>
+            </a:pPr>
+            <a:r>
+              <a:t/>
             </a:r>
             <a:endParaRPr sz="1800">
               <a:solidFill>
@@ -17895,8 +17003,8 @@
         </p:nvSpPr>
         <p:spPr>
           <a:xfrm>
-            <a:off x="6373800" y="1091500"/>
-            <a:ext cx="2458500" cy="2955300"/>
+            <a:off x="6149700" y="1324075"/>
+            <a:ext cx="2682600" cy="1293000"/>
           </a:xfrm>
           <a:prstGeom prst="rect">
             <a:avLst/>
@@ -17927,7 +17035,31 @@
                   <a:schemeClr val="dk1"/>
                 </a:solidFill>
               </a:rPr>
-              <a:t>New Partitions </a:t>
+              <a:t>Resulting</a:t>
+            </a:r>
+            <a:r>
+              <a:rPr lang="en" sz="1800">
+                <a:solidFill>
+                  <a:schemeClr val="dk1"/>
+                </a:solidFill>
+              </a:rPr>
+              <a:t> </a:t>
+            </a:r>
+            <a:r>
+              <a:rPr lang="en" sz="1800">
+                <a:solidFill>
+                  <a:schemeClr val="dk1"/>
+                </a:solidFill>
+              </a:rPr>
+              <a:t>partitions</a:t>
+            </a:r>
+            <a:r>
+              <a:rPr lang="en" sz="1800">
+                <a:solidFill>
+                  <a:schemeClr val="dk1"/>
+                </a:solidFill>
+              </a:rPr>
+              <a:t> </a:t>
             </a:r>
             <a:endParaRPr sz="1800">
               <a:solidFill>
@@ -18037,149 +17169,6 @@
             <a:endParaRPr sz="1800">
               <a:solidFill>
                 <a:schemeClr val="dk1"/>
-              </a:solidFill>
-            </a:endParaRPr>
-          </a:p>
-          <a:p>
-            <a:pPr indent="0" lvl="0" marL="0" rtl="0" algn="l">
-              <a:spcBef>
-                <a:spcPts val="0"/>
-              </a:spcBef>
-              <a:spcAft>
-                <a:spcPts val="0"/>
-              </a:spcAft>
-              <a:buNone/>
-            </a:pPr>
-            <a:r>
-              <a:t/>
-            </a:r>
-            <a:endParaRPr sz="1800">
-              <a:solidFill>
-                <a:schemeClr val="dk1"/>
-              </a:solidFill>
-            </a:endParaRPr>
-          </a:p>
-          <a:p>
-            <a:pPr indent="0" lvl="0" marL="0" rtl="0" algn="l">
-              <a:spcBef>
-                <a:spcPts val="0"/>
-              </a:spcBef>
-              <a:spcAft>
-                <a:spcPts val="0"/>
-              </a:spcAft>
-              <a:buNone/>
-            </a:pPr>
-            <a:r>
-              <a:rPr lang="en" sz="1800">
-                <a:solidFill>
-                  <a:schemeClr val="dk1"/>
-                </a:solidFill>
-              </a:rPr>
-              <a:t>We pick the smallest partition (size of </a:t>
-            </a:r>
-            <a:r>
-              <a:rPr lang="en" sz="1800">
-                <a:solidFill>
-                  <a:schemeClr val="dk1"/>
-                </a:solidFill>
-                <a:highlight>
-                  <a:srgbClr val="38761D"/>
-                </a:highlight>
-              </a:rPr>
-              <a:t>S1</a:t>
-            </a:r>
-            <a:r>
-              <a:rPr lang="en" sz="1800">
-                <a:solidFill>
-                  <a:schemeClr val="dk1"/>
-                </a:solidFill>
-              </a:rPr>
-              <a:t> = </a:t>
-            </a:r>
-            <a:r>
-              <a:rPr lang="en" sz="1800">
-                <a:solidFill>
-                  <a:schemeClr val="dk1"/>
-                </a:solidFill>
-                <a:highlight>
-                  <a:srgbClr val="BF9000"/>
-                </a:highlight>
-              </a:rPr>
-              <a:t>S3</a:t>
-            </a:r>
-            <a:r>
-              <a:rPr lang="en" sz="1800">
-                <a:solidFill>
-                  <a:schemeClr val="dk1"/>
-                </a:solidFill>
-              </a:rPr>
-              <a:t> arbitrary) </a:t>
-            </a:r>
-            <a:endParaRPr sz="1800">
-              <a:solidFill>
-                <a:schemeClr val="dk1"/>
-              </a:solidFill>
-            </a:endParaRPr>
-          </a:p>
-          <a:p>
-            <a:pPr indent="0" lvl="0" marL="0" rtl="0" algn="l">
-              <a:spcBef>
-                <a:spcPts val="0"/>
-              </a:spcBef>
-              <a:spcAft>
-                <a:spcPts val="0"/>
-              </a:spcAft>
-              <a:buNone/>
-            </a:pPr>
-            <a:r>
-              <a:t/>
-            </a:r>
-            <a:endParaRPr sz="1800">
-              <a:solidFill>
-                <a:schemeClr val="dk1"/>
-              </a:solidFill>
-            </a:endParaRPr>
-          </a:p>
-          <a:p>
-            <a:pPr indent="0" lvl="0" marL="0" rtl="0" algn="l">
-              <a:spcBef>
-                <a:spcPts val="0"/>
-              </a:spcBef>
-              <a:spcAft>
-                <a:spcPts val="0"/>
-              </a:spcAft>
-              <a:buNone/>
-            </a:pPr>
-            <a:r>
-              <a:rPr lang="en" sz="1800">
-                <a:solidFill>
-                  <a:schemeClr val="dk1"/>
-                </a:solidFill>
-              </a:rPr>
-              <a:t>Worklist = {</a:t>
-            </a:r>
-            <a:r>
-              <a:rPr lang="en" sz="1800">
-                <a:solidFill>
-                  <a:schemeClr val="dk1"/>
-                </a:solidFill>
-                <a:highlight>
-                  <a:srgbClr val="38761D"/>
-                </a:highlight>
-              </a:rPr>
-              <a:t>S1</a:t>
-            </a:r>
-            <a:r>
-              <a:rPr lang="en" sz="1800">
-                <a:solidFill>
-                  <a:schemeClr val="dk1"/>
-                </a:solidFill>
-              </a:rPr>
-              <a:t>} </a:t>
-            </a:r>
-            <a:endParaRPr sz="1800">
-              <a:solidFill>
-                <a:schemeClr val="lt2"/>
               </a:solidFill>
             </a:endParaRPr>
           </a:p>
@@ -18257,7 +17246,7 @@
           <p:nvPr/>
         </p:nvGraphicFramePr>
         <p:xfrm>
-          <a:off x="4038725" y="1185050"/>
+          <a:off x="4048625" y="1185050"/>
           <a:ext cx="3000000" cy="3000000"/>
         </p:xfrm>
         <a:graphic>
@@ -18265,7 +17254,7 @@
             <a:tbl>
               <a:tblPr>
                 <a:noFill/>
-                <a:tableStyleId>{7B1D232C-E315-488B-8EF8-48D490293407}</a:tableStyleId>
+                <a:tableStyleId>{B52B1555-68B5-4C20-843E-69694589948E}</a:tableStyleId>
               </a:tblPr>
               <a:tblGrid>
                 <a:gridCol w="568125"/>
@@ -18387,6 +17376,9 @@
                           <a:solidFill>
                             <a:srgbClr val="FFFFFF"/>
                           </a:solidFill>
+                          <a:highlight>
+                            <a:srgbClr val="BF9000"/>
+                          </a:highlight>
                         </a:rPr>
                         <a:t>q0</a:t>
                       </a:r>
@@ -18394,6 +17386,9 @@
                         <a:solidFill>
                           <a:srgbClr val="FFFFFF"/>
                         </a:solidFill>
+                        <a:highlight>
+                          <a:srgbClr val="BF9000"/>
+                        </a:highlight>
                       </a:endParaRPr>
                     </a:p>
                   </a:txBody>
@@ -18449,6 +17444,9 @@
                           <a:solidFill>
                             <a:srgbClr val="FFFFFF"/>
                           </a:solidFill>
+                          <a:highlight>
+                            <a:srgbClr val="38761D"/>
+                          </a:highlight>
                         </a:rPr>
                         <a:t>q3</a:t>
                       </a:r>
@@ -18456,6 +17454,9 @@
                         <a:solidFill>
                           <a:srgbClr val="FFFFFF"/>
                         </a:solidFill>
+                        <a:highlight>
+                          <a:srgbClr val="38761D"/>
+                        </a:highlight>
                       </a:endParaRPr>
                     </a:p>
                   </a:txBody>
@@ -18463,6 +17464,43 @@
                 </a:tc>
               </a:tr>
               <a:tr h="387425">
+                <a:tc>
+                  <a:txBody>
+                    <a:bodyPr/>
+                    <a:lstStyle/>
+                    <a:p>
+                      <a:pPr indent="0" lvl="0" marL="0" rtl="0" algn="l">
+                        <a:spcBef>
+                          <a:spcPts val="0"/>
+                        </a:spcBef>
+                        <a:spcAft>
+                          <a:spcPts val="0"/>
+                        </a:spcAft>
+                        <a:buNone/>
+                      </a:pPr>
+                      <a:r>
+                        <a:rPr lang="en">
+                          <a:solidFill>
+                            <a:srgbClr val="FFFFFF"/>
+                          </a:solidFill>
+                          <a:highlight>
+                            <a:srgbClr val="BF9000"/>
+                          </a:highlight>
+                        </a:rPr>
+                        <a:t>q1</a:t>
+                      </a:r>
+                      <a:endParaRPr>
+                        <a:solidFill>
+                          <a:srgbClr val="FFFFFF"/>
+                        </a:solidFill>
+                        <a:highlight>
+                          <a:srgbClr val="BF9000"/>
+                        </a:highlight>
+                      </a:endParaRPr>
+                    </a:p>
+                  </a:txBody>
+                  <a:tcPr marT="91425" marB="91425" marR="91425" marL="91425"/>
+                </a:tc>
                 <a:tc>
                   <a:txBody>
                     <a:bodyPr/>
@@ -18513,37 +17551,9 @@
                           <a:solidFill>
                             <a:srgbClr val="FFFFFF"/>
                           </a:solidFill>
-                        </a:rPr>
-                        <a:t>q1</a:t>
-                      </a:r>
-                      <a:endParaRPr>
-                        <a:solidFill>
-                          <a:srgbClr val="FFFFFF"/>
-                        </a:solidFill>
-                      </a:endParaRPr>
-                    </a:p>
-                  </a:txBody>
-                  <a:tcPr marT="91425" marB="91425" marR="91425" marL="91425"/>
-                </a:tc>
-                <a:tc>
-                  <a:txBody>
-                    <a:bodyPr/>
-                    <a:lstStyle/>
-                    <a:p>
-                      <a:pPr indent="0" lvl="0" marL="0" rtl="0" algn="l">
-                        <a:spcBef>
-                          <a:spcPts val="0"/>
-                        </a:spcBef>
-                        <a:spcAft>
-                          <a:spcPts val="0"/>
-                        </a:spcAft>
-                        <a:buNone/>
-                      </a:pPr>
-                      <a:r>
-                        <a:rPr lang="en">
-                          <a:solidFill>
-                            <a:srgbClr val="FFFFFF"/>
-                          </a:solidFill>
+                          <a:highlight>
+                            <a:srgbClr val="38761D"/>
+                          </a:highlight>
                         </a:rPr>
                         <a:t>q4</a:t>
                       </a:r>
@@ -18551,6 +17561,9 @@
                         <a:solidFill>
                           <a:srgbClr val="FFFFFF"/>
                         </a:solidFill>
+                        <a:highlight>
+                          <a:srgbClr val="38761D"/>
+                        </a:highlight>
                       </a:endParaRPr>
                     </a:p>
                   </a:txBody>
@@ -18672,9 +17685,6 @@
                           <a:solidFill>
                             <a:srgbClr val="FFFFFF"/>
                           </a:solidFill>
-                          <a:highlight>
-                            <a:srgbClr val="38761D"/>
-                          </a:highlight>
                         </a:rPr>
                         <a:t>q3</a:t>
                       </a:r>
@@ -18682,9 +17692,6 @@
                         <a:solidFill>
                           <a:srgbClr val="FFFFFF"/>
                         </a:solidFill>
-                        <a:highlight>
-                          <a:srgbClr val="38761D"/>
-                        </a:highlight>
                       </a:endParaRPr>
                     </a:p>
                   </a:txBody>
@@ -18709,9 +17716,6 @@
                           <a:solidFill>
                             <a:srgbClr val="FFFFFF"/>
                           </a:solidFill>
-                          <a:highlight>
-                            <a:srgbClr val="38761D"/>
-                          </a:highlight>
                         </a:rPr>
                         <a:t>q3</a:t>
                       </a:r>
@@ -18719,9 +17723,6 @@
                         <a:solidFill>
                           <a:srgbClr val="FFFFFF"/>
                         </a:solidFill>
-                        <a:highlight>
-                          <a:srgbClr val="38761D"/>
-                        </a:highlight>
                       </a:endParaRPr>
                     </a:p>
                   </a:txBody>
@@ -18779,9 +17780,6 @@
                           <a:solidFill>
                             <a:srgbClr val="FFFFFF"/>
                           </a:solidFill>
-                          <a:highlight>
-                            <a:srgbClr val="38761D"/>
-                          </a:highlight>
                         </a:rPr>
                         <a:t>q4 </a:t>
                       </a:r>
@@ -18789,9 +17787,6 @@
                         <a:solidFill>
                           <a:srgbClr val="FFFFFF"/>
                         </a:solidFill>
-                        <a:highlight>
-                          <a:srgbClr val="38761D"/>
-                        </a:highlight>
                       </a:endParaRPr>
                     </a:p>
                   </a:txBody>
@@ -18816,9 +17811,6 @@
                           <a:solidFill>
                             <a:srgbClr val="FFFFFF"/>
                           </a:solidFill>
-                          <a:highlight>
-                            <a:srgbClr val="38761D"/>
-                          </a:highlight>
                         </a:rPr>
                         <a:t>q4</a:t>
                       </a:r>
@@ -18826,9 +17818,6 @@
                         <a:solidFill>
                           <a:srgbClr val="FFFFFF"/>
                         </a:solidFill>
-                        <a:highlight>
-                          <a:srgbClr val="38761D"/>
-                        </a:highlight>
                       </a:endParaRPr>
                     </a:p>
                   </a:txBody>
@@ -18974,7 +17963,7 @@
         <p:spPr>
           <a:xfrm>
             <a:off x="363150" y="1091500"/>
-            <a:ext cx="3761700" cy="4063500"/>
+            <a:ext cx="3761700" cy="3786600"/>
           </a:xfrm>
           <a:prstGeom prst="rect">
             <a:avLst/>
@@ -19179,17 +18168,6 @@
               </a:rPr>
               <a:t>}</a:t>
             </a:r>
-            <a:r>
-              <a:rPr lang="en" sz="1800">
-                <a:solidFill>
-                  <a:schemeClr val="dk1"/>
-                </a:solidFill>
-                <a:highlight>
-                  <a:srgbClr val="38761D"/>
-                </a:highlight>
-              </a:rPr>
-              <a:t> </a:t>
-            </a:r>
             <a:endParaRPr sz="1800">
               <a:solidFill>
                 <a:schemeClr val="dk1"/>
@@ -19231,7 +18209,7 @@
                   <a:schemeClr val="dk1"/>
                 </a:solidFill>
               </a:rPr>
-              <a:t>On symbol 0:</a:t>
+              <a:t>On symbol 1:</a:t>
             </a:r>
             <a:endParaRPr sz="1800">
               <a:solidFill>
@@ -19255,7 +18233,7 @@
                   <a:schemeClr val="dk1"/>
                 </a:solidFill>
               </a:rPr>
-              <a:t>X = {q3, q4} go to q3 or q4</a:t>
+              <a:t>X = {q0, q1} go to q3 or q4</a:t>
             </a:r>
             <a:endParaRPr sz="1800">
               <a:solidFill>
@@ -19328,7 +18306,23 @@
                   <a:schemeClr val="dk1"/>
                 </a:solidFill>
               </a:rPr>
-              <a:t> no intersection with X</a:t>
+              <a:t> no </a:t>
+            </a:r>
+            <a:r>
+              <a:rPr lang="en" sz="1800">
+                <a:solidFill>
+                  <a:schemeClr val="dk1"/>
+                </a:solidFill>
+              </a:rPr>
+              <a:t>intersection</a:t>
+            </a:r>
+            <a:r>
+              <a:rPr lang="en" sz="1800">
+                <a:solidFill>
+                  <a:schemeClr val="dk1"/>
+                </a:solidFill>
+              </a:rPr>
+              <a:t> with X </a:t>
             </a:r>
             <a:endParaRPr sz="1800">
               <a:solidFill>
@@ -19371,10 +18365,10 @@
                   <a:schemeClr val="dk1"/>
                 </a:solidFill>
                 <a:highlight>
-                  <a:srgbClr val="38761D"/>
+                  <a:srgbClr val="BF9000"/>
                 </a:highlight>
               </a:rPr>
-              <a:t>S1</a:t>
+              <a:t>S3</a:t>
             </a:r>
             <a:r>
               <a:rPr lang="en" sz="1800">
@@ -19383,25 +18377,6 @@
                 </a:solidFill>
               </a:rPr>
               <a:t> is fully included in X, no split</a:t>
-            </a:r>
-            <a:endParaRPr sz="1800">
-              <a:solidFill>
-                <a:schemeClr val="dk1"/>
-              </a:solidFill>
-            </a:endParaRPr>
-          </a:p>
-          <a:p>
-            <a:pPr indent="0" lvl="0" marL="0" rtl="0" algn="l">
-              <a:spcBef>
-                <a:spcPts val="0"/>
-              </a:spcBef>
-              <a:spcAft>
-                <a:spcPts val="0"/>
-              </a:spcAft>
-              <a:buNone/>
-            </a:pPr>
-            <a:r>
-              <a:t/>
             </a:r>
             <a:endParaRPr sz="1800">
               <a:solidFill>
@@ -19420,7 +18395,7 @@
         <p:spPr>
           <a:xfrm>
             <a:off x="6149700" y="1324075"/>
-            <a:ext cx="2682600" cy="1293000"/>
+            <a:ext cx="2682600" cy="3509400"/>
           </a:xfrm>
           <a:prstGeom prst="rect">
             <a:avLst/>
@@ -19459,23 +18434,7 @@
                   <a:schemeClr val="dk1"/>
                 </a:solidFill>
               </a:rPr>
-              <a:t> </a:t>
-            </a:r>
-            <a:r>
-              <a:rPr lang="en" sz="1800">
-                <a:solidFill>
-                  <a:schemeClr val="dk1"/>
-                </a:solidFill>
-              </a:rPr>
-              <a:t>partitions</a:t>
-            </a:r>
-            <a:r>
-              <a:rPr lang="en" sz="1800">
-                <a:solidFill>
-                  <a:schemeClr val="dk1"/>
-                </a:solidFill>
-              </a:rPr>
-              <a:t> </a:t>
+              <a:t> partitions </a:t>
             </a:r>
             <a:endParaRPr sz="1800">
               <a:solidFill>
@@ -19581,6 +18540,135 @@
                 </a:solidFill>
               </a:rPr>
               <a:t> = {q0, q1}</a:t>
+            </a:r>
+            <a:endParaRPr sz="1800">
+              <a:solidFill>
+                <a:schemeClr val="dk1"/>
+              </a:solidFill>
+            </a:endParaRPr>
+          </a:p>
+          <a:p>
+            <a:pPr indent="0" lvl="0" marL="0" rtl="0" algn="l">
+              <a:spcBef>
+                <a:spcPts val="0"/>
+              </a:spcBef>
+              <a:spcAft>
+                <a:spcPts val="0"/>
+              </a:spcAft>
+              <a:buNone/>
+            </a:pPr>
+            <a:r>
+              <a:t/>
+            </a:r>
+            <a:endParaRPr sz="1800">
+              <a:solidFill>
+                <a:schemeClr val="dk1"/>
+              </a:solidFill>
+            </a:endParaRPr>
+          </a:p>
+          <a:p>
+            <a:pPr indent="0" lvl="0" marL="0" rtl="0" algn="l">
+              <a:spcBef>
+                <a:spcPts val="0"/>
+              </a:spcBef>
+              <a:spcAft>
+                <a:spcPts val="0"/>
+              </a:spcAft>
+              <a:buNone/>
+            </a:pPr>
+            <a:r>
+              <a:rPr lang="en" sz="1800">
+                <a:solidFill>
+                  <a:schemeClr val="dk1"/>
+                </a:solidFill>
+              </a:rPr>
+              <a:t>No conflicts so nothing added to worklist</a:t>
+            </a:r>
+            <a:endParaRPr sz="1800">
+              <a:solidFill>
+                <a:schemeClr val="dk1"/>
+              </a:solidFill>
+            </a:endParaRPr>
+          </a:p>
+          <a:p>
+            <a:pPr indent="0" lvl="0" marL="0" rtl="0" algn="l">
+              <a:spcBef>
+                <a:spcPts val="0"/>
+              </a:spcBef>
+              <a:spcAft>
+                <a:spcPts val="0"/>
+              </a:spcAft>
+              <a:buNone/>
+            </a:pPr>
+            <a:r>
+              <a:t/>
+            </a:r>
+            <a:endParaRPr sz="1800">
+              <a:solidFill>
+                <a:schemeClr val="dk1"/>
+              </a:solidFill>
+            </a:endParaRPr>
+          </a:p>
+          <a:p>
+            <a:pPr indent="0" lvl="0" marL="0" rtl="0" algn="l">
+              <a:spcBef>
+                <a:spcPts val="0"/>
+              </a:spcBef>
+              <a:spcAft>
+                <a:spcPts val="0"/>
+              </a:spcAft>
+              <a:buNone/>
+            </a:pPr>
+            <a:r>
+              <a:rPr lang="en" sz="1800">
+                <a:solidFill>
+                  <a:schemeClr val="dk1"/>
+                </a:solidFill>
+              </a:rPr>
+              <a:t>Worklist = {} </a:t>
+            </a:r>
+            <a:endParaRPr sz="1800">
+              <a:solidFill>
+                <a:schemeClr val="dk1"/>
+              </a:solidFill>
+            </a:endParaRPr>
+          </a:p>
+          <a:p>
+            <a:pPr indent="0" lvl="0" marL="0" rtl="0" algn="l">
+              <a:spcBef>
+                <a:spcPts val="0"/>
+              </a:spcBef>
+              <a:spcAft>
+                <a:spcPts val="0"/>
+              </a:spcAft>
+              <a:buNone/>
+            </a:pPr>
+            <a:r>
+              <a:t/>
+            </a:r>
+            <a:endParaRPr sz="1800">
+              <a:solidFill>
+                <a:schemeClr val="dk1"/>
+              </a:solidFill>
+            </a:endParaRPr>
+          </a:p>
+          <a:p>
+            <a:pPr indent="0" lvl="0" marL="0" rtl="0" algn="l">
+              <a:spcBef>
+                <a:spcPts val="0"/>
+              </a:spcBef>
+              <a:spcAft>
+                <a:spcPts val="0"/>
+              </a:spcAft>
+              <a:buNone/>
+            </a:pPr>
+            <a:r>
+              <a:rPr lang="en" sz="1800">
+                <a:solidFill>
+                  <a:schemeClr val="dk1"/>
+                </a:solidFill>
+              </a:rPr>
+              <a:t>Worklist empty, we’re done</a:t>
             </a:r>
             <a:endParaRPr sz="1800">
               <a:solidFill>
@@ -19599,6 +18687,285 @@
 </file>
 
 <file path=ppt/theme/theme1.xml><?xml version="1.0" encoding="utf-8"?>
+<a:theme xmlns:a="http://schemas.openxmlformats.org/drawingml/2006/main" xmlns:r="http://schemas.openxmlformats.org/officeDocument/2006/relationships" name="Simple Dark">
+  <a:themeElements>
+    <a:clrScheme name="Simple Dark">
+      <a:dk1>
+        <a:srgbClr val="FFFFFF"/>
+      </a:dk1>
+      <a:lt1>
+        <a:srgbClr val="212121"/>
+      </a:lt1>
+      <a:dk2>
+        <a:srgbClr val="303030"/>
+      </a:dk2>
+      <a:lt2>
+        <a:srgbClr val="ADADAD"/>
+      </a:lt2>
+      <a:accent1>
+        <a:srgbClr val="009688"/>
+      </a:accent1>
+      <a:accent2>
+        <a:srgbClr val="EEEEEE"/>
+      </a:accent2>
+      <a:accent3>
+        <a:srgbClr val="78909C"/>
+      </a:accent3>
+      <a:accent4>
+        <a:srgbClr val="FFAB40"/>
+      </a:accent4>
+      <a:accent5>
+        <a:srgbClr val="4DD0E1"/>
+      </a:accent5>
+      <a:accent6>
+        <a:srgbClr val="EEFF41"/>
+      </a:accent6>
+      <a:hlink>
+        <a:srgbClr val="4DD0E1"/>
+      </a:hlink>
+      <a:folHlink>
+        <a:srgbClr val="4DD0E1"/>
+      </a:folHlink>
+    </a:clrScheme>
+    <a:fontScheme name="Office">
+      <a:majorFont>
+        <a:latin typeface="Arial"/>
+        <a:ea typeface=""/>
+        <a:cs typeface=""/>
+        <a:font script="Jpan" typeface="ＭＳ Ｐゴシック"/>
+        <a:font script="Hang" typeface="맑은 고딕"/>
+        <a:font script="Hans" typeface="宋体"/>
+        <a:font script="Hant" typeface="新細明體"/>
+        <a:font script="Arab" typeface="Times New Roman"/>
+        <a:font script="Hebr" typeface="Times New Roman"/>
+        <a:font script="Thai" typeface="Angsana New"/>
+        <a:font script="Ethi" typeface="Nyala"/>
+        <a:font script="Beng" typeface="Vrinda"/>
+        <a:font script="Gujr" typeface="Shruti"/>
+        <a:font script="Khmr" typeface="MoolBoran"/>
+        <a:font script="Knda" typeface="Tunga"/>
+        <a:font script="Guru" typeface="Raavi"/>
+        <a:font script="Cans" typeface="Euphemia"/>
+        <a:font script="Cher" typeface="Plantagenet Cherokee"/>
+        <a:font script="Yiii" typeface="Microsoft Yi Baiti"/>
+        <a:font script="Tibt" typeface="Microsoft Himalaya"/>
+        <a:font script="Thaa" typeface="MV Boli"/>
+        <a:font script="Deva" typeface="Mangal"/>
+        <a:font script="Telu" typeface="Gautami"/>
+        <a:font script="Taml" typeface="Latha"/>
+        <a:font script="Syrc" typeface="Estrangelo Edessa"/>
+        <a:font script="Orya" typeface="Kalinga"/>
+        <a:font script="Mlym" typeface="Kartika"/>
+        <a:font script="Laoo" typeface="DokChampa"/>
+        <a:font script="Sinh" typeface="Iskoola Pota"/>
+        <a:font script="Mong" typeface="Mongolian Baiti"/>
+        <a:font script="Viet" typeface="Times New Roman"/>
+        <a:font script="Uigh" typeface="Microsoft Uighur"/>
+        <a:font script="Geor" typeface="Sylfaen"/>
+      </a:majorFont>
+      <a:minorFont>
+        <a:latin typeface="Arial"/>
+        <a:ea typeface=""/>
+        <a:cs typeface=""/>
+        <a:font script="Jpan" typeface="ＭＳ Ｐゴシック"/>
+        <a:font script="Hang" typeface="맑은 고딕"/>
+        <a:font script="Hans" typeface="宋体"/>
+        <a:font script="Hant" typeface="新細明體"/>
+        <a:font script="Arab" typeface="Arial"/>
+        <a:font script="Hebr" typeface="Arial"/>
+        <a:font script="Thai" typeface="Cordia New"/>
+        <a:font script="Ethi" typeface="Nyala"/>
+        <a:font script="Beng" typeface="Vrinda"/>
+        <a:font script="Gujr" typeface="Shruti"/>
+        <a:font script="Khmr" typeface="DaunPenh"/>
+        <a:font script="Knda" typeface="Tunga"/>
+        <a:font script="Guru" typeface="Raavi"/>
+        <a:font script="Cans" typeface="Euphemia"/>
+        <a:font script="Cher" typeface="Plantagenet Cherokee"/>
+        <a:font script="Yiii" typeface="Microsoft Yi Baiti"/>
+        <a:font script="Tibt" typeface="Microsoft Himalaya"/>
+        <a:font script="Thaa" typeface="MV Boli"/>
+        <a:font script="Deva" typeface="Mangal"/>
+        <a:font script="Telu" typeface="Gautami"/>
+        <a:font script="Taml" typeface="Latha"/>
+        <a:font script="Syrc" typeface="Estrangelo Edessa"/>
+        <a:font script="Orya" typeface="Kalinga"/>
+        <a:font script="Mlym" typeface="Kartika"/>
+        <a:font script="Laoo" typeface="DokChampa"/>
+        <a:font script="Sinh" typeface="Iskoola Pota"/>
+        <a:font script="Mong" typeface="Mongolian Baiti"/>
+        <a:font script="Viet" typeface="Arial"/>
+        <a:font script="Uigh" typeface="Microsoft Uighur"/>
+        <a:font script="Geor" typeface="Sylfaen"/>
+      </a:minorFont>
+    </a:fontScheme>
+    <a:fmtScheme name="Office">
+      <a:fillStyleLst>
+        <a:solidFill>
+          <a:schemeClr val="phClr"/>
+        </a:solidFill>
+        <a:gradFill rotWithShape="1">
+          <a:gsLst>
+            <a:gs pos="0">
+              <a:schemeClr val="phClr">
+                <a:tint val="50000"/>
+                <a:satMod val="300000"/>
+              </a:schemeClr>
+            </a:gs>
+            <a:gs pos="35000">
+              <a:schemeClr val="phClr">
+                <a:tint val="37000"/>
+                <a:satMod val="300000"/>
+              </a:schemeClr>
+            </a:gs>
+            <a:gs pos="100000">
+              <a:schemeClr val="phClr">
+                <a:tint val="15000"/>
+                <a:satMod val="350000"/>
+              </a:schemeClr>
+            </a:gs>
+          </a:gsLst>
+          <a:lin ang="16200000" scaled="1"/>
+        </a:gradFill>
+        <a:gradFill rotWithShape="1">
+          <a:gsLst>
+            <a:gs pos="0">
+              <a:schemeClr val="phClr">
+                <a:tint val="100000"/>
+                <a:shade val="100000"/>
+                <a:satMod val="130000"/>
+              </a:schemeClr>
+            </a:gs>
+            <a:gs pos="100000">
+              <a:schemeClr val="phClr">
+                <a:tint val="50000"/>
+                <a:shade val="100000"/>
+                <a:satMod val="350000"/>
+              </a:schemeClr>
+            </a:gs>
+          </a:gsLst>
+          <a:lin ang="16200000" scaled="0"/>
+        </a:gradFill>
+      </a:fillStyleLst>
+      <a:lnStyleLst>
+        <a:ln w="9525" cap="flat" cmpd="sng" algn="ctr">
+          <a:solidFill>
+            <a:schemeClr val="phClr">
+              <a:shade val="95000"/>
+              <a:satMod val="105000"/>
+            </a:schemeClr>
+          </a:solidFill>
+          <a:prstDash val="solid"/>
+        </a:ln>
+        <a:ln w="25400" cap="flat" cmpd="sng" algn="ctr">
+          <a:solidFill>
+            <a:schemeClr val="phClr"/>
+          </a:solidFill>
+          <a:prstDash val="solid"/>
+        </a:ln>
+        <a:ln w="38100" cap="flat" cmpd="sng" algn="ctr">
+          <a:solidFill>
+            <a:schemeClr val="phClr"/>
+          </a:solidFill>
+          <a:prstDash val="solid"/>
+        </a:ln>
+      </a:lnStyleLst>
+      <a:effectStyleLst>
+        <a:effectStyle>
+          <a:effectLst>
+            <a:outerShdw blurRad="40000" dist="20000" dir="5400000" rotWithShape="0">
+              <a:srgbClr val="000000">
+                <a:alpha val="38000"/>
+              </a:srgbClr>
+            </a:outerShdw>
+          </a:effectLst>
+        </a:effectStyle>
+        <a:effectStyle>
+          <a:effectLst>
+            <a:outerShdw blurRad="40000" dist="23000" dir="5400000" rotWithShape="0">
+              <a:srgbClr val="000000">
+                <a:alpha val="35000"/>
+              </a:srgbClr>
+            </a:outerShdw>
+          </a:effectLst>
+        </a:effectStyle>
+        <a:effectStyle>
+          <a:effectLst>
+            <a:outerShdw blurRad="40000" dist="23000" dir="5400000" rotWithShape="0">
+              <a:srgbClr val="000000">
+                <a:alpha val="35000"/>
+              </a:srgbClr>
+            </a:outerShdw>
+          </a:effectLst>
+          <a:scene3d>
+            <a:camera prst="orthographicFront">
+              <a:rot lat="0" lon="0" rev="0"/>
+            </a:camera>
+            <a:lightRig rig="threePt" dir="t">
+              <a:rot lat="0" lon="0" rev="1200000"/>
+            </a:lightRig>
+          </a:scene3d>
+          <a:sp3d>
+            <a:bevelT w="63500" h="25400"/>
+          </a:sp3d>
+        </a:effectStyle>
+      </a:effectStyleLst>
+      <a:bgFillStyleLst>
+        <a:solidFill>
+          <a:schemeClr val="phClr"/>
+        </a:solidFill>
+        <a:gradFill rotWithShape="1">
+          <a:gsLst>
+            <a:gs pos="0">
+              <a:schemeClr val="phClr">
+                <a:tint val="40000"/>
+                <a:satMod val="350000"/>
+              </a:schemeClr>
+            </a:gs>
+            <a:gs pos="40000">
+              <a:schemeClr val="phClr">
+                <a:tint val="45000"/>
+                <a:shade val="99000"/>
+                <a:satMod val="350000"/>
+              </a:schemeClr>
+            </a:gs>
+            <a:gs pos="100000">
+              <a:schemeClr val="phClr">
+                <a:shade val="20000"/>
+                <a:satMod val="255000"/>
+              </a:schemeClr>
+            </a:gs>
+          </a:gsLst>
+          <a:path path="circle">
+            <a:fillToRect l="50000" t="-80000" r="50000" b="180000"/>
+          </a:path>
+        </a:gradFill>
+        <a:gradFill rotWithShape="1">
+          <a:gsLst>
+            <a:gs pos="0">
+              <a:schemeClr val="phClr">
+                <a:tint val="80000"/>
+                <a:satMod val="300000"/>
+              </a:schemeClr>
+            </a:gs>
+            <a:gs pos="100000">
+              <a:schemeClr val="phClr">
+                <a:shade val="30000"/>
+                <a:satMod val="200000"/>
+              </a:schemeClr>
+            </a:gs>
+          </a:gsLst>
+          <a:path path="circle">
+            <a:fillToRect l="50000" t="50000" r="50000" b="50000"/>
+          </a:path>
+        </a:gradFill>
+      </a:bgFillStyleLst>
+    </a:fmtScheme>
+  </a:themeElements>
+</a:theme>
+</file>
+
+<file path=ppt/theme/theme2.xml><?xml version="1.0" encoding="utf-8"?>
 <a:theme xmlns:a="http://schemas.openxmlformats.org/drawingml/2006/main" xmlns:r="http://schemas.openxmlformats.org/officeDocument/2006/relationships">
   <a:themeElements>
     <a:clrScheme name="Default">
@@ -19875,283 +19242,4 @@
     </a:fmtScheme>
   </a:themeElements>
 </a:theme>
-</file>
-
-<file path=ppt/theme/theme2.xml><?xml version="1.0" encoding="utf-8"?>
-<a:theme xmlns:a="http://schemas.openxmlformats.org/drawingml/2006/main" xmlns:r="http://schemas.openxmlformats.org/officeDocument/2006/relationships" name="Simple Dark">
-  <a:themeElements>
-    <a:clrScheme name="Simple Dark">
-      <a:dk1>
-        <a:srgbClr val="FFFFFF"/>
-      </a:dk1>
-      <a:lt1>
-        <a:srgbClr val="212121"/>
-      </a:lt1>
-      <a:dk2>
-        <a:srgbClr val="303030"/>
-      </a:dk2>
-      <a:lt2>
-        <a:srgbClr val="ADADAD"/>
-      </a:lt2>
-      <a:accent1>
-        <a:srgbClr val="009688"/>
-      </a:accent1>
-      <a:accent2>
-        <a:srgbClr val="EEEEEE"/>
-      </a:accent2>
-      <a:accent3>
-        <a:srgbClr val="78909C"/>
-      </a:accent3>
-      <a:accent4>
-        <a:srgbClr val="FFAB40"/>
-      </a:accent4>
-      <a:accent5>
-        <a:srgbClr val="4DD0E1"/>
-      </a:accent5>
-      <a:accent6>
-        <a:srgbClr val="EEFF41"/>
-      </a:accent6>
-      <a:hlink>
-        <a:srgbClr val="4DD0E1"/>
-      </a:hlink>
-      <a:folHlink>
-        <a:srgbClr val="4DD0E1"/>
-      </a:folHlink>
-    </a:clrScheme>
-    <a:fontScheme name="Office">
-      <a:majorFont>
-        <a:latin typeface="Arial"/>
-        <a:ea typeface=""/>
-        <a:cs typeface=""/>
-        <a:font script="Jpan" typeface="ＭＳ Ｐゴシック"/>
-        <a:font script="Hang" typeface="맑은 고딕"/>
-        <a:font script="Hans" typeface="宋体"/>
-        <a:font script="Hant" typeface="新細明體"/>
-        <a:font script="Arab" typeface="Times New Roman"/>
-        <a:font script="Hebr" typeface="Times New Roman"/>
-        <a:font script="Thai" typeface="Angsana New"/>
-        <a:font script="Ethi" typeface="Nyala"/>
-        <a:font script="Beng" typeface="Vrinda"/>
-        <a:font script="Gujr" typeface="Shruti"/>
-        <a:font script="Khmr" typeface="MoolBoran"/>
-        <a:font script="Knda" typeface="Tunga"/>
-        <a:font script="Guru" typeface="Raavi"/>
-        <a:font script="Cans" typeface="Euphemia"/>
-        <a:font script="Cher" typeface="Plantagenet Cherokee"/>
-        <a:font script="Yiii" typeface="Microsoft Yi Baiti"/>
-        <a:font script="Tibt" typeface="Microsoft Himalaya"/>
-        <a:font script="Thaa" typeface="MV Boli"/>
-        <a:font script="Deva" typeface="Mangal"/>
-        <a:font script="Telu" typeface="Gautami"/>
-        <a:font script="Taml" typeface="Latha"/>
-        <a:font script="Syrc" typeface="Estrangelo Edessa"/>
-        <a:font script="Orya" typeface="Kalinga"/>
-        <a:font script="Mlym" typeface="Kartika"/>
-        <a:font script="Laoo" typeface="DokChampa"/>
-        <a:font script="Sinh" typeface="Iskoola Pota"/>
-        <a:font script="Mong" typeface="Mongolian Baiti"/>
-        <a:font script="Viet" typeface="Times New Roman"/>
-        <a:font script="Uigh" typeface="Microsoft Uighur"/>
-        <a:font script="Geor" typeface="Sylfaen"/>
-      </a:majorFont>
-      <a:minorFont>
-        <a:latin typeface="Arial"/>
-        <a:ea typeface=""/>
-        <a:cs typeface=""/>
-        <a:font script="Jpan" typeface="ＭＳ Ｐゴシック"/>
-        <a:font script="Hang" typeface="맑은 고딕"/>
-        <a:font script="Hans" typeface="宋体"/>
-        <a:font script="Hant" typeface="新細明體"/>
-        <a:font script="Arab" typeface="Arial"/>
-        <a:font script="Hebr" typeface="Arial"/>
-        <a:font script="Thai" typeface="Cordia New"/>
-        <a:font script="Ethi" typeface="Nyala"/>
-        <a:font script="Beng" typeface="Vrinda"/>
-        <a:font script="Gujr" typeface="Shruti"/>
-        <a:font script="Khmr" typeface="DaunPenh"/>
-        <a:font script="Knda" typeface="Tunga"/>
-        <a:font script="Guru" typeface="Raavi"/>
-        <a:font script="Cans" typeface="Euphemia"/>
-        <a:font script="Cher" typeface="Plantagenet Cherokee"/>
-        <a:font script="Yiii" typeface="Microsoft Yi Baiti"/>
-        <a:font script="Tibt" typeface="Microsoft Himalaya"/>
-        <a:font script="Thaa" typeface="MV Boli"/>
-        <a:font script="Deva" typeface="Mangal"/>
-        <a:font script="Telu" typeface="Gautami"/>
-        <a:font script="Taml" typeface="Latha"/>
-        <a:font script="Syrc" typeface="Estrangelo Edessa"/>
-        <a:font script="Orya" typeface="Kalinga"/>
-        <a:font script="Mlym" typeface="Kartika"/>
-        <a:font script="Laoo" typeface="DokChampa"/>
-        <a:font script="Sinh" typeface="Iskoola Pota"/>
-        <a:font script="Mong" typeface="Mongolian Baiti"/>
-        <a:font script="Viet" typeface="Arial"/>
-        <a:font script="Uigh" typeface="Microsoft Uighur"/>
-        <a:font script="Geor" typeface="Sylfaen"/>
-      </a:minorFont>
-    </a:fontScheme>
-    <a:fmtScheme name="Office">
-      <a:fillStyleLst>
-        <a:solidFill>
-          <a:schemeClr val="phClr"/>
-        </a:solidFill>
-        <a:gradFill rotWithShape="1">
-          <a:gsLst>
-            <a:gs pos="0">
-              <a:schemeClr val="phClr">
-                <a:tint val="50000"/>
-                <a:satMod val="300000"/>
-              </a:schemeClr>
-            </a:gs>
-            <a:gs pos="35000">
-              <a:schemeClr val="phClr">
-                <a:tint val="37000"/>
-                <a:satMod val="300000"/>
-              </a:schemeClr>
-            </a:gs>
-            <a:gs pos="100000">
-              <a:schemeClr val="phClr">
-                <a:tint val="15000"/>
-                <a:satMod val="350000"/>
-              </a:schemeClr>
-            </a:gs>
-          </a:gsLst>
-          <a:lin ang="16200000" scaled="1"/>
-        </a:gradFill>
-        <a:gradFill rotWithShape="1">
-          <a:gsLst>
-            <a:gs pos="0">
-              <a:schemeClr val="phClr">
-                <a:tint val="100000"/>
-                <a:shade val="100000"/>
-                <a:satMod val="130000"/>
-              </a:schemeClr>
-            </a:gs>
-            <a:gs pos="100000">
-              <a:schemeClr val="phClr">
-                <a:tint val="50000"/>
-                <a:shade val="100000"/>
-                <a:satMod val="350000"/>
-              </a:schemeClr>
-            </a:gs>
-          </a:gsLst>
-          <a:lin ang="16200000" scaled="0"/>
-        </a:gradFill>
-      </a:fillStyleLst>
-      <a:lnStyleLst>
-        <a:ln w="9525" cap="flat" cmpd="sng" algn="ctr">
-          <a:solidFill>
-            <a:schemeClr val="phClr">
-              <a:shade val="95000"/>
-              <a:satMod val="105000"/>
-            </a:schemeClr>
-          </a:solidFill>
-          <a:prstDash val="solid"/>
-        </a:ln>
-        <a:ln w="25400" cap="flat" cmpd="sng" algn="ctr">
-          <a:solidFill>
-            <a:schemeClr val="phClr"/>
-          </a:solidFill>
-          <a:prstDash val="solid"/>
-        </a:ln>
-        <a:ln w="38100" cap="flat" cmpd="sng" algn="ctr">
-          <a:solidFill>
-            <a:schemeClr val="phClr"/>
-          </a:solidFill>
-          <a:prstDash val="solid"/>
-        </a:ln>
-      </a:lnStyleLst>
-      <a:effectStyleLst>
-        <a:effectStyle>
-          <a:effectLst>
-            <a:outerShdw blurRad="40000" dist="20000" dir="5400000" rotWithShape="0">
-              <a:srgbClr val="000000">
-                <a:alpha val="38000"/>
-              </a:srgbClr>
-            </a:outerShdw>
-          </a:effectLst>
-        </a:effectStyle>
-        <a:effectStyle>
-          <a:effectLst>
-            <a:outerShdw blurRad="40000" dist="23000" dir="5400000" rotWithShape="0">
-              <a:srgbClr val="000000">
-                <a:alpha val="35000"/>
-              </a:srgbClr>
-            </a:outerShdw>
-          </a:effectLst>
-        </a:effectStyle>
-        <a:effectStyle>
-          <a:effectLst>
-            <a:outerShdw blurRad="40000" dist="23000" dir="5400000" rotWithShape="0">
-              <a:srgbClr val="000000">
-                <a:alpha val="35000"/>
-              </a:srgbClr>
-            </a:outerShdw>
-          </a:effectLst>
-          <a:scene3d>
-            <a:camera prst="orthographicFront">
-              <a:rot lat="0" lon="0" rev="0"/>
-            </a:camera>
-            <a:lightRig rig="threePt" dir="t">
-              <a:rot lat="0" lon="0" rev="1200000"/>
-            </a:lightRig>
-          </a:scene3d>
-          <a:sp3d>
-            <a:bevelT w="63500" h="25400"/>
-          </a:sp3d>
-        </a:effectStyle>
-      </a:effectStyleLst>
-      <a:bgFillStyleLst>
-        <a:solidFill>
-          <a:schemeClr val="phClr"/>
-        </a:solidFill>
-        <a:gradFill rotWithShape="1">
-          <a:gsLst>
-            <a:gs pos="0">
-              <a:schemeClr val="phClr">
-                <a:tint val="40000"/>
-                <a:satMod val="350000"/>
-              </a:schemeClr>
-            </a:gs>
-            <a:gs pos="40000">
-              <a:schemeClr val="phClr">
-                <a:tint val="45000"/>
-                <a:shade val="99000"/>
-                <a:satMod val="350000"/>
-              </a:schemeClr>
-            </a:gs>
-            <a:gs pos="100000">
-              <a:schemeClr val="phClr">
-                <a:shade val="20000"/>
-                <a:satMod val="255000"/>
-              </a:schemeClr>
-            </a:gs>
-          </a:gsLst>
-          <a:path path="circle">
-            <a:fillToRect l="50000" t="-80000" r="50000" b="180000"/>
-          </a:path>
-        </a:gradFill>
-        <a:gradFill rotWithShape="1">
-          <a:gsLst>
-            <a:gs pos="0">
-              <a:schemeClr val="phClr">
-                <a:tint val="80000"/>
-                <a:satMod val="300000"/>
-              </a:schemeClr>
-            </a:gs>
-            <a:gs pos="100000">
-              <a:schemeClr val="phClr">
-                <a:shade val="30000"/>
-                <a:satMod val="200000"/>
-              </a:schemeClr>
-            </a:gs>
-          </a:gsLst>
-          <a:path path="circle">
-            <a:fillToRect l="50000" t="50000" r="50000" b="50000"/>
-          </a:path>
-        </a:gradFill>
-      </a:bgFillStyleLst>
-    </a:fmtScheme>
-  </a:themeElements>
-</a:theme>
 </file>